--- a/Presentation/DQN in Gymnasium 2D Environments.pptx
+++ b/Presentation/DQN in Gymnasium 2D Environments.pptx
@@ -4,19 +4,24 @@
   <p:sldMasterIdLst>
     <p:sldMasterId id="2147483648" r:id="rId1"/>
   </p:sldMasterIdLst>
+  <p:notesMasterIdLst>
+    <p:notesMasterId r:id="rId16"/>
+  </p:notesMasterIdLst>
   <p:sldIdLst>
     <p:sldId id="256" r:id="rId2"/>
-    <p:sldId id="257" r:id="rId3"/>
-    <p:sldId id="260" r:id="rId4"/>
-    <p:sldId id="259" r:id="rId5"/>
-    <p:sldId id="261" r:id="rId6"/>
-    <p:sldId id="262" r:id="rId7"/>
-    <p:sldId id="258" r:id="rId8"/>
-    <p:sldId id="263" r:id="rId9"/>
-    <p:sldId id="264" r:id="rId10"/>
-    <p:sldId id="265" r:id="rId11"/>
-    <p:sldId id="266" r:id="rId12"/>
-    <p:sldId id="267" r:id="rId13"/>
+    <p:sldId id="268" r:id="rId3"/>
+    <p:sldId id="269" r:id="rId4"/>
+    <p:sldId id="257" r:id="rId5"/>
+    <p:sldId id="260" r:id="rId6"/>
+    <p:sldId id="259" r:id="rId7"/>
+    <p:sldId id="261" r:id="rId8"/>
+    <p:sldId id="262" r:id="rId9"/>
+    <p:sldId id="258" r:id="rId10"/>
+    <p:sldId id="263" r:id="rId11"/>
+    <p:sldId id="264" r:id="rId12"/>
+    <p:sldId id="265" r:id="rId13"/>
+    <p:sldId id="266" r:id="rId14"/>
+    <p:sldId id="267" r:id="rId15"/>
   </p:sldIdLst>
   <p:sldSz cx="12192000" cy="6858000"/>
   <p:notesSz cx="6858000" cy="9144000"/>
@@ -115,7 +120,1064 @@
       </a:defRPr>
     </a:lvl9pPr>
   </p:defaultTextStyle>
+  <p:extLst>
+    <p:ext uri="{EFAFB233-063F-42B5-8137-9DF3F51BA10A}">
+      <p15:sldGuideLst xmlns:p15="http://schemas.microsoft.com/office/powerpoint/2012/main"/>
+    </p:ext>
+  </p:extLst>
 </p:presentation>
+</file>
+
+<file path=ppt/notesMasters/notesMaster1.xml><?xml version="1.0" encoding="utf-8"?>
+<p:notesMaster xmlns:a="http://schemas.openxmlformats.org/drawingml/2006/main" xmlns:r="http://schemas.openxmlformats.org/officeDocument/2006/relationships" xmlns:p="http://schemas.openxmlformats.org/presentationml/2006/main">
+  <p:cSld>
+    <p:bg>
+      <p:bgRef idx="1001">
+        <a:schemeClr val="bg1"/>
+      </p:bgRef>
+    </p:bg>
+    <p:spTree>
+      <p:nvGrpSpPr>
+        <p:cNvPr id="1" name=""/>
+        <p:cNvGrpSpPr/>
+        <p:nvPr/>
+      </p:nvGrpSpPr>
+      <p:grpSpPr>
+        <a:xfrm>
+          <a:off x="0" y="0"/>
+          <a:ext cx="0" cy="0"/>
+          <a:chOff x="0" y="0"/>
+          <a:chExt cx="0" cy="0"/>
+        </a:xfrm>
+      </p:grpSpPr>
+      <p:sp>
+        <p:nvSpPr>
+          <p:cNvPr id="2" name="Marcador de encabezado 1"/>
+          <p:cNvSpPr>
+            <a:spLocks noGrp="1"/>
+          </p:cNvSpPr>
+          <p:nvPr>
+            <p:ph type="hdr" sz="quarter"/>
+          </p:nvPr>
+        </p:nvSpPr>
+        <p:spPr>
+          <a:xfrm>
+            <a:off x="0" y="0"/>
+            <a:ext cx="2971800" cy="458788"/>
+          </a:xfrm>
+          <a:prstGeom prst="rect">
+            <a:avLst/>
+          </a:prstGeom>
+        </p:spPr>
+        <p:txBody>
+          <a:bodyPr vert="horz" lIns="91440" tIns="45720" rIns="91440" bIns="45720" rtlCol="0"/>
+          <a:lstStyle>
+            <a:lvl1pPr algn="l">
+              <a:defRPr sz="1200"/>
+            </a:lvl1pPr>
+          </a:lstStyle>
+          <a:p>
+            <a:endParaRPr lang="es-ES"/>
+          </a:p>
+        </p:txBody>
+      </p:sp>
+      <p:sp>
+        <p:nvSpPr>
+          <p:cNvPr id="3" name="Marcador de fecha 2"/>
+          <p:cNvSpPr>
+            <a:spLocks noGrp="1"/>
+          </p:cNvSpPr>
+          <p:nvPr>
+            <p:ph type="dt" idx="1"/>
+          </p:nvPr>
+        </p:nvSpPr>
+        <p:spPr>
+          <a:xfrm>
+            <a:off x="3884613" y="0"/>
+            <a:ext cx="2971800" cy="458788"/>
+          </a:xfrm>
+          <a:prstGeom prst="rect">
+            <a:avLst/>
+          </a:prstGeom>
+        </p:spPr>
+        <p:txBody>
+          <a:bodyPr vert="horz" lIns="91440" tIns="45720" rIns="91440" bIns="45720" rtlCol="0"/>
+          <a:lstStyle>
+            <a:lvl1pPr algn="r">
+              <a:defRPr sz="1200"/>
+            </a:lvl1pPr>
+          </a:lstStyle>
+          <a:p>
+            <a:fld id="{8BC83848-F510-4A68-9193-CBCB01082FFE}" type="datetimeFigureOut">
+              <a:rPr lang="es-ES" smtClean="0"/>
+              <a:t>19/12/2025</a:t>
+            </a:fld>
+            <a:endParaRPr lang="es-ES"/>
+          </a:p>
+        </p:txBody>
+      </p:sp>
+      <p:sp>
+        <p:nvSpPr>
+          <p:cNvPr id="4" name="Marcador de imagen de diapositiva 3"/>
+          <p:cNvSpPr>
+            <a:spLocks noGrp="1" noRot="1" noChangeAspect="1"/>
+          </p:cNvSpPr>
+          <p:nvPr>
+            <p:ph type="sldImg" idx="2"/>
+          </p:nvPr>
+        </p:nvSpPr>
+        <p:spPr>
+          <a:xfrm>
+            <a:off x="685800" y="1143000"/>
+            <a:ext cx="5486400" cy="3086100"/>
+          </a:xfrm>
+          <a:prstGeom prst="rect">
+            <a:avLst/>
+          </a:prstGeom>
+          <a:noFill/>
+          <a:ln w="12700">
+            <a:solidFill>
+              <a:prstClr val="black"/>
+            </a:solidFill>
+          </a:ln>
+        </p:spPr>
+        <p:txBody>
+          <a:bodyPr vert="horz" lIns="91440" tIns="45720" rIns="91440" bIns="45720" rtlCol="0" anchor="ctr"/>
+          <a:lstStyle/>
+          <a:p>
+            <a:endParaRPr lang="es-ES"/>
+          </a:p>
+        </p:txBody>
+      </p:sp>
+      <p:sp>
+        <p:nvSpPr>
+          <p:cNvPr id="5" name="Marcador de notas 4"/>
+          <p:cNvSpPr>
+            <a:spLocks noGrp="1"/>
+          </p:cNvSpPr>
+          <p:nvPr>
+            <p:ph type="body" sz="quarter" idx="3"/>
+          </p:nvPr>
+        </p:nvSpPr>
+        <p:spPr>
+          <a:xfrm>
+            <a:off x="685800" y="4400550"/>
+            <a:ext cx="5486400" cy="3600450"/>
+          </a:xfrm>
+          <a:prstGeom prst="rect">
+            <a:avLst/>
+          </a:prstGeom>
+        </p:spPr>
+        <p:txBody>
+          <a:bodyPr vert="horz" lIns="91440" tIns="45720" rIns="91440" bIns="45720" rtlCol="0"/>
+          <a:lstStyle/>
+          <a:p>
+            <a:pPr lvl="0"/>
+            <a:r>
+              <a:rPr lang="es-ES"/>
+              <a:t>Haga clic para modificar los estilos de texto del patrón</a:t>
+            </a:r>
+          </a:p>
+          <a:p>
+            <a:pPr lvl="1"/>
+            <a:r>
+              <a:rPr lang="es-ES"/>
+              <a:t>Segundo nivel</a:t>
+            </a:r>
+          </a:p>
+          <a:p>
+            <a:pPr lvl="2"/>
+            <a:r>
+              <a:rPr lang="es-ES"/>
+              <a:t>Tercer nivel</a:t>
+            </a:r>
+          </a:p>
+          <a:p>
+            <a:pPr lvl="3"/>
+            <a:r>
+              <a:rPr lang="es-ES"/>
+              <a:t>Cuarto nivel</a:t>
+            </a:r>
+          </a:p>
+          <a:p>
+            <a:pPr lvl="4"/>
+            <a:r>
+              <a:rPr lang="es-ES"/>
+              <a:t>Quinto nivel</a:t>
+            </a:r>
+          </a:p>
+        </p:txBody>
+      </p:sp>
+      <p:sp>
+        <p:nvSpPr>
+          <p:cNvPr id="6" name="Marcador de pie de página 5"/>
+          <p:cNvSpPr>
+            <a:spLocks noGrp="1"/>
+          </p:cNvSpPr>
+          <p:nvPr>
+            <p:ph type="ftr" sz="quarter" idx="4"/>
+          </p:nvPr>
+        </p:nvSpPr>
+        <p:spPr>
+          <a:xfrm>
+            <a:off x="0" y="8685213"/>
+            <a:ext cx="2971800" cy="458787"/>
+          </a:xfrm>
+          <a:prstGeom prst="rect">
+            <a:avLst/>
+          </a:prstGeom>
+        </p:spPr>
+        <p:txBody>
+          <a:bodyPr vert="horz" lIns="91440" tIns="45720" rIns="91440" bIns="45720" rtlCol="0" anchor="b"/>
+          <a:lstStyle>
+            <a:lvl1pPr algn="l">
+              <a:defRPr sz="1200"/>
+            </a:lvl1pPr>
+          </a:lstStyle>
+          <a:p>
+            <a:endParaRPr lang="es-ES"/>
+          </a:p>
+        </p:txBody>
+      </p:sp>
+      <p:sp>
+        <p:nvSpPr>
+          <p:cNvPr id="7" name="Marcador de número de diapositiva 6"/>
+          <p:cNvSpPr>
+            <a:spLocks noGrp="1"/>
+          </p:cNvSpPr>
+          <p:nvPr>
+            <p:ph type="sldNum" sz="quarter" idx="5"/>
+          </p:nvPr>
+        </p:nvSpPr>
+        <p:spPr>
+          <a:xfrm>
+            <a:off x="3884613" y="8685213"/>
+            <a:ext cx="2971800" cy="458787"/>
+          </a:xfrm>
+          <a:prstGeom prst="rect">
+            <a:avLst/>
+          </a:prstGeom>
+        </p:spPr>
+        <p:txBody>
+          <a:bodyPr vert="horz" lIns="91440" tIns="45720" rIns="91440" bIns="45720" rtlCol="0" anchor="b"/>
+          <a:lstStyle>
+            <a:lvl1pPr algn="r">
+              <a:defRPr sz="1200"/>
+            </a:lvl1pPr>
+          </a:lstStyle>
+          <a:p>
+            <a:fld id="{DAF6C058-3044-4944-84AE-9E00DE934B16}" type="slidenum">
+              <a:rPr lang="es-ES" smtClean="0"/>
+              <a:t>‹Nº›</a:t>
+            </a:fld>
+            <a:endParaRPr lang="es-ES"/>
+          </a:p>
+        </p:txBody>
+      </p:sp>
+    </p:spTree>
+    <p:extLst>
+      <p:ext uri="{BB962C8B-B14F-4D97-AF65-F5344CB8AC3E}">
+        <p14:creationId xmlns:p14="http://schemas.microsoft.com/office/powerpoint/2010/main" val="3989809854"/>
+      </p:ext>
+    </p:extLst>
+  </p:cSld>
+  <p:clrMap bg1="lt1" tx1="dk1" bg2="lt2" tx2="dk2" accent1="accent1" accent2="accent2" accent3="accent3" accent4="accent4" accent5="accent5" accent6="accent6" hlink="hlink" folHlink="folHlink"/>
+  <p:notesStyle>
+    <a:lvl1pPr marL="0" algn="l" defTabSz="914400" rtl="0" eaLnBrk="1" latinLnBrk="0" hangingPunct="1">
+      <a:defRPr sz="1200" kern="1200">
+        <a:solidFill>
+          <a:schemeClr val="tx1"/>
+        </a:solidFill>
+        <a:latin typeface="+mn-lt"/>
+        <a:ea typeface="+mn-ea"/>
+        <a:cs typeface="+mn-cs"/>
+      </a:defRPr>
+    </a:lvl1pPr>
+    <a:lvl2pPr marL="457200" algn="l" defTabSz="914400" rtl="0" eaLnBrk="1" latinLnBrk="0" hangingPunct="1">
+      <a:defRPr sz="1200" kern="1200">
+        <a:solidFill>
+          <a:schemeClr val="tx1"/>
+        </a:solidFill>
+        <a:latin typeface="+mn-lt"/>
+        <a:ea typeface="+mn-ea"/>
+        <a:cs typeface="+mn-cs"/>
+      </a:defRPr>
+    </a:lvl2pPr>
+    <a:lvl3pPr marL="914400" algn="l" defTabSz="914400" rtl="0" eaLnBrk="1" latinLnBrk="0" hangingPunct="1">
+      <a:defRPr sz="1200" kern="1200">
+        <a:solidFill>
+          <a:schemeClr val="tx1"/>
+        </a:solidFill>
+        <a:latin typeface="+mn-lt"/>
+        <a:ea typeface="+mn-ea"/>
+        <a:cs typeface="+mn-cs"/>
+      </a:defRPr>
+    </a:lvl3pPr>
+    <a:lvl4pPr marL="1371600" algn="l" defTabSz="914400" rtl="0" eaLnBrk="1" latinLnBrk="0" hangingPunct="1">
+      <a:defRPr sz="1200" kern="1200">
+        <a:solidFill>
+          <a:schemeClr val="tx1"/>
+        </a:solidFill>
+        <a:latin typeface="+mn-lt"/>
+        <a:ea typeface="+mn-ea"/>
+        <a:cs typeface="+mn-cs"/>
+      </a:defRPr>
+    </a:lvl4pPr>
+    <a:lvl5pPr marL="1828800" algn="l" defTabSz="914400" rtl="0" eaLnBrk="1" latinLnBrk="0" hangingPunct="1">
+      <a:defRPr sz="1200" kern="1200">
+        <a:solidFill>
+          <a:schemeClr val="tx1"/>
+        </a:solidFill>
+        <a:latin typeface="+mn-lt"/>
+        <a:ea typeface="+mn-ea"/>
+        <a:cs typeface="+mn-cs"/>
+      </a:defRPr>
+    </a:lvl5pPr>
+    <a:lvl6pPr marL="2286000" algn="l" defTabSz="914400" rtl="0" eaLnBrk="1" latinLnBrk="0" hangingPunct="1">
+      <a:defRPr sz="1200" kern="1200">
+        <a:solidFill>
+          <a:schemeClr val="tx1"/>
+        </a:solidFill>
+        <a:latin typeface="+mn-lt"/>
+        <a:ea typeface="+mn-ea"/>
+        <a:cs typeface="+mn-cs"/>
+      </a:defRPr>
+    </a:lvl6pPr>
+    <a:lvl7pPr marL="2743200" algn="l" defTabSz="914400" rtl="0" eaLnBrk="1" latinLnBrk="0" hangingPunct="1">
+      <a:defRPr sz="1200" kern="1200">
+        <a:solidFill>
+          <a:schemeClr val="tx1"/>
+        </a:solidFill>
+        <a:latin typeface="+mn-lt"/>
+        <a:ea typeface="+mn-ea"/>
+        <a:cs typeface="+mn-cs"/>
+      </a:defRPr>
+    </a:lvl7pPr>
+    <a:lvl8pPr marL="3200400" algn="l" defTabSz="914400" rtl="0" eaLnBrk="1" latinLnBrk="0" hangingPunct="1">
+      <a:defRPr sz="1200" kern="1200">
+        <a:solidFill>
+          <a:schemeClr val="tx1"/>
+        </a:solidFill>
+        <a:latin typeface="+mn-lt"/>
+        <a:ea typeface="+mn-ea"/>
+        <a:cs typeface="+mn-cs"/>
+      </a:defRPr>
+    </a:lvl8pPr>
+    <a:lvl9pPr marL="3657600" algn="l" defTabSz="914400" rtl="0" eaLnBrk="1" latinLnBrk="0" hangingPunct="1">
+      <a:defRPr sz="1200" kern="1200">
+        <a:solidFill>
+          <a:schemeClr val="tx1"/>
+        </a:solidFill>
+        <a:latin typeface="+mn-lt"/>
+        <a:ea typeface="+mn-ea"/>
+        <a:cs typeface="+mn-cs"/>
+      </a:defRPr>
+    </a:lvl9pPr>
+  </p:notesStyle>
+</p:notesMaster>
+</file>
+
+<file path=ppt/notesSlides/notesSlide1.xml><?xml version="1.0" encoding="utf-8"?>
+<p:notes xmlns:a="http://schemas.openxmlformats.org/drawingml/2006/main" xmlns:r="http://schemas.openxmlformats.org/officeDocument/2006/relationships" xmlns:p="http://schemas.openxmlformats.org/presentationml/2006/main">
+  <p:cSld>
+    <p:spTree>
+      <p:nvGrpSpPr>
+        <p:cNvPr id="1" name=""/>
+        <p:cNvGrpSpPr/>
+        <p:nvPr/>
+      </p:nvGrpSpPr>
+      <p:grpSpPr>
+        <a:xfrm>
+          <a:off x="0" y="0"/>
+          <a:ext cx="0" cy="0"/>
+          <a:chOff x="0" y="0"/>
+          <a:chExt cx="0" cy="0"/>
+        </a:xfrm>
+      </p:grpSpPr>
+      <p:sp>
+        <p:nvSpPr>
+          <p:cNvPr id="2" name="Marcador de imagen de diapositiva 1"/>
+          <p:cNvSpPr>
+            <a:spLocks noGrp="1" noRot="1" noChangeAspect="1"/>
+          </p:cNvSpPr>
+          <p:nvPr>
+            <p:ph type="sldImg"/>
+          </p:nvPr>
+        </p:nvSpPr>
+        <p:spPr/>
+      </p:sp>
+      <p:sp>
+        <p:nvSpPr>
+          <p:cNvPr id="3" name="Marcador de notas 2"/>
+          <p:cNvSpPr>
+            <a:spLocks noGrp="1"/>
+          </p:cNvSpPr>
+          <p:nvPr>
+            <p:ph type="body" idx="1"/>
+          </p:nvPr>
+        </p:nvSpPr>
+        <p:spPr/>
+        <p:txBody>
+          <a:bodyPr/>
+          <a:lstStyle/>
+          <a:p>
+            <a:endParaRPr lang="en-US" sz="1200" b="0" kern="1200" dirty="0">
+              <a:solidFill>
+                <a:schemeClr val="tx1"/>
+              </a:solidFill>
+              <a:effectLst/>
+              <a:latin typeface="+mn-lt"/>
+              <a:ea typeface="+mn-ea"/>
+              <a:cs typeface="+mn-cs"/>
+            </a:endParaRPr>
+          </a:p>
+          <a:p>
+            <a:r>
+              <a:rPr lang="es-ES" sz="1200" b="0" kern="1200" dirty="0" err="1">
+                <a:solidFill>
+                  <a:schemeClr val="tx1"/>
+                </a:solidFill>
+                <a:effectLst/>
+                <a:latin typeface="+mn-lt"/>
+                <a:ea typeface="+mn-ea"/>
+                <a:cs typeface="+mn-cs"/>
+              </a:rPr>
+              <a:t>q_target</a:t>
+            </a:r>
+            <a:r>
+              <a:rPr lang="es-ES" sz="1200" b="0" kern="1200" dirty="0">
+                <a:solidFill>
+                  <a:schemeClr val="tx1"/>
+                </a:solidFill>
+                <a:effectLst/>
+                <a:latin typeface="+mn-lt"/>
+                <a:ea typeface="+mn-ea"/>
+                <a:cs typeface="+mn-cs"/>
+              </a:rPr>
+              <a:t> = (GAMMA * </a:t>
+            </a:r>
+            <a:r>
+              <a:rPr lang="es-ES" sz="1200" b="0" kern="1200" dirty="0" err="1">
+                <a:solidFill>
+                  <a:schemeClr val="tx1"/>
+                </a:solidFill>
+                <a:effectLst/>
+                <a:latin typeface="+mn-lt"/>
+                <a:ea typeface="+mn-ea"/>
+                <a:cs typeface="+mn-cs"/>
+              </a:rPr>
+              <a:t>target_net</a:t>
+            </a:r>
+            <a:r>
+              <a:rPr lang="es-ES" sz="1200" b="0" kern="1200" dirty="0">
+                <a:solidFill>
+                  <a:schemeClr val="tx1"/>
+                </a:solidFill>
+                <a:effectLst/>
+                <a:latin typeface="+mn-lt"/>
+                <a:ea typeface="+mn-ea"/>
+                <a:cs typeface="+mn-cs"/>
+              </a:rPr>
+              <a:t>(</a:t>
+            </a:r>
+            <a:r>
+              <a:rPr lang="es-ES" sz="1200" b="0" kern="1200" dirty="0" err="1">
+                <a:solidFill>
+                  <a:schemeClr val="tx1"/>
+                </a:solidFill>
+                <a:effectLst/>
+                <a:latin typeface="+mn-lt"/>
+                <a:ea typeface="+mn-ea"/>
+                <a:cs typeface="+mn-cs"/>
+              </a:rPr>
+              <a:t>next_states_batch</a:t>
+            </a:r>
+            <a:r>
+              <a:rPr lang="es-ES" sz="1200" b="0" kern="1200" dirty="0">
+                <a:solidFill>
+                  <a:schemeClr val="tx1"/>
+                </a:solidFill>
+                <a:effectLst/>
+                <a:latin typeface="+mn-lt"/>
+                <a:ea typeface="+mn-ea"/>
+                <a:cs typeface="+mn-cs"/>
+              </a:rPr>
+              <a:t>).</a:t>
+            </a:r>
+            <a:r>
+              <a:rPr lang="es-ES" sz="1200" b="0" kern="1200" dirty="0" err="1">
+                <a:solidFill>
+                  <a:schemeClr val="tx1"/>
+                </a:solidFill>
+                <a:effectLst/>
+                <a:latin typeface="+mn-lt"/>
+                <a:ea typeface="+mn-ea"/>
+                <a:cs typeface="+mn-cs"/>
+              </a:rPr>
+              <a:t>detach</a:t>
+            </a:r>
+            <a:r>
+              <a:rPr lang="es-ES" sz="1200" b="0" kern="1200" dirty="0">
+                <a:solidFill>
+                  <a:schemeClr val="tx1"/>
+                </a:solidFill>
+                <a:effectLst/>
+                <a:latin typeface="+mn-lt"/>
+                <a:ea typeface="+mn-ea"/>
+                <a:cs typeface="+mn-cs"/>
+              </a:rPr>
+              <a:t>().</a:t>
+            </a:r>
+            <a:r>
+              <a:rPr lang="es-ES" sz="1200" b="0" kern="1200" dirty="0" err="1">
+                <a:solidFill>
+                  <a:schemeClr val="tx1"/>
+                </a:solidFill>
+                <a:effectLst/>
+                <a:latin typeface="+mn-lt"/>
+                <a:ea typeface="+mn-ea"/>
+                <a:cs typeface="+mn-cs"/>
+              </a:rPr>
+              <a:t>max</a:t>
+            </a:r>
+            <a:r>
+              <a:rPr lang="es-ES" sz="1200" b="0" kern="1200" dirty="0">
+                <a:solidFill>
+                  <a:schemeClr val="tx1"/>
+                </a:solidFill>
+                <a:effectLst/>
+                <a:latin typeface="+mn-lt"/>
+                <a:ea typeface="+mn-ea"/>
+                <a:cs typeface="+mn-cs"/>
+              </a:rPr>
+              <a:t>(1)[0] * ~dones + </a:t>
+            </a:r>
+            <a:r>
+              <a:rPr lang="es-ES" sz="1200" b="0" kern="1200" dirty="0" err="1">
+                <a:solidFill>
+                  <a:schemeClr val="tx1"/>
+                </a:solidFill>
+                <a:effectLst/>
+                <a:latin typeface="+mn-lt"/>
+                <a:ea typeface="+mn-ea"/>
+                <a:cs typeface="+mn-cs"/>
+              </a:rPr>
+              <a:t>rewards</a:t>
+            </a:r>
+            <a:r>
+              <a:rPr lang="es-ES" sz="1200" b="0" kern="1200" dirty="0">
+                <a:solidFill>
+                  <a:schemeClr val="tx1"/>
+                </a:solidFill>
+                <a:effectLst/>
+                <a:latin typeface="+mn-lt"/>
+                <a:ea typeface="+mn-ea"/>
+                <a:cs typeface="+mn-cs"/>
+              </a:rPr>
+              <a:t>)</a:t>
+            </a:r>
+          </a:p>
+          <a:p>
+            <a:r>
+              <a:rPr lang="es-ES" sz="1200" b="0" kern="1200" dirty="0" err="1">
+                <a:solidFill>
+                  <a:schemeClr val="tx1"/>
+                </a:solidFill>
+                <a:effectLst/>
+                <a:latin typeface="+mn-lt"/>
+                <a:ea typeface="+mn-ea"/>
+                <a:cs typeface="+mn-cs"/>
+              </a:rPr>
+              <a:t>q_policy</a:t>
+            </a:r>
+            <a:r>
+              <a:rPr lang="es-ES" sz="1200" b="0" kern="1200" dirty="0">
+                <a:solidFill>
+                  <a:schemeClr val="tx1"/>
+                </a:solidFill>
+                <a:effectLst/>
+                <a:latin typeface="+mn-lt"/>
+                <a:ea typeface="+mn-ea"/>
+                <a:cs typeface="+mn-cs"/>
+              </a:rPr>
+              <a:t> = </a:t>
+            </a:r>
+            <a:r>
+              <a:rPr lang="es-ES" sz="1200" b="0" kern="1200" dirty="0" err="1">
+                <a:solidFill>
+                  <a:schemeClr val="tx1"/>
+                </a:solidFill>
+                <a:effectLst/>
+                <a:latin typeface="+mn-lt"/>
+                <a:ea typeface="+mn-ea"/>
+                <a:cs typeface="+mn-cs"/>
+              </a:rPr>
+              <a:t>policy_net</a:t>
+            </a:r>
+            <a:r>
+              <a:rPr lang="es-ES" sz="1200" b="0" kern="1200" dirty="0">
+                <a:solidFill>
+                  <a:schemeClr val="tx1"/>
+                </a:solidFill>
+                <a:effectLst/>
+                <a:latin typeface="+mn-lt"/>
+                <a:ea typeface="+mn-ea"/>
+                <a:cs typeface="+mn-cs"/>
+              </a:rPr>
+              <a:t>(</a:t>
+            </a:r>
+            <a:r>
+              <a:rPr lang="es-ES" sz="1200" b="0" kern="1200" dirty="0" err="1">
+                <a:solidFill>
+                  <a:schemeClr val="tx1"/>
+                </a:solidFill>
+                <a:effectLst/>
+                <a:latin typeface="+mn-lt"/>
+                <a:ea typeface="+mn-ea"/>
+                <a:cs typeface="+mn-cs"/>
+              </a:rPr>
+              <a:t>states_batch</a:t>
+            </a:r>
+            <a:r>
+              <a:rPr lang="es-ES" sz="1200" b="0" kern="1200" dirty="0">
+                <a:solidFill>
+                  <a:schemeClr val="tx1"/>
+                </a:solidFill>
+                <a:effectLst/>
+                <a:latin typeface="+mn-lt"/>
+                <a:ea typeface="+mn-ea"/>
+                <a:cs typeface="+mn-cs"/>
+              </a:rPr>
+              <a:t>).</a:t>
+            </a:r>
+            <a:r>
+              <a:rPr lang="es-ES" sz="1200" b="0" kern="1200" dirty="0" err="1">
+                <a:solidFill>
+                  <a:schemeClr val="tx1"/>
+                </a:solidFill>
+                <a:effectLst/>
+                <a:latin typeface="+mn-lt"/>
+                <a:ea typeface="+mn-ea"/>
+                <a:cs typeface="+mn-cs"/>
+              </a:rPr>
+              <a:t>gather</a:t>
+            </a:r>
+            <a:r>
+              <a:rPr lang="es-ES" sz="1200" b="0" kern="1200" dirty="0">
+                <a:solidFill>
+                  <a:schemeClr val="tx1"/>
+                </a:solidFill>
+                <a:effectLst/>
+                <a:latin typeface="+mn-lt"/>
+                <a:ea typeface="+mn-ea"/>
+                <a:cs typeface="+mn-cs"/>
+              </a:rPr>
+              <a:t>(1, </a:t>
+            </a:r>
+            <a:r>
+              <a:rPr lang="es-ES" sz="1200" b="0" kern="1200" dirty="0" err="1">
+                <a:solidFill>
+                  <a:schemeClr val="tx1"/>
+                </a:solidFill>
+                <a:effectLst/>
+                <a:latin typeface="+mn-lt"/>
+                <a:ea typeface="+mn-ea"/>
+                <a:cs typeface="+mn-cs"/>
+              </a:rPr>
+              <a:t>actions_batch</a:t>
+            </a:r>
+            <a:r>
+              <a:rPr lang="es-ES" sz="1200" b="0" kern="1200" dirty="0">
+                <a:solidFill>
+                  <a:schemeClr val="tx1"/>
+                </a:solidFill>
+                <a:effectLst/>
+                <a:latin typeface="+mn-lt"/>
+                <a:ea typeface="+mn-ea"/>
+                <a:cs typeface="+mn-cs"/>
+              </a:rPr>
+              <a:t>)</a:t>
+            </a:r>
+          </a:p>
+          <a:p>
+            <a:endParaRPr lang="es-ES" dirty="0"/>
+          </a:p>
+        </p:txBody>
+      </p:sp>
+      <p:sp>
+        <p:nvSpPr>
+          <p:cNvPr id="4" name="Marcador de número de diapositiva 3"/>
+          <p:cNvSpPr>
+            <a:spLocks noGrp="1"/>
+          </p:cNvSpPr>
+          <p:nvPr>
+            <p:ph type="sldNum" sz="quarter" idx="5"/>
+          </p:nvPr>
+        </p:nvSpPr>
+        <p:spPr/>
+        <p:txBody>
+          <a:bodyPr/>
+          <a:lstStyle/>
+          <a:p>
+            <a:fld id="{DAF6C058-3044-4944-84AE-9E00DE934B16}" type="slidenum">
+              <a:rPr lang="es-ES" smtClean="0"/>
+              <a:t>2</a:t>
+            </a:fld>
+            <a:endParaRPr lang="es-ES"/>
+          </a:p>
+        </p:txBody>
+      </p:sp>
+    </p:spTree>
+    <p:extLst>
+      <p:ext uri="{BB962C8B-B14F-4D97-AF65-F5344CB8AC3E}">
+        <p14:creationId xmlns:p14="http://schemas.microsoft.com/office/powerpoint/2010/main" val="2947391543"/>
+      </p:ext>
+    </p:extLst>
+  </p:cSld>
+  <p:clrMapOvr>
+    <a:masterClrMapping/>
+  </p:clrMapOvr>
+</p:notes>
+</file>
+
+<file path=ppt/notesSlides/notesSlide2.xml><?xml version="1.0" encoding="utf-8"?>
+<p:notes xmlns:a="http://schemas.openxmlformats.org/drawingml/2006/main" xmlns:r="http://schemas.openxmlformats.org/officeDocument/2006/relationships" xmlns:p="http://schemas.openxmlformats.org/presentationml/2006/main">
+  <p:cSld>
+    <p:spTree>
+      <p:nvGrpSpPr>
+        <p:cNvPr id="1" name=""/>
+        <p:cNvGrpSpPr/>
+        <p:nvPr/>
+      </p:nvGrpSpPr>
+      <p:grpSpPr>
+        <a:xfrm>
+          <a:off x="0" y="0"/>
+          <a:ext cx="0" cy="0"/>
+          <a:chOff x="0" y="0"/>
+          <a:chExt cx="0" cy="0"/>
+        </a:xfrm>
+      </p:grpSpPr>
+      <p:sp>
+        <p:nvSpPr>
+          <p:cNvPr id="2" name="Marcador de imagen de diapositiva 1"/>
+          <p:cNvSpPr>
+            <a:spLocks noGrp="1" noRot="1" noChangeAspect="1"/>
+          </p:cNvSpPr>
+          <p:nvPr>
+            <p:ph type="sldImg"/>
+          </p:nvPr>
+        </p:nvSpPr>
+        <p:spPr/>
+      </p:sp>
+      <p:sp>
+        <p:nvSpPr>
+          <p:cNvPr id="3" name="Marcador de notas 2"/>
+          <p:cNvSpPr>
+            <a:spLocks noGrp="1"/>
+          </p:cNvSpPr>
+          <p:nvPr>
+            <p:ph type="body" idx="1"/>
+          </p:nvPr>
+        </p:nvSpPr>
+        <p:spPr/>
+        <p:txBody>
+          <a:bodyPr/>
+          <a:lstStyle/>
+          <a:p>
+            <a:pPr marL="0" marR="0" lvl="0" indent="0" algn="l" defTabSz="914400" rtl="0" eaLnBrk="1" fontAlgn="auto" latinLnBrk="0" hangingPunct="1">
+              <a:lnSpc>
+                <a:spcPct val="100000"/>
+              </a:lnSpc>
+              <a:spcBef>
+                <a:spcPts val="0"/>
+              </a:spcBef>
+              <a:spcAft>
+                <a:spcPts val="0"/>
+              </a:spcAft>
+              <a:buClrTx/>
+              <a:buSzTx/>
+              <a:buFontTx/>
+              <a:buNone/>
+              <a:tabLst/>
+              <a:defRPr/>
+            </a:pPr>
+            <a:r>
+              <a:rPr lang="en-US" sz="1200" b="0" kern="1200" dirty="0">
+                <a:solidFill>
+                  <a:schemeClr val="tx1"/>
+                </a:solidFill>
+                <a:effectLst/>
+                <a:latin typeface="+mn-lt"/>
+                <a:ea typeface="+mn-ea"/>
+                <a:cs typeface="+mn-cs"/>
+              </a:rPr>
+              <a:t>Policy network predicts Q-values and chooses the best action in current state for all states in batch</a:t>
+            </a:r>
+          </a:p>
+          <a:p>
+            <a:r>
+              <a:rPr lang="en-US" sz="1200" b="0" kern="1200" dirty="0">
+                <a:solidFill>
+                  <a:schemeClr val="tx1"/>
+                </a:solidFill>
+                <a:effectLst/>
+                <a:latin typeface="+mn-lt"/>
+                <a:ea typeface="+mn-ea"/>
+                <a:cs typeface="+mn-cs"/>
+              </a:rPr>
+              <a:t>Target net predicts Q-values , it gathers and extracts Q values of the actions chosen by policy net for all states in the batch.</a:t>
+            </a:r>
+          </a:p>
+          <a:p>
+            <a:r>
+              <a:rPr lang="en-US" sz="1200" b="0" kern="1200" dirty="0">
+                <a:solidFill>
+                  <a:schemeClr val="tx1"/>
+                </a:solidFill>
+                <a:effectLst/>
+                <a:latin typeface="+mn-lt"/>
+                <a:ea typeface="+mn-ea"/>
+                <a:cs typeface="+mn-cs"/>
+              </a:rPr>
+              <a:t>Target network sets the error for the policy network to </a:t>
+            </a:r>
+            <a:r>
+              <a:rPr lang="en-US" sz="1200" b="0" kern="1200">
+                <a:solidFill>
+                  <a:schemeClr val="tx1"/>
+                </a:solidFill>
+                <a:effectLst/>
+                <a:latin typeface="+mn-lt"/>
+                <a:ea typeface="+mn-ea"/>
+                <a:cs typeface="+mn-cs"/>
+              </a:rPr>
+              <a:t>do backprop. </a:t>
+            </a:r>
+            <a:endParaRPr lang="en-US" sz="1200" b="0" kern="1200" dirty="0">
+              <a:solidFill>
+                <a:schemeClr val="tx1"/>
+              </a:solidFill>
+              <a:effectLst/>
+              <a:latin typeface="+mn-lt"/>
+              <a:ea typeface="+mn-ea"/>
+              <a:cs typeface="+mn-cs"/>
+            </a:endParaRPr>
+          </a:p>
+          <a:p>
+            <a:r>
+              <a:rPr lang="fr-FR" sz="1200" b="0" kern="1200" dirty="0" err="1">
+                <a:solidFill>
+                  <a:schemeClr val="tx1"/>
+                </a:solidFill>
+                <a:effectLst/>
+                <a:latin typeface="+mn-lt"/>
+                <a:ea typeface="+mn-ea"/>
+                <a:cs typeface="+mn-cs"/>
+              </a:rPr>
+              <a:t>Current</a:t>
+            </a:r>
+            <a:r>
+              <a:rPr lang="fr-FR" sz="1200" b="0" kern="1200" dirty="0">
+                <a:solidFill>
+                  <a:schemeClr val="tx1"/>
+                </a:solidFill>
+                <a:effectLst/>
+                <a:latin typeface="+mn-lt"/>
+                <a:ea typeface="+mn-ea"/>
+                <a:cs typeface="+mn-cs"/>
+              </a:rPr>
+              <a:t> </a:t>
+            </a:r>
+            <a:r>
+              <a:rPr lang="fr-FR" sz="1200" b="0" kern="1200" dirty="0" err="1">
+                <a:solidFill>
+                  <a:schemeClr val="tx1"/>
+                </a:solidFill>
+                <a:effectLst/>
+                <a:latin typeface="+mn-lt"/>
+                <a:ea typeface="+mn-ea"/>
+                <a:cs typeface="+mn-cs"/>
+              </a:rPr>
+              <a:t>q_values</a:t>
+            </a:r>
+            <a:r>
+              <a:rPr lang="fr-FR" sz="1200" b="0" kern="1200" dirty="0">
+                <a:solidFill>
+                  <a:schemeClr val="tx1"/>
+                </a:solidFill>
+                <a:effectLst/>
+                <a:latin typeface="+mn-lt"/>
+                <a:ea typeface="+mn-ea"/>
+                <a:cs typeface="+mn-cs"/>
+              </a:rPr>
+              <a:t>: [10.5, 8.2, 15.0, 9.1]</a:t>
+            </a:r>
+          </a:p>
+          <a:p>
+            <a:pPr marL="0" marR="0" lvl="0" indent="0" algn="l" defTabSz="914400" rtl="0" eaLnBrk="1" fontAlgn="auto" latinLnBrk="0" hangingPunct="1">
+              <a:lnSpc>
+                <a:spcPct val="100000"/>
+              </a:lnSpc>
+              <a:spcBef>
+                <a:spcPts val="0"/>
+              </a:spcBef>
+              <a:spcAft>
+                <a:spcPts val="0"/>
+              </a:spcAft>
+              <a:buClrTx/>
+              <a:buSzTx/>
+              <a:buFontTx/>
+              <a:buNone/>
+              <a:tabLst/>
+              <a:defRPr/>
+            </a:pPr>
+            <a:r>
+              <a:rPr lang="fr-FR" sz="1200" b="0" kern="1200" dirty="0">
+                <a:solidFill>
+                  <a:schemeClr val="tx1"/>
+                </a:solidFill>
+                <a:effectLst/>
+                <a:latin typeface="+mn-lt"/>
+                <a:ea typeface="+mn-ea"/>
+                <a:cs typeface="+mn-cs"/>
+              </a:rPr>
+              <a:t>Target </a:t>
+            </a:r>
+            <a:r>
+              <a:rPr lang="fr-FR" sz="1200" b="0" kern="1200" dirty="0" err="1">
+                <a:solidFill>
+                  <a:schemeClr val="tx1"/>
+                </a:solidFill>
+                <a:effectLst/>
+                <a:latin typeface="+mn-lt"/>
+                <a:ea typeface="+mn-ea"/>
+                <a:cs typeface="+mn-cs"/>
+              </a:rPr>
+              <a:t>q_values</a:t>
+            </a:r>
+            <a:r>
+              <a:rPr lang="fr-FR" sz="1200" b="0" kern="1200" dirty="0">
+                <a:solidFill>
+                  <a:schemeClr val="tx1"/>
+                </a:solidFill>
+                <a:effectLst/>
+                <a:latin typeface="+mn-lt"/>
+                <a:ea typeface="+mn-ea"/>
+                <a:cs typeface="+mn-cs"/>
+              </a:rPr>
+              <a:t>: [12.0, 8.3, 20.5, 9.0]</a:t>
+            </a:r>
+          </a:p>
+          <a:p>
+            <a:pPr marL="0" marR="0" lvl="0" indent="0" algn="l" defTabSz="914400" rtl="0" eaLnBrk="1" fontAlgn="auto" latinLnBrk="0" hangingPunct="1">
+              <a:lnSpc>
+                <a:spcPct val="100000"/>
+              </a:lnSpc>
+              <a:spcBef>
+                <a:spcPts val="0"/>
+              </a:spcBef>
+              <a:spcAft>
+                <a:spcPts val="0"/>
+              </a:spcAft>
+              <a:buClrTx/>
+              <a:buSzTx/>
+              <a:buFontTx/>
+              <a:buNone/>
+              <a:tabLst/>
+              <a:defRPr/>
+            </a:pPr>
+            <a:r>
+              <a:rPr lang="en-US" sz="1200" b="0" kern="1200" dirty="0">
+                <a:solidFill>
+                  <a:schemeClr val="tx1"/>
+                </a:solidFill>
+                <a:effectLst/>
+                <a:latin typeface="+mn-lt"/>
+                <a:ea typeface="+mn-ea"/>
+                <a:cs typeface="+mn-cs"/>
+              </a:rPr>
+              <a:t>TD errors: [1.5, 0.1, 5.5, -0.1], high values means important transitions to learn</a:t>
+            </a:r>
+          </a:p>
+          <a:p>
+            <a:pPr marL="0" marR="0" lvl="0" indent="0" algn="l" defTabSz="914400" rtl="0" eaLnBrk="1" fontAlgn="auto" latinLnBrk="0" hangingPunct="1">
+              <a:lnSpc>
+                <a:spcPct val="100000"/>
+              </a:lnSpc>
+              <a:spcBef>
+                <a:spcPts val="0"/>
+              </a:spcBef>
+              <a:spcAft>
+                <a:spcPts val="0"/>
+              </a:spcAft>
+              <a:buClrTx/>
+              <a:buSzTx/>
+              <a:buFontTx/>
+              <a:buNone/>
+              <a:tabLst/>
+              <a:defRPr/>
+            </a:pPr>
+            <a:r>
+              <a:rPr lang="es-ES" sz="1200" b="0" kern="1200" dirty="0">
+                <a:solidFill>
+                  <a:schemeClr val="tx1"/>
+                </a:solidFill>
+                <a:effectLst/>
+                <a:latin typeface="+mn-lt"/>
+                <a:ea typeface="+mn-ea"/>
+                <a:cs typeface="+mn-cs"/>
+              </a:rPr>
+              <a:t>SOFT UPDATE TARGET NETWORK</a:t>
+            </a:r>
+            <a:endParaRPr lang="fr-FR" sz="1200" b="0" kern="1200" dirty="0">
+              <a:solidFill>
+                <a:schemeClr val="tx1"/>
+              </a:solidFill>
+              <a:effectLst/>
+              <a:latin typeface="+mn-lt"/>
+              <a:ea typeface="+mn-ea"/>
+              <a:cs typeface="+mn-cs"/>
+            </a:endParaRPr>
+          </a:p>
+          <a:p>
+            <a:endParaRPr lang="es-ES" dirty="0"/>
+          </a:p>
+        </p:txBody>
+      </p:sp>
+      <p:sp>
+        <p:nvSpPr>
+          <p:cNvPr id="4" name="Marcador de número de diapositiva 3"/>
+          <p:cNvSpPr>
+            <a:spLocks noGrp="1"/>
+          </p:cNvSpPr>
+          <p:nvPr>
+            <p:ph type="sldNum" sz="quarter" idx="5"/>
+          </p:nvPr>
+        </p:nvSpPr>
+        <p:spPr/>
+        <p:txBody>
+          <a:bodyPr/>
+          <a:lstStyle/>
+          <a:p>
+            <a:fld id="{DAF6C058-3044-4944-84AE-9E00DE934B16}" type="slidenum">
+              <a:rPr lang="es-ES" smtClean="0"/>
+              <a:t>3</a:t>
+            </a:fld>
+            <a:endParaRPr lang="es-ES"/>
+          </a:p>
+        </p:txBody>
+      </p:sp>
+    </p:spTree>
+    <p:extLst>
+      <p:ext uri="{BB962C8B-B14F-4D97-AF65-F5344CB8AC3E}">
+        <p14:creationId xmlns:p14="http://schemas.microsoft.com/office/powerpoint/2010/main" val="2712327022"/>
+      </p:ext>
+    </p:extLst>
+  </p:cSld>
+  <p:clrMapOvr>
+    <a:masterClrMapping/>
+  </p:clrMapOvr>
+</p:notes>
 </file>
 
 <file path=ppt/slideLayouts/slideLayout1.xml><?xml version="1.0" encoding="utf-8"?>
@@ -3510,6 +4572,2857 @@
         <p:cNvPr id="1" name="">
           <a:extLst>
             <a:ext uri="{FF2B5EF4-FFF2-40B4-BE49-F238E27FC236}">
+              <a16:creationId xmlns:a16="http://schemas.microsoft.com/office/drawing/2014/main" id="{AB4164A9-576C-7B39-6DA3-FC11907068A3}"/>
+            </a:ext>
+          </a:extLst>
+        </p:cNvPr>
+        <p:cNvGrpSpPr/>
+        <p:nvPr/>
+      </p:nvGrpSpPr>
+      <p:grpSpPr>
+        <a:xfrm>
+          <a:off x="0" y="0"/>
+          <a:ext cx="0" cy="0"/>
+          <a:chOff x="0" y="0"/>
+          <a:chExt cx="0" cy="0"/>
+        </a:xfrm>
+      </p:grpSpPr>
+      <p:sp>
+        <p:nvSpPr>
+          <p:cNvPr id="2" name="Título 1">
+            <a:extLst>
+              <a:ext uri="{FF2B5EF4-FFF2-40B4-BE49-F238E27FC236}">
+                <a16:creationId xmlns:a16="http://schemas.microsoft.com/office/drawing/2014/main" id="{815F950C-379E-3AA8-B5B9-DEE8104CB4F7}"/>
+              </a:ext>
+            </a:extLst>
+          </p:cNvPr>
+          <p:cNvSpPr>
+            <a:spLocks noGrp="1"/>
+          </p:cNvSpPr>
+          <p:nvPr>
+            <p:ph type="ctrTitle"/>
+          </p:nvPr>
+        </p:nvSpPr>
+        <p:spPr>
+          <a:xfrm>
+            <a:off x="630936" y="640823"/>
+            <a:ext cx="3419856" cy="5583148"/>
+          </a:xfrm>
+        </p:spPr>
+        <p:txBody>
+          <a:bodyPr vert="horz" lIns="91440" tIns="45720" rIns="91440" bIns="45720" rtlCol="0" anchor="ctr">
+            <a:normAutofit/>
+          </a:bodyPr>
+          <a:lstStyle/>
+          <a:p>
+            <a:pPr algn="l"/>
+            <a:r>
+              <a:rPr lang="en-US" sz="3400" kern="1200">
+                <a:solidFill>
+                  <a:schemeClr val="tx1"/>
+                </a:solidFill>
+                <a:latin typeface="+mj-lt"/>
+                <a:ea typeface="+mj-ea"/>
+                <a:cs typeface="+mj-cs"/>
+              </a:rPr>
+              <a:t>General Hyperparameters (Training Conditions)</a:t>
+            </a:r>
+          </a:p>
+        </p:txBody>
+      </p:sp>
+      <p:graphicFrame>
+        <p:nvGraphicFramePr>
+          <p:cNvPr id="4" name="Tabla 3">
+            <a:extLst>
+              <a:ext uri="{FF2B5EF4-FFF2-40B4-BE49-F238E27FC236}">
+                <a16:creationId xmlns:a16="http://schemas.microsoft.com/office/drawing/2014/main" id="{8EE3E737-2402-F7C9-943E-A85F986D49DF}"/>
+              </a:ext>
+            </a:extLst>
+          </p:cNvPr>
+          <p:cNvGraphicFramePr>
+            <a:graphicFrameLocks noGrp="1"/>
+          </p:cNvGraphicFramePr>
+          <p:nvPr>
+            <p:extLst>
+              <p:ext uri="{D42A27DB-BD31-4B8C-83A1-F6EECF244321}">
+                <p14:modId xmlns:p14="http://schemas.microsoft.com/office/powerpoint/2010/main" val="2401190035"/>
+              </p:ext>
+            </p:extLst>
+          </p:nvPr>
+        </p:nvGraphicFramePr>
+        <p:xfrm>
+          <a:off x="4654296" y="864581"/>
+          <a:ext cx="6906768" cy="5435401"/>
+        </p:xfrm>
+        <a:graphic>
+          <a:graphicData uri="http://schemas.openxmlformats.org/drawingml/2006/table">
+            <a:tbl>
+              <a:tblPr>
+                <a:noFill/>
+              </a:tblPr>
+              <a:tblGrid>
+                <a:gridCol w="6906768">
+                  <a:extLst>
+                    <a:ext uri="{9D8B030D-6E8A-4147-A177-3AD203B41FA5}">
+                      <a16:colId xmlns:a16="http://schemas.microsoft.com/office/drawing/2014/main" val="2222495668"/>
+                    </a:ext>
+                  </a:extLst>
+                </a:gridCol>
+              </a:tblGrid>
+              <a:tr h="3641407">
+                <a:tc>
+                  <a:txBody>
+                    <a:bodyPr/>
+                    <a:lstStyle/>
+                    <a:p>
+                      <a:pPr fontAlgn="t">
+                        <a:lnSpc>
+                          <a:spcPts val="1500"/>
+                        </a:lnSpc>
+                        <a:buNone/>
+                      </a:pPr>
+                      <a:r>
+                        <a:rPr lang="es-ES" sz="1700" b="1" i="0" dirty="0">
+                          <a:solidFill>
+                            <a:schemeClr val="tx1">
+                              <a:lumMod val="75000"/>
+                              <a:lumOff val="25000"/>
+                            </a:schemeClr>
+                          </a:solidFill>
+                          <a:effectLst/>
+                          <a:latin typeface="Segoe UI" panose="020B0502040204020203" pitchFamily="34" charset="0"/>
+                        </a:rPr>
+                        <a:t>🤖 </a:t>
+                      </a:r>
+                      <a:r>
+                        <a:rPr lang="es-ES" sz="1700" b="1" i="0" dirty="0" err="1">
+                          <a:solidFill>
+                            <a:schemeClr val="tx1">
+                              <a:lumMod val="75000"/>
+                              <a:lumOff val="25000"/>
+                            </a:schemeClr>
+                          </a:solidFill>
+                          <a:effectLst/>
+                          <a:latin typeface="Segoe UI" panose="020B0502040204020203" pitchFamily="34" charset="0"/>
+                        </a:rPr>
+                        <a:t>Algorithm</a:t>
+                      </a:r>
+                      <a:r>
+                        <a:rPr lang="es-ES" sz="1700" b="1" i="0" dirty="0">
+                          <a:solidFill>
+                            <a:schemeClr val="tx1">
+                              <a:lumMod val="75000"/>
+                              <a:lumOff val="25000"/>
+                            </a:schemeClr>
+                          </a:solidFill>
+                          <a:effectLst/>
+                          <a:latin typeface="Segoe UI" panose="020B0502040204020203" pitchFamily="34" charset="0"/>
+                        </a:rPr>
+                        <a:t>:</a:t>
+                      </a:r>
+                      <a:r>
+                        <a:rPr lang="es-ES" sz="1700" b="0" i="0" dirty="0">
+                          <a:solidFill>
+                            <a:schemeClr val="tx1">
+                              <a:lumMod val="75000"/>
+                              <a:lumOff val="25000"/>
+                            </a:schemeClr>
+                          </a:solidFill>
+                          <a:effectLst/>
+                          <a:latin typeface="Segoe UI" panose="020B0502040204020203" pitchFamily="34" charset="0"/>
+                        </a:rPr>
+                        <a:t> DDQN </a:t>
+                      </a:r>
+                      <a:r>
+                        <a:rPr lang="es-ES" sz="1700" b="0" i="0" dirty="0" err="1">
+                          <a:solidFill>
+                            <a:schemeClr val="tx1">
+                              <a:lumMod val="75000"/>
+                              <a:lumOff val="25000"/>
+                            </a:schemeClr>
+                          </a:solidFill>
+                          <a:effectLst/>
+                          <a:latin typeface="Segoe UI" panose="020B0502040204020203" pitchFamily="34" charset="0"/>
+                        </a:rPr>
+                        <a:t>with</a:t>
+                      </a:r>
+                      <a:r>
+                        <a:rPr lang="es-ES" sz="1700" b="0" i="0" dirty="0">
+                          <a:solidFill>
+                            <a:schemeClr val="tx1">
+                              <a:lumMod val="75000"/>
+                              <a:lumOff val="25000"/>
+                            </a:schemeClr>
+                          </a:solidFill>
+                          <a:effectLst/>
+                          <a:latin typeface="Segoe UI" panose="020B0502040204020203" pitchFamily="34" charset="0"/>
+                        </a:rPr>
+                        <a:t> PER</a:t>
+                      </a:r>
+                    </a:p>
+                    <a:p>
+                      <a:br>
+                        <a:rPr lang="es-ES" sz="1700" b="0" i="0" dirty="0">
+                          <a:solidFill>
+                            <a:schemeClr val="tx1">
+                              <a:lumMod val="75000"/>
+                              <a:lumOff val="25000"/>
+                            </a:schemeClr>
+                          </a:solidFill>
+                          <a:effectLst/>
+                          <a:latin typeface="Segoe UI" panose="020B0502040204020203" pitchFamily="34" charset="0"/>
+                        </a:rPr>
+                      </a:br>
+                      <a:r>
+                        <a:rPr lang="es-ES" sz="1700" b="1" i="0" dirty="0">
+                          <a:solidFill>
+                            <a:schemeClr val="tx1">
+                              <a:lumMod val="75000"/>
+                              <a:lumOff val="25000"/>
+                            </a:schemeClr>
+                          </a:solidFill>
+                          <a:effectLst/>
+                          <a:latin typeface="Segoe UI" panose="020B0502040204020203" pitchFamily="34" charset="0"/>
+                        </a:rPr>
+                        <a:t>🧠 Neural Network:</a:t>
+                      </a:r>
+                      <a:r>
+                        <a:rPr lang="es-ES" sz="1700" b="0" i="0" dirty="0">
+                          <a:solidFill>
+                            <a:schemeClr val="tx1">
+                              <a:lumMod val="75000"/>
+                              <a:lumOff val="25000"/>
+                            </a:schemeClr>
+                          </a:solidFill>
+                          <a:effectLst/>
+                          <a:latin typeface="Segoe UI" panose="020B0502040204020203" pitchFamily="34" charset="0"/>
+                        </a:rPr>
+                        <a:t> </a:t>
+                      </a:r>
+                      <a:r>
+                        <a:rPr lang="es-ES" sz="1800" b="0" kern="1200" dirty="0">
+                          <a:solidFill>
+                            <a:schemeClr val="tx1"/>
+                          </a:solidFill>
+                          <a:effectLst/>
+                          <a:latin typeface="+mn-lt"/>
+                          <a:ea typeface="+mn-ea"/>
+                          <a:cs typeface="+mn-cs"/>
+                        </a:rPr>
+                        <a:t>Input: (4, 84, 84) -&gt; Conv1: (32, 20, 20) -&gt; Conv2: (64, 9, 9) -&gt; Conv3: (64, 7, 7) -&gt; </a:t>
+                      </a:r>
+                      <a:r>
+                        <a:rPr lang="es-ES" sz="1800" b="0" kern="1200" dirty="0" err="1">
+                          <a:solidFill>
+                            <a:schemeClr val="tx1"/>
+                          </a:solidFill>
+                          <a:effectLst/>
+                          <a:latin typeface="+mn-lt"/>
+                          <a:ea typeface="+mn-ea"/>
+                          <a:cs typeface="+mn-cs"/>
+                        </a:rPr>
+                        <a:t>Flatten</a:t>
+                      </a:r>
+                      <a:r>
+                        <a:rPr lang="es-ES" sz="1800" b="0" kern="1200" dirty="0">
+                          <a:solidFill>
+                            <a:schemeClr val="tx1"/>
+                          </a:solidFill>
+                          <a:effectLst/>
+                          <a:latin typeface="+mn-lt"/>
+                          <a:ea typeface="+mn-ea"/>
+                          <a:cs typeface="+mn-cs"/>
+                        </a:rPr>
+                        <a:t>: (3136, 512) -&gt; Output: (512, </a:t>
+                      </a:r>
+                      <a:r>
+                        <a:rPr lang="es-ES" sz="1800" b="0" kern="1200" dirty="0" err="1">
+                          <a:solidFill>
+                            <a:schemeClr val="tx1"/>
+                          </a:solidFill>
+                          <a:effectLst/>
+                          <a:latin typeface="+mn-lt"/>
+                          <a:ea typeface="+mn-ea"/>
+                          <a:cs typeface="+mn-cs"/>
+                        </a:rPr>
+                        <a:t>num_actions</a:t>
+                      </a:r>
+                      <a:r>
+                        <a:rPr lang="es-ES" sz="1800" b="0" kern="1200" dirty="0">
+                          <a:solidFill>
+                            <a:schemeClr val="tx1"/>
+                          </a:solidFill>
+                          <a:effectLst/>
+                          <a:latin typeface="+mn-lt"/>
+                          <a:ea typeface="+mn-ea"/>
+                          <a:cs typeface="+mn-cs"/>
+                        </a:rPr>
+                        <a:t>=5)</a:t>
+                      </a:r>
+                      <a:br>
+                        <a:rPr lang="es-ES" sz="1700" b="0" i="0" dirty="0">
+                          <a:solidFill>
+                            <a:schemeClr val="tx1">
+                              <a:lumMod val="75000"/>
+                              <a:lumOff val="25000"/>
+                            </a:schemeClr>
+                          </a:solidFill>
+                          <a:effectLst/>
+                          <a:latin typeface="Segoe UI" panose="020B0502040204020203" pitchFamily="34" charset="0"/>
+                        </a:rPr>
+                      </a:br>
+                      <a:endParaRPr lang="es-ES" sz="1700" b="0" i="0" dirty="0">
+                        <a:solidFill>
+                          <a:schemeClr val="tx1">
+                            <a:lumMod val="75000"/>
+                            <a:lumOff val="25000"/>
+                          </a:schemeClr>
+                        </a:solidFill>
+                        <a:effectLst/>
+                        <a:latin typeface="Segoe UI" panose="020B0502040204020203" pitchFamily="34" charset="0"/>
+                      </a:endParaRPr>
+                    </a:p>
+                    <a:p>
+                      <a:pPr fontAlgn="t">
+                        <a:lnSpc>
+                          <a:spcPts val="1500"/>
+                        </a:lnSpc>
+                        <a:buNone/>
+                      </a:pPr>
+                      <a:r>
+                        <a:rPr lang="es-ES" sz="1700" b="1" i="0" dirty="0">
+                          <a:solidFill>
+                            <a:schemeClr val="tx1">
+                              <a:lumMod val="75000"/>
+                              <a:lumOff val="25000"/>
+                            </a:schemeClr>
+                          </a:solidFill>
+                          <a:effectLst/>
+                          <a:latin typeface="Segoe UI" panose="020B0502040204020203" pitchFamily="34" charset="0"/>
+                        </a:rPr>
+                        <a:t>⚡ </a:t>
+                      </a:r>
+                      <a:r>
+                        <a:rPr lang="es-ES" sz="1700" b="1" i="0" dirty="0" err="1">
+                          <a:solidFill>
+                            <a:schemeClr val="tx1">
+                              <a:lumMod val="75000"/>
+                              <a:lumOff val="25000"/>
+                            </a:schemeClr>
+                          </a:solidFill>
+                          <a:effectLst/>
+                          <a:latin typeface="Segoe UI" panose="020B0502040204020203" pitchFamily="34" charset="0"/>
+                        </a:rPr>
+                        <a:t>Learning</a:t>
+                      </a:r>
+                      <a:r>
+                        <a:rPr lang="es-ES" sz="1700" b="1" i="0" dirty="0">
+                          <a:solidFill>
+                            <a:schemeClr val="tx1">
+                              <a:lumMod val="75000"/>
+                              <a:lumOff val="25000"/>
+                            </a:schemeClr>
+                          </a:solidFill>
+                          <a:effectLst/>
+                          <a:latin typeface="Segoe UI" panose="020B0502040204020203" pitchFamily="34" charset="0"/>
+                        </a:rPr>
+                        <a:t> </a:t>
+                      </a:r>
+                      <a:r>
+                        <a:rPr lang="es-ES" sz="1700" b="1" i="0" dirty="0" err="1">
+                          <a:solidFill>
+                            <a:schemeClr val="tx1">
+                              <a:lumMod val="75000"/>
+                              <a:lumOff val="25000"/>
+                            </a:schemeClr>
+                          </a:solidFill>
+                          <a:effectLst/>
+                          <a:latin typeface="Segoe UI" panose="020B0502040204020203" pitchFamily="34" charset="0"/>
+                        </a:rPr>
+                        <a:t>Rate</a:t>
+                      </a:r>
+                      <a:r>
+                        <a:rPr lang="es-ES" sz="1700" b="1" i="0" dirty="0">
+                          <a:solidFill>
+                            <a:schemeClr val="tx1">
+                              <a:lumMod val="75000"/>
+                              <a:lumOff val="25000"/>
+                            </a:schemeClr>
+                          </a:solidFill>
+                          <a:effectLst/>
+                          <a:latin typeface="Segoe UI" panose="020B0502040204020203" pitchFamily="34" charset="0"/>
+                        </a:rPr>
+                        <a:t>:</a:t>
+                      </a:r>
+                      <a:r>
+                        <a:rPr lang="es-ES" sz="1700" b="0" i="0" dirty="0">
+                          <a:solidFill>
+                            <a:schemeClr val="tx1">
+                              <a:lumMod val="75000"/>
+                              <a:lumOff val="25000"/>
+                            </a:schemeClr>
+                          </a:solidFill>
+                          <a:effectLst/>
+                          <a:latin typeface="Segoe UI" panose="020B0502040204020203" pitchFamily="34" charset="0"/>
+                        </a:rPr>
+                        <a:t> 0.0001</a:t>
+                      </a:r>
+                      <a:br>
+                        <a:rPr lang="es-ES" sz="1700" b="0" i="0" dirty="0">
+                          <a:solidFill>
+                            <a:schemeClr val="tx1">
+                              <a:lumMod val="75000"/>
+                              <a:lumOff val="25000"/>
+                            </a:schemeClr>
+                          </a:solidFill>
+                          <a:effectLst/>
+                          <a:latin typeface="Segoe UI" panose="020B0502040204020203" pitchFamily="34" charset="0"/>
+                        </a:rPr>
+                      </a:br>
+                      <a:endParaRPr lang="es-ES" sz="1700" b="0" i="0" dirty="0">
+                        <a:solidFill>
+                          <a:schemeClr val="tx1">
+                            <a:lumMod val="75000"/>
+                            <a:lumOff val="25000"/>
+                          </a:schemeClr>
+                        </a:solidFill>
+                        <a:effectLst/>
+                        <a:latin typeface="Segoe UI" panose="020B0502040204020203" pitchFamily="34" charset="0"/>
+                      </a:endParaRPr>
+                    </a:p>
+                    <a:p>
+                      <a:pPr fontAlgn="t">
+                        <a:lnSpc>
+                          <a:spcPts val="1500"/>
+                        </a:lnSpc>
+                        <a:buNone/>
+                      </a:pPr>
+                      <a:r>
+                        <a:rPr lang="es-ES" sz="1700" b="1" i="0" dirty="0">
+                          <a:solidFill>
+                            <a:schemeClr val="tx1">
+                              <a:lumMod val="75000"/>
+                              <a:lumOff val="25000"/>
+                            </a:schemeClr>
+                          </a:solidFill>
+                          <a:effectLst/>
+                          <a:latin typeface="Segoe UI" panose="020B0502040204020203" pitchFamily="34" charset="0"/>
+                        </a:rPr>
+                        <a:t>🎯 </a:t>
+                      </a:r>
+                      <a:r>
+                        <a:rPr lang="es-ES" sz="1700" b="1" i="0" dirty="0" err="1">
+                          <a:solidFill>
+                            <a:schemeClr val="tx1">
+                              <a:lumMod val="75000"/>
+                              <a:lumOff val="25000"/>
+                            </a:schemeClr>
+                          </a:solidFill>
+                          <a:effectLst/>
+                          <a:latin typeface="Segoe UI" panose="020B0502040204020203" pitchFamily="34" charset="0"/>
+                        </a:rPr>
+                        <a:t>Discount</a:t>
+                      </a:r>
+                      <a:r>
+                        <a:rPr lang="es-ES" sz="1700" b="1" i="0" dirty="0">
+                          <a:solidFill>
+                            <a:schemeClr val="tx1">
+                              <a:lumMod val="75000"/>
+                              <a:lumOff val="25000"/>
+                            </a:schemeClr>
+                          </a:solidFill>
+                          <a:effectLst/>
+                          <a:latin typeface="Segoe UI" panose="020B0502040204020203" pitchFamily="34" charset="0"/>
+                        </a:rPr>
+                        <a:t> Factor (Gamma):</a:t>
+                      </a:r>
+                      <a:r>
+                        <a:rPr lang="es-ES" sz="1700" b="0" i="0" dirty="0">
+                          <a:solidFill>
+                            <a:schemeClr val="tx1">
+                              <a:lumMod val="75000"/>
+                              <a:lumOff val="25000"/>
+                            </a:schemeClr>
+                          </a:solidFill>
+                          <a:effectLst/>
+                          <a:latin typeface="Segoe UI" panose="020B0502040204020203" pitchFamily="34" charset="0"/>
+                        </a:rPr>
+                        <a:t> 0.99</a:t>
+                      </a:r>
+                      <a:br>
+                        <a:rPr lang="es-ES" sz="1700" b="0" i="0" dirty="0">
+                          <a:solidFill>
+                            <a:schemeClr val="tx1">
+                              <a:lumMod val="75000"/>
+                              <a:lumOff val="25000"/>
+                            </a:schemeClr>
+                          </a:solidFill>
+                          <a:effectLst/>
+                          <a:latin typeface="Segoe UI" panose="020B0502040204020203" pitchFamily="34" charset="0"/>
+                        </a:rPr>
+                      </a:br>
+                      <a:endParaRPr lang="es-ES" sz="1700" b="0" i="0" dirty="0">
+                        <a:solidFill>
+                          <a:schemeClr val="tx1">
+                            <a:lumMod val="75000"/>
+                            <a:lumOff val="25000"/>
+                          </a:schemeClr>
+                        </a:solidFill>
+                        <a:effectLst/>
+                        <a:latin typeface="Segoe UI" panose="020B0502040204020203" pitchFamily="34" charset="0"/>
+                      </a:endParaRPr>
+                    </a:p>
+                    <a:p>
+                      <a:pPr fontAlgn="t">
+                        <a:lnSpc>
+                          <a:spcPts val="1500"/>
+                        </a:lnSpc>
+                        <a:buNone/>
+                      </a:pPr>
+                      <a:r>
+                        <a:rPr lang="es-ES" sz="1700" b="1" i="0" dirty="0">
+                          <a:solidFill>
+                            <a:schemeClr val="tx1">
+                              <a:lumMod val="75000"/>
+                              <a:lumOff val="25000"/>
+                            </a:schemeClr>
+                          </a:solidFill>
+                          <a:effectLst/>
+                          <a:latin typeface="Segoe UI" panose="020B0502040204020203" pitchFamily="34" charset="0"/>
+                        </a:rPr>
+                        <a:t>📦 Replay Buffer </a:t>
+                      </a:r>
+                      <a:r>
+                        <a:rPr lang="es-ES" sz="1700" b="1" i="0" dirty="0" err="1">
+                          <a:solidFill>
+                            <a:schemeClr val="tx1">
+                              <a:lumMod val="75000"/>
+                              <a:lumOff val="25000"/>
+                            </a:schemeClr>
+                          </a:solidFill>
+                          <a:effectLst/>
+                          <a:latin typeface="Segoe UI" panose="020B0502040204020203" pitchFamily="34" charset="0"/>
+                        </a:rPr>
+                        <a:t>Size</a:t>
+                      </a:r>
+                      <a:r>
+                        <a:rPr lang="es-ES" sz="1700" b="1" i="0" dirty="0">
+                          <a:solidFill>
+                            <a:schemeClr val="tx1">
+                              <a:lumMod val="75000"/>
+                              <a:lumOff val="25000"/>
+                            </a:schemeClr>
+                          </a:solidFill>
+                          <a:effectLst/>
+                          <a:latin typeface="Segoe UI" panose="020B0502040204020203" pitchFamily="34" charset="0"/>
+                        </a:rPr>
+                        <a:t>:</a:t>
+                      </a:r>
+                      <a:r>
+                        <a:rPr lang="es-ES" sz="1700" b="0" i="0" dirty="0">
+                          <a:solidFill>
+                            <a:schemeClr val="tx1">
+                              <a:lumMod val="75000"/>
+                              <a:lumOff val="25000"/>
+                            </a:schemeClr>
+                          </a:solidFill>
+                          <a:effectLst/>
+                          <a:latin typeface="Segoe UI" panose="020B0502040204020203" pitchFamily="34" charset="0"/>
+                        </a:rPr>
+                        <a:t> 100000</a:t>
+                      </a:r>
+                      <a:br>
+                        <a:rPr lang="es-ES" sz="1700" b="0" i="0" dirty="0">
+                          <a:solidFill>
+                            <a:schemeClr val="tx1">
+                              <a:lumMod val="75000"/>
+                              <a:lumOff val="25000"/>
+                            </a:schemeClr>
+                          </a:solidFill>
+                          <a:effectLst/>
+                          <a:latin typeface="Segoe UI" panose="020B0502040204020203" pitchFamily="34" charset="0"/>
+                        </a:rPr>
+                      </a:br>
+                      <a:endParaRPr lang="es-ES" sz="1700" b="0" i="0" dirty="0">
+                        <a:solidFill>
+                          <a:schemeClr val="tx1">
+                            <a:lumMod val="75000"/>
+                            <a:lumOff val="25000"/>
+                          </a:schemeClr>
+                        </a:solidFill>
+                        <a:effectLst/>
+                        <a:latin typeface="Segoe UI" panose="020B0502040204020203" pitchFamily="34" charset="0"/>
+                      </a:endParaRPr>
+                    </a:p>
+                    <a:p>
+                      <a:pPr fontAlgn="t">
+                        <a:lnSpc>
+                          <a:spcPts val="1500"/>
+                        </a:lnSpc>
+                        <a:buNone/>
+                      </a:pPr>
+                      <a:r>
+                        <a:rPr lang="es-ES" sz="1700" b="1" i="0" dirty="0">
+                          <a:solidFill>
+                            <a:schemeClr val="tx1">
+                              <a:lumMod val="75000"/>
+                              <a:lumOff val="25000"/>
+                            </a:schemeClr>
+                          </a:solidFill>
+                          <a:effectLst/>
+                          <a:latin typeface="Segoe UI" panose="020B0502040204020203" pitchFamily="34" charset="0"/>
+                        </a:rPr>
+                        <a:t>📐 </a:t>
+                      </a:r>
+                      <a:r>
+                        <a:rPr lang="es-ES" sz="1700" b="1" i="0" dirty="0" err="1">
+                          <a:solidFill>
+                            <a:schemeClr val="tx1">
+                              <a:lumMod val="75000"/>
+                              <a:lumOff val="25000"/>
+                            </a:schemeClr>
+                          </a:solidFill>
+                          <a:effectLst/>
+                          <a:latin typeface="Segoe UI" panose="020B0502040204020203" pitchFamily="34" charset="0"/>
+                        </a:rPr>
+                        <a:t>Batch</a:t>
+                      </a:r>
+                      <a:r>
+                        <a:rPr lang="es-ES" sz="1700" b="1" i="0" dirty="0">
+                          <a:solidFill>
+                            <a:schemeClr val="tx1">
+                              <a:lumMod val="75000"/>
+                              <a:lumOff val="25000"/>
+                            </a:schemeClr>
+                          </a:solidFill>
+                          <a:effectLst/>
+                          <a:latin typeface="Segoe UI" panose="020B0502040204020203" pitchFamily="34" charset="0"/>
+                        </a:rPr>
+                        <a:t> </a:t>
+                      </a:r>
+                      <a:r>
+                        <a:rPr lang="es-ES" sz="1700" b="1" i="0" dirty="0" err="1">
+                          <a:solidFill>
+                            <a:schemeClr val="tx1">
+                              <a:lumMod val="75000"/>
+                              <a:lumOff val="25000"/>
+                            </a:schemeClr>
+                          </a:solidFill>
+                          <a:effectLst/>
+                          <a:latin typeface="Segoe UI" panose="020B0502040204020203" pitchFamily="34" charset="0"/>
+                        </a:rPr>
+                        <a:t>Size</a:t>
+                      </a:r>
+                      <a:r>
+                        <a:rPr lang="es-ES" sz="1700" b="1" i="0" dirty="0">
+                          <a:solidFill>
+                            <a:schemeClr val="tx1">
+                              <a:lumMod val="75000"/>
+                              <a:lumOff val="25000"/>
+                            </a:schemeClr>
+                          </a:solidFill>
+                          <a:effectLst/>
+                          <a:latin typeface="Segoe UI" panose="020B0502040204020203" pitchFamily="34" charset="0"/>
+                        </a:rPr>
+                        <a:t>:</a:t>
+                      </a:r>
+                      <a:r>
+                        <a:rPr lang="es-ES" sz="1700" b="0" i="0" dirty="0">
+                          <a:solidFill>
+                            <a:schemeClr val="tx1">
+                              <a:lumMod val="75000"/>
+                              <a:lumOff val="25000"/>
+                            </a:schemeClr>
+                          </a:solidFill>
+                          <a:effectLst/>
+                          <a:latin typeface="Segoe UI" panose="020B0502040204020203" pitchFamily="34" charset="0"/>
+                        </a:rPr>
+                        <a:t> 128</a:t>
+                      </a:r>
+                      <a:br>
+                        <a:rPr lang="es-ES" sz="1700" b="0" i="0" dirty="0">
+                          <a:solidFill>
+                            <a:schemeClr val="tx1">
+                              <a:lumMod val="75000"/>
+                              <a:lumOff val="25000"/>
+                            </a:schemeClr>
+                          </a:solidFill>
+                          <a:effectLst/>
+                          <a:latin typeface="Segoe UI" panose="020B0502040204020203" pitchFamily="34" charset="0"/>
+                        </a:rPr>
+                      </a:br>
+                      <a:endParaRPr lang="es-ES" sz="1700" b="0" i="0" dirty="0">
+                        <a:solidFill>
+                          <a:schemeClr val="tx1">
+                            <a:lumMod val="75000"/>
+                            <a:lumOff val="25000"/>
+                          </a:schemeClr>
+                        </a:solidFill>
+                        <a:effectLst/>
+                        <a:latin typeface="Segoe UI" panose="020B0502040204020203" pitchFamily="34" charset="0"/>
+                      </a:endParaRPr>
+                    </a:p>
+                    <a:p>
+                      <a:pPr fontAlgn="t">
+                        <a:lnSpc>
+                          <a:spcPts val="1500"/>
+                        </a:lnSpc>
+                        <a:buNone/>
+                      </a:pPr>
+                      <a:r>
+                        <a:rPr lang="es-ES" sz="1700" b="1" i="0" dirty="0">
+                          <a:solidFill>
+                            <a:schemeClr val="tx1">
+                              <a:lumMod val="75000"/>
+                              <a:lumOff val="25000"/>
+                            </a:schemeClr>
+                          </a:solidFill>
+                          <a:effectLst/>
+                          <a:latin typeface="Segoe UI" panose="020B0502040204020203" pitchFamily="34" charset="0"/>
+                        </a:rPr>
+                        <a:t>🔄 Target </a:t>
+                      </a:r>
+                      <a:r>
+                        <a:rPr lang="es-ES" sz="1700" b="1" i="0" dirty="0" err="1">
+                          <a:solidFill>
+                            <a:schemeClr val="tx1">
+                              <a:lumMod val="75000"/>
+                              <a:lumOff val="25000"/>
+                            </a:schemeClr>
+                          </a:solidFill>
+                          <a:effectLst/>
+                          <a:latin typeface="Segoe UI" panose="020B0502040204020203" pitchFamily="34" charset="0"/>
+                        </a:rPr>
+                        <a:t>Update</a:t>
+                      </a:r>
+                      <a:r>
+                        <a:rPr lang="es-ES" sz="1700" b="1" i="0" dirty="0">
+                          <a:solidFill>
+                            <a:schemeClr val="tx1">
+                              <a:lumMod val="75000"/>
+                              <a:lumOff val="25000"/>
+                            </a:schemeClr>
+                          </a:solidFill>
+                          <a:effectLst/>
+                          <a:latin typeface="Segoe UI" panose="020B0502040204020203" pitchFamily="34" charset="0"/>
+                        </a:rPr>
+                        <a:t>:</a:t>
+                      </a:r>
+                      <a:r>
+                        <a:rPr lang="es-ES" sz="1700" b="0" i="0" dirty="0">
+                          <a:solidFill>
+                            <a:schemeClr val="tx1">
+                              <a:lumMod val="75000"/>
+                              <a:lumOff val="25000"/>
+                            </a:schemeClr>
+                          </a:solidFill>
+                          <a:effectLst/>
+                          <a:latin typeface="Segoe UI" panose="020B0502040204020203" pitchFamily="34" charset="0"/>
+                        </a:rPr>
+                        <a:t> </a:t>
+                      </a:r>
+                      <a:r>
+                        <a:rPr lang="es-ES" sz="1700" b="0" i="0" dirty="0" err="1">
+                          <a:solidFill>
+                            <a:schemeClr val="tx1">
+                              <a:lumMod val="75000"/>
+                              <a:lumOff val="25000"/>
+                            </a:schemeClr>
+                          </a:solidFill>
+                          <a:effectLst/>
+                          <a:latin typeface="Segoe UI" panose="020B0502040204020203" pitchFamily="34" charset="0"/>
+                        </a:rPr>
+                        <a:t>Soft</a:t>
+                      </a:r>
+                      <a:r>
+                        <a:rPr lang="es-ES" sz="1700" b="0" i="0" dirty="0">
+                          <a:solidFill>
+                            <a:schemeClr val="tx1">
+                              <a:lumMod val="75000"/>
+                              <a:lumOff val="25000"/>
+                            </a:schemeClr>
+                          </a:solidFill>
+                          <a:effectLst/>
+                          <a:latin typeface="Segoe UI" panose="020B0502040204020203" pitchFamily="34" charset="0"/>
+                        </a:rPr>
+                        <a:t> </a:t>
+                      </a:r>
+                      <a:r>
+                        <a:rPr lang="es-ES" sz="1700" b="0" i="0" dirty="0" err="1">
+                          <a:solidFill>
+                            <a:schemeClr val="tx1">
+                              <a:lumMod val="75000"/>
+                              <a:lumOff val="25000"/>
+                            </a:schemeClr>
+                          </a:solidFill>
+                          <a:effectLst/>
+                          <a:latin typeface="Segoe UI" panose="020B0502040204020203" pitchFamily="34" charset="0"/>
+                        </a:rPr>
+                        <a:t>Updates</a:t>
+                      </a:r>
+                      <a:r>
+                        <a:rPr lang="es-ES" sz="1700" b="0" i="0" dirty="0">
+                          <a:solidFill>
+                            <a:schemeClr val="tx1">
+                              <a:lumMod val="75000"/>
+                              <a:lumOff val="25000"/>
+                            </a:schemeClr>
+                          </a:solidFill>
+                          <a:effectLst/>
+                          <a:latin typeface="Segoe UI" panose="020B0502040204020203" pitchFamily="34" charset="0"/>
+                        </a:rPr>
+                        <a:t> (</a:t>
+                      </a:r>
+                      <a:r>
+                        <a:rPr lang="es-ES" sz="1700" b="0" i="0" dirty="0" err="1">
+                          <a:solidFill>
+                            <a:schemeClr val="tx1">
+                              <a:lumMod val="75000"/>
+                              <a:lumOff val="25000"/>
+                            </a:schemeClr>
+                          </a:solidFill>
+                          <a:effectLst/>
+                          <a:latin typeface="Segoe UI" panose="020B0502040204020203" pitchFamily="34" charset="0"/>
+                        </a:rPr>
+                        <a:t>Polyak</a:t>
+                      </a:r>
+                      <a:r>
+                        <a:rPr lang="es-ES" sz="1700" b="0" i="0" dirty="0">
+                          <a:solidFill>
+                            <a:schemeClr val="tx1">
+                              <a:lumMod val="75000"/>
+                              <a:lumOff val="25000"/>
+                            </a:schemeClr>
+                          </a:solidFill>
+                          <a:effectLst/>
+                          <a:latin typeface="Segoe UI" panose="020B0502040204020203" pitchFamily="34" charset="0"/>
+                        </a:rPr>
+                        <a:t> </a:t>
+                      </a:r>
+                      <a:r>
+                        <a:rPr lang="es-ES" sz="1700" b="0" i="0" dirty="0" err="1">
+                          <a:solidFill>
+                            <a:schemeClr val="tx1">
+                              <a:lumMod val="75000"/>
+                              <a:lumOff val="25000"/>
+                            </a:schemeClr>
+                          </a:solidFill>
+                          <a:effectLst/>
+                          <a:latin typeface="Segoe UI" panose="020B0502040204020203" pitchFamily="34" charset="0"/>
+                        </a:rPr>
+                        <a:t>Averaging</a:t>
+                      </a:r>
+                      <a:r>
+                        <a:rPr lang="es-ES" sz="1700" b="0" i="0" dirty="0">
+                          <a:solidFill>
+                            <a:schemeClr val="tx1">
+                              <a:lumMod val="75000"/>
+                              <a:lumOff val="25000"/>
+                            </a:schemeClr>
+                          </a:solidFill>
+                          <a:effectLst/>
+                          <a:latin typeface="Segoe UI" panose="020B0502040204020203" pitchFamily="34" charset="0"/>
+                        </a:rPr>
+                        <a:t>), TAU = 0.005</a:t>
+                      </a:r>
+                      <a:br>
+                        <a:rPr lang="es-ES" sz="1700" b="0" i="0" dirty="0">
+                          <a:solidFill>
+                            <a:schemeClr val="tx1">
+                              <a:lumMod val="75000"/>
+                              <a:lumOff val="25000"/>
+                            </a:schemeClr>
+                          </a:solidFill>
+                          <a:effectLst/>
+                          <a:latin typeface="Segoe UI" panose="020B0502040204020203" pitchFamily="34" charset="0"/>
+                        </a:rPr>
+                      </a:br>
+                      <a:endParaRPr lang="es-ES" sz="1700" b="0" i="0" dirty="0">
+                        <a:solidFill>
+                          <a:schemeClr val="tx1">
+                            <a:lumMod val="75000"/>
+                            <a:lumOff val="25000"/>
+                          </a:schemeClr>
+                        </a:solidFill>
+                        <a:effectLst/>
+                        <a:latin typeface="Segoe UI" panose="020B0502040204020203" pitchFamily="34" charset="0"/>
+                      </a:endParaRPr>
+                    </a:p>
+                    <a:p>
+                      <a:pPr fontAlgn="t">
+                        <a:lnSpc>
+                          <a:spcPts val="1500"/>
+                        </a:lnSpc>
+                        <a:buNone/>
+                      </a:pPr>
+                      <a:r>
+                        <a:rPr lang="es-ES" sz="1700" b="1" i="0" dirty="0">
+                          <a:solidFill>
+                            <a:schemeClr val="tx1">
+                              <a:lumMod val="75000"/>
+                              <a:lumOff val="25000"/>
+                            </a:schemeClr>
+                          </a:solidFill>
+                          <a:effectLst/>
+                          <a:latin typeface="Segoe UI" panose="020B0502040204020203" pitchFamily="34" charset="0"/>
+                        </a:rPr>
+                        <a:t>🎲 </a:t>
+                      </a:r>
+                      <a:r>
+                        <a:rPr lang="es-ES" sz="1700" b="1" i="0" dirty="0" err="1">
+                          <a:solidFill>
+                            <a:schemeClr val="tx1">
+                              <a:lumMod val="75000"/>
+                              <a:lumOff val="25000"/>
+                            </a:schemeClr>
+                          </a:solidFill>
+                          <a:effectLst/>
+                          <a:latin typeface="Segoe UI" panose="020B0502040204020203" pitchFamily="34" charset="0"/>
+                        </a:rPr>
+                        <a:t>Exploration</a:t>
+                      </a:r>
+                      <a:r>
+                        <a:rPr lang="es-ES" sz="1700" b="1" i="0" dirty="0">
+                          <a:solidFill>
+                            <a:schemeClr val="tx1">
+                              <a:lumMod val="75000"/>
+                              <a:lumOff val="25000"/>
+                            </a:schemeClr>
+                          </a:solidFill>
+                          <a:effectLst/>
+                          <a:latin typeface="Segoe UI" panose="020B0502040204020203" pitchFamily="34" charset="0"/>
+                        </a:rPr>
+                        <a:t> </a:t>
+                      </a:r>
+                      <a:r>
+                        <a:rPr lang="es-ES" sz="1700" b="1" i="0" dirty="0" err="1">
+                          <a:solidFill>
+                            <a:schemeClr val="tx1">
+                              <a:lumMod val="75000"/>
+                              <a:lumOff val="25000"/>
+                            </a:schemeClr>
+                          </a:solidFill>
+                          <a:effectLst/>
+                          <a:latin typeface="Segoe UI" panose="020B0502040204020203" pitchFamily="34" charset="0"/>
+                        </a:rPr>
+                        <a:t>Strategy</a:t>
+                      </a:r>
+                      <a:r>
+                        <a:rPr lang="es-ES" sz="1700" b="1" i="0" dirty="0">
+                          <a:solidFill>
+                            <a:schemeClr val="tx1">
+                              <a:lumMod val="75000"/>
+                              <a:lumOff val="25000"/>
+                            </a:schemeClr>
+                          </a:solidFill>
+                          <a:effectLst/>
+                          <a:latin typeface="Segoe UI" panose="020B0502040204020203" pitchFamily="34" charset="0"/>
+                        </a:rPr>
+                        <a:t>:</a:t>
+                      </a:r>
+                      <a:r>
+                        <a:rPr lang="es-ES" sz="1700" b="0" i="0" dirty="0">
+                          <a:solidFill>
+                            <a:schemeClr val="tx1">
+                              <a:lumMod val="75000"/>
+                              <a:lumOff val="25000"/>
+                            </a:schemeClr>
+                          </a:solidFill>
+                          <a:effectLst/>
+                          <a:latin typeface="Segoe UI" panose="020B0502040204020203" pitchFamily="34" charset="0"/>
+                        </a:rPr>
+                        <a:t> </a:t>
+                      </a:r>
+                      <a:r>
+                        <a:rPr lang="el-GR" sz="1700" b="0" i="0" dirty="0">
+                          <a:solidFill>
+                            <a:schemeClr val="tx1">
+                              <a:lumMod val="75000"/>
+                              <a:lumOff val="25000"/>
+                            </a:schemeClr>
+                          </a:solidFill>
+                          <a:effectLst/>
+                          <a:latin typeface="Segoe UI" panose="020B0502040204020203" pitchFamily="34" charset="0"/>
+                        </a:rPr>
+                        <a:t>ε-</a:t>
+                      </a:r>
+                      <a:r>
+                        <a:rPr lang="es-ES" sz="1700" b="0" i="0" dirty="0" err="1">
+                          <a:solidFill>
+                            <a:schemeClr val="tx1">
+                              <a:lumMod val="75000"/>
+                              <a:lumOff val="25000"/>
+                            </a:schemeClr>
+                          </a:solidFill>
+                          <a:effectLst/>
+                          <a:latin typeface="Segoe UI" panose="020B0502040204020203" pitchFamily="34" charset="0"/>
+                        </a:rPr>
+                        <a:t>greedy</a:t>
+                      </a:r>
+                      <a:r>
+                        <a:rPr lang="es-ES" sz="1700" b="0" i="0" dirty="0">
+                          <a:solidFill>
+                            <a:schemeClr val="tx1">
+                              <a:lumMod val="75000"/>
+                              <a:lumOff val="25000"/>
+                            </a:schemeClr>
+                          </a:solidFill>
+                          <a:effectLst/>
+                          <a:latin typeface="Segoe UI" panose="020B0502040204020203" pitchFamily="34" charset="0"/>
+                        </a:rPr>
+                        <a:t> (</a:t>
+                      </a:r>
+                      <a:r>
+                        <a:rPr lang="el-GR" sz="1700" b="0" i="0" dirty="0">
+                          <a:solidFill>
+                            <a:schemeClr val="tx1">
+                              <a:lumMod val="75000"/>
+                              <a:lumOff val="25000"/>
+                            </a:schemeClr>
+                          </a:solidFill>
+                          <a:effectLst/>
+                          <a:latin typeface="Segoe UI" panose="020B0502040204020203" pitchFamily="34" charset="0"/>
+                        </a:rPr>
+                        <a:t>ε </a:t>
+                      </a:r>
+                      <a:r>
+                        <a:rPr lang="es-ES" sz="1700" b="0" i="0" dirty="0" err="1">
+                          <a:solidFill>
+                            <a:schemeClr val="tx1">
+                              <a:lumMod val="75000"/>
+                              <a:lumOff val="25000"/>
+                            </a:schemeClr>
+                          </a:solidFill>
+                          <a:effectLst/>
+                          <a:latin typeface="Segoe UI" panose="020B0502040204020203" pitchFamily="34" charset="0"/>
+                        </a:rPr>
+                        <a:t>decays</a:t>
+                      </a:r>
+                      <a:r>
+                        <a:rPr lang="es-ES" sz="1700" b="0" i="0" dirty="0">
+                          <a:solidFill>
+                            <a:schemeClr val="tx1">
+                              <a:lumMod val="75000"/>
+                              <a:lumOff val="25000"/>
+                            </a:schemeClr>
+                          </a:solidFill>
+                          <a:effectLst/>
+                          <a:latin typeface="Segoe UI" panose="020B0502040204020203" pitchFamily="34" charset="0"/>
+                        </a:rPr>
+                        <a:t> </a:t>
+                      </a:r>
+                      <a:r>
+                        <a:rPr lang="es-ES" sz="1700" b="0" i="0" dirty="0" err="1">
+                          <a:solidFill>
+                            <a:schemeClr val="tx1">
+                              <a:lumMod val="75000"/>
+                              <a:lumOff val="25000"/>
+                            </a:schemeClr>
+                          </a:solidFill>
+                          <a:effectLst/>
+                          <a:latin typeface="Segoe UI" panose="020B0502040204020203" pitchFamily="34" charset="0"/>
+                        </a:rPr>
+                        <a:t>from</a:t>
+                      </a:r>
+                      <a:r>
+                        <a:rPr lang="es-ES" sz="1700" b="0" i="0" dirty="0">
+                          <a:solidFill>
+                            <a:schemeClr val="tx1">
+                              <a:lumMod val="75000"/>
+                              <a:lumOff val="25000"/>
+                            </a:schemeClr>
+                          </a:solidFill>
+                          <a:effectLst/>
+                          <a:latin typeface="Segoe UI" panose="020B0502040204020203" pitchFamily="34" charset="0"/>
+                        </a:rPr>
+                        <a:t> 1.0 </a:t>
+                      </a:r>
+                      <a:r>
+                        <a:rPr lang="es-ES" sz="1700" b="0" i="0" dirty="0" err="1">
+                          <a:solidFill>
+                            <a:schemeClr val="tx1">
+                              <a:lumMod val="75000"/>
+                              <a:lumOff val="25000"/>
+                            </a:schemeClr>
+                          </a:solidFill>
+                          <a:effectLst/>
+                          <a:latin typeface="Segoe UI" panose="020B0502040204020203" pitchFamily="34" charset="0"/>
+                        </a:rPr>
+                        <a:t>to</a:t>
+                      </a:r>
+                      <a:r>
+                        <a:rPr lang="es-ES" sz="1700" b="0" i="0" dirty="0">
+                          <a:solidFill>
+                            <a:schemeClr val="tx1">
+                              <a:lumMod val="75000"/>
+                              <a:lumOff val="25000"/>
+                            </a:schemeClr>
+                          </a:solidFill>
+                          <a:effectLst/>
+                          <a:latin typeface="Segoe UI" panose="020B0502040204020203" pitchFamily="34" charset="0"/>
+                        </a:rPr>
+                        <a:t> 0.01 </a:t>
+                      </a:r>
+                      <a:r>
+                        <a:rPr lang="es-ES" sz="1700" b="0" i="0" dirty="0" err="1">
+                          <a:solidFill>
+                            <a:schemeClr val="tx1">
+                              <a:lumMod val="75000"/>
+                              <a:lumOff val="25000"/>
+                            </a:schemeClr>
+                          </a:solidFill>
+                          <a:effectLst/>
+                          <a:latin typeface="Segoe UI" panose="020B0502040204020203" pitchFamily="34" charset="0"/>
+                        </a:rPr>
+                        <a:t>with</a:t>
+                      </a:r>
+                      <a:r>
+                        <a:rPr lang="es-ES" sz="1700" b="0" i="0" dirty="0">
+                          <a:solidFill>
+                            <a:schemeClr val="tx1">
+                              <a:lumMod val="75000"/>
+                              <a:lumOff val="25000"/>
+                            </a:schemeClr>
+                          </a:solidFill>
+                          <a:effectLst/>
+                          <a:latin typeface="Segoe UI" panose="020B0502040204020203" pitchFamily="34" charset="0"/>
+                        </a:rPr>
+                        <a:t> a 0.99 </a:t>
+                      </a:r>
+                      <a:r>
+                        <a:rPr lang="es-ES" sz="1700" b="0" i="0" dirty="0" err="1">
+                          <a:solidFill>
+                            <a:schemeClr val="tx1">
+                              <a:lumMod val="75000"/>
+                              <a:lumOff val="25000"/>
+                            </a:schemeClr>
+                          </a:solidFill>
+                          <a:effectLst/>
+                          <a:latin typeface="Segoe UI" panose="020B0502040204020203" pitchFamily="34" charset="0"/>
+                        </a:rPr>
+                        <a:t>decay</a:t>
+                      </a:r>
+                      <a:r>
+                        <a:rPr lang="es-ES" sz="1700" b="0" i="0" dirty="0">
+                          <a:solidFill>
+                            <a:schemeClr val="tx1">
+                              <a:lumMod val="75000"/>
+                              <a:lumOff val="25000"/>
+                            </a:schemeClr>
+                          </a:solidFill>
+                          <a:effectLst/>
+                          <a:latin typeface="Segoe UI" panose="020B0502040204020203" pitchFamily="34" charset="0"/>
+                        </a:rPr>
+                        <a:t> factor per </a:t>
+                      </a:r>
+                      <a:r>
+                        <a:rPr lang="es-ES" sz="1700" b="0" i="0" dirty="0" err="1">
+                          <a:solidFill>
+                            <a:schemeClr val="tx1">
+                              <a:lumMod val="75000"/>
+                              <a:lumOff val="25000"/>
+                            </a:schemeClr>
+                          </a:solidFill>
+                          <a:effectLst/>
+                          <a:latin typeface="Segoe UI" panose="020B0502040204020203" pitchFamily="34" charset="0"/>
+                        </a:rPr>
+                        <a:t>episode</a:t>
+                      </a:r>
+                      <a:r>
+                        <a:rPr lang="es-ES" sz="1700" b="0" i="0" dirty="0">
+                          <a:solidFill>
+                            <a:schemeClr val="tx1">
+                              <a:lumMod val="75000"/>
+                              <a:lumOff val="25000"/>
+                            </a:schemeClr>
+                          </a:solidFill>
+                          <a:effectLst/>
+                          <a:latin typeface="Segoe UI" panose="020B0502040204020203" pitchFamily="34" charset="0"/>
+                        </a:rPr>
+                        <a:t>)</a:t>
+                      </a:r>
+                      <a:br>
+                        <a:rPr lang="es-ES" sz="1700" b="0" i="0" dirty="0">
+                          <a:solidFill>
+                            <a:schemeClr val="tx1">
+                              <a:lumMod val="75000"/>
+                              <a:lumOff val="25000"/>
+                            </a:schemeClr>
+                          </a:solidFill>
+                          <a:effectLst/>
+                          <a:latin typeface="Segoe UI" panose="020B0502040204020203" pitchFamily="34" charset="0"/>
+                        </a:rPr>
+                      </a:br>
+                      <a:endParaRPr lang="es-ES" sz="1700" b="0" i="0" dirty="0">
+                        <a:solidFill>
+                          <a:schemeClr val="tx1">
+                            <a:lumMod val="75000"/>
+                            <a:lumOff val="25000"/>
+                          </a:schemeClr>
+                        </a:solidFill>
+                        <a:effectLst/>
+                        <a:latin typeface="Segoe UI" panose="020B0502040204020203" pitchFamily="34" charset="0"/>
+                      </a:endParaRPr>
+                    </a:p>
+                    <a:p>
+                      <a:pPr fontAlgn="t">
+                        <a:lnSpc>
+                          <a:spcPts val="1500"/>
+                        </a:lnSpc>
+                        <a:buNone/>
+                      </a:pPr>
+                      <a:r>
+                        <a:rPr lang="es-ES" sz="1700" b="1" i="0" dirty="0">
+                          <a:solidFill>
+                            <a:schemeClr val="tx1">
+                              <a:lumMod val="75000"/>
+                              <a:lumOff val="25000"/>
+                            </a:schemeClr>
+                          </a:solidFill>
+                          <a:effectLst/>
+                          <a:latin typeface="Segoe UI" panose="020B0502040204020203" pitchFamily="34" charset="0"/>
+                        </a:rPr>
+                        <a:t>🛠️ </a:t>
+                      </a:r>
+                      <a:r>
+                        <a:rPr lang="es-ES" sz="1700" b="1" i="0" dirty="0" err="1">
+                          <a:solidFill>
+                            <a:schemeClr val="tx1">
+                              <a:lumMod val="75000"/>
+                              <a:lumOff val="25000"/>
+                            </a:schemeClr>
+                          </a:solidFill>
+                          <a:effectLst/>
+                          <a:latin typeface="Segoe UI" panose="020B0502040204020203" pitchFamily="34" charset="0"/>
+                        </a:rPr>
+                        <a:t>Optimizer</a:t>
+                      </a:r>
+                      <a:r>
+                        <a:rPr lang="es-ES" sz="1700" b="1" i="0" dirty="0">
+                          <a:solidFill>
+                            <a:schemeClr val="tx1">
+                              <a:lumMod val="75000"/>
+                              <a:lumOff val="25000"/>
+                            </a:schemeClr>
+                          </a:solidFill>
+                          <a:effectLst/>
+                          <a:latin typeface="Segoe UI" panose="020B0502040204020203" pitchFamily="34" charset="0"/>
+                        </a:rPr>
+                        <a:t>:</a:t>
+                      </a:r>
+                      <a:r>
+                        <a:rPr lang="es-ES" sz="1700" b="0" i="0" dirty="0">
+                          <a:solidFill>
+                            <a:schemeClr val="tx1">
+                              <a:lumMod val="75000"/>
+                              <a:lumOff val="25000"/>
+                            </a:schemeClr>
+                          </a:solidFill>
+                          <a:effectLst/>
+                          <a:latin typeface="Segoe UI" panose="020B0502040204020203" pitchFamily="34" charset="0"/>
+                        </a:rPr>
+                        <a:t> </a:t>
+                      </a:r>
+                      <a:r>
+                        <a:rPr lang="es-ES" sz="1700" b="0" i="0" dirty="0" err="1">
+                          <a:solidFill>
+                            <a:schemeClr val="tx1">
+                              <a:lumMod val="75000"/>
+                              <a:lumOff val="25000"/>
+                            </a:schemeClr>
+                          </a:solidFill>
+                          <a:effectLst/>
+                          <a:latin typeface="Segoe UI" panose="020B0502040204020203" pitchFamily="34" charset="0"/>
+                        </a:rPr>
+                        <a:t>AdamW</a:t>
+                      </a:r>
+                      <a:br>
+                        <a:rPr lang="es-ES" sz="1700" b="0" i="0" dirty="0">
+                          <a:solidFill>
+                            <a:schemeClr val="tx1">
+                              <a:lumMod val="75000"/>
+                              <a:lumOff val="25000"/>
+                            </a:schemeClr>
+                          </a:solidFill>
+                          <a:effectLst/>
+                          <a:latin typeface="Segoe UI" panose="020B0502040204020203" pitchFamily="34" charset="0"/>
+                        </a:rPr>
+                      </a:br>
+                      <a:endParaRPr lang="es-ES" sz="1700" b="0" i="0" dirty="0">
+                        <a:solidFill>
+                          <a:schemeClr val="tx1">
+                            <a:lumMod val="75000"/>
+                            <a:lumOff val="25000"/>
+                          </a:schemeClr>
+                        </a:solidFill>
+                        <a:effectLst/>
+                        <a:latin typeface="Segoe UI" panose="020B0502040204020203" pitchFamily="34" charset="0"/>
+                      </a:endParaRPr>
+                    </a:p>
+                    <a:p>
+                      <a:pPr fontAlgn="t">
+                        <a:lnSpc>
+                          <a:spcPts val="1500"/>
+                        </a:lnSpc>
+                        <a:buNone/>
+                      </a:pPr>
+                      <a:r>
+                        <a:rPr lang="es-ES" sz="1700" b="1" i="0" dirty="0">
+                          <a:solidFill>
+                            <a:schemeClr val="tx1">
+                              <a:lumMod val="75000"/>
+                              <a:lumOff val="25000"/>
+                            </a:schemeClr>
+                          </a:solidFill>
+                          <a:effectLst/>
+                          <a:latin typeface="Segoe UI" panose="020B0502040204020203" pitchFamily="34" charset="0"/>
+                        </a:rPr>
+                        <a:t>📉 </a:t>
+                      </a:r>
+                      <a:r>
+                        <a:rPr lang="es-ES" sz="1700" b="1" i="0" dirty="0" err="1">
+                          <a:solidFill>
+                            <a:schemeClr val="tx1">
+                              <a:lumMod val="75000"/>
+                              <a:lumOff val="25000"/>
+                            </a:schemeClr>
+                          </a:solidFill>
+                          <a:effectLst/>
+                          <a:latin typeface="Segoe UI" panose="020B0502040204020203" pitchFamily="34" charset="0"/>
+                        </a:rPr>
+                        <a:t>Loss</a:t>
+                      </a:r>
+                      <a:r>
+                        <a:rPr lang="es-ES" sz="1700" b="1" i="0" dirty="0">
+                          <a:solidFill>
+                            <a:schemeClr val="tx1">
+                              <a:lumMod val="75000"/>
+                              <a:lumOff val="25000"/>
+                            </a:schemeClr>
+                          </a:solidFill>
+                          <a:effectLst/>
+                          <a:latin typeface="Segoe UI" panose="020B0502040204020203" pitchFamily="34" charset="0"/>
+                        </a:rPr>
+                        <a:t> </a:t>
+                      </a:r>
+                      <a:r>
+                        <a:rPr lang="es-ES" sz="1700" b="1" i="0" dirty="0" err="1">
+                          <a:solidFill>
+                            <a:schemeClr val="tx1">
+                              <a:lumMod val="75000"/>
+                              <a:lumOff val="25000"/>
+                            </a:schemeClr>
+                          </a:solidFill>
+                          <a:effectLst/>
+                          <a:latin typeface="Segoe UI" panose="020B0502040204020203" pitchFamily="34" charset="0"/>
+                        </a:rPr>
+                        <a:t>Function</a:t>
+                      </a:r>
+                      <a:r>
+                        <a:rPr lang="es-ES" sz="1700" b="1" i="0" dirty="0">
+                          <a:solidFill>
+                            <a:schemeClr val="tx1">
+                              <a:lumMod val="75000"/>
+                              <a:lumOff val="25000"/>
+                            </a:schemeClr>
+                          </a:solidFill>
+                          <a:effectLst/>
+                          <a:latin typeface="Segoe UI" panose="020B0502040204020203" pitchFamily="34" charset="0"/>
+                        </a:rPr>
+                        <a:t>:</a:t>
+                      </a:r>
+                      <a:r>
+                        <a:rPr lang="es-ES" sz="1700" b="0" i="0" dirty="0">
+                          <a:solidFill>
+                            <a:schemeClr val="tx1">
+                              <a:lumMod val="75000"/>
+                              <a:lumOff val="25000"/>
+                            </a:schemeClr>
+                          </a:solidFill>
+                          <a:effectLst/>
+                          <a:latin typeface="Segoe UI" panose="020B0502040204020203" pitchFamily="34" charset="0"/>
+                        </a:rPr>
+                        <a:t> </a:t>
+                      </a:r>
+                      <a:r>
+                        <a:rPr lang="es-ES" sz="1700" b="0" i="0" dirty="0" err="1">
+                          <a:solidFill>
+                            <a:schemeClr val="tx1">
+                              <a:lumMod val="75000"/>
+                              <a:lumOff val="25000"/>
+                            </a:schemeClr>
+                          </a:solidFill>
+                          <a:effectLst/>
+                          <a:latin typeface="Segoe UI" panose="020B0502040204020203" pitchFamily="34" charset="0"/>
+                        </a:rPr>
+                        <a:t>Smooth</a:t>
+                      </a:r>
+                      <a:r>
+                        <a:rPr lang="es-ES" sz="1700" b="0" i="0" dirty="0">
+                          <a:solidFill>
+                            <a:schemeClr val="tx1">
+                              <a:lumMod val="75000"/>
+                              <a:lumOff val="25000"/>
+                            </a:schemeClr>
+                          </a:solidFill>
+                          <a:effectLst/>
+                          <a:latin typeface="Segoe UI" panose="020B0502040204020203" pitchFamily="34" charset="0"/>
+                        </a:rPr>
+                        <a:t> L1 los</a:t>
+                      </a:r>
+                    </a:p>
+                  </a:txBody>
+                  <a:tcPr marL="278632" marR="144889" marT="144889" marB="144889">
+                    <a:lnL w="12700" cmpd="sng">
+                      <a:noFill/>
+                      <a:prstDash val="solid"/>
+                    </a:lnL>
+                    <a:lnR w="12700" cmpd="sng">
+                      <a:noFill/>
+                      <a:prstDash val="solid"/>
+                    </a:lnR>
+                    <a:lnT w="12700" cmpd="sng">
+                      <a:noFill/>
+                      <a:prstDash val="solid"/>
+                    </a:lnT>
+                    <a:lnB w="12700" cmpd="sng">
+                      <a:noFill/>
+                      <a:prstDash val="solid"/>
+                    </a:lnB>
+                    <a:solidFill>
+                      <a:srgbClr val="B4BCBE">
+                        <a:alpha val="34902"/>
+                      </a:srgbClr>
+                    </a:solidFill>
+                  </a:tcPr>
+                </a:tc>
+                <a:extLst>
+                  <a:ext uri="{0D108BD9-81ED-4DB2-BD59-A6C34878D82A}">
+                    <a16:rowId xmlns:a16="http://schemas.microsoft.com/office/drawing/2014/main" val="1838742390"/>
+                  </a:ext>
+                </a:extLst>
+              </a:tr>
+              <a:tr h="485463">
+                <a:tc>
+                  <a:txBody>
+                    <a:bodyPr/>
+                    <a:lstStyle/>
+                    <a:p>
+                      <a:endParaRPr lang="es-ES" sz="1700" dirty="0">
+                        <a:solidFill>
+                          <a:schemeClr val="tx1">
+                            <a:lumMod val="75000"/>
+                            <a:lumOff val="25000"/>
+                          </a:schemeClr>
+                        </a:solidFill>
+                      </a:endParaRPr>
+                    </a:p>
+                  </a:txBody>
+                  <a:tcPr marL="278632" marR="144889" marT="144889" marB="144889">
+                    <a:lnL w="12700" cmpd="sng">
+                      <a:noFill/>
+                      <a:prstDash val="solid"/>
+                    </a:lnL>
+                    <a:lnR w="12700" cmpd="sng">
+                      <a:noFill/>
+                      <a:prstDash val="solid"/>
+                    </a:lnR>
+                    <a:lnT w="12700" cmpd="sng">
+                      <a:noFill/>
+                      <a:prstDash val="solid"/>
+                    </a:lnT>
+                    <a:lnB w="12700" cmpd="sng">
+                      <a:noFill/>
+                      <a:prstDash val="solid"/>
+                    </a:lnB>
+                    <a:solidFill>
+                      <a:srgbClr val="B4BCBE">
+                        <a:alpha val="34902"/>
+                      </a:srgbClr>
+                    </a:solidFill>
+                  </a:tcPr>
+                </a:tc>
+                <a:extLst>
+                  <a:ext uri="{0D108BD9-81ED-4DB2-BD59-A6C34878D82A}">
+                    <a16:rowId xmlns:a16="http://schemas.microsoft.com/office/drawing/2014/main" val="1612969945"/>
+                  </a:ext>
+                </a:extLst>
+              </a:tr>
+            </a:tbl>
+          </a:graphicData>
+        </a:graphic>
+      </p:graphicFrame>
+    </p:spTree>
+    <p:extLst>
+      <p:ext uri="{BB962C8B-B14F-4D97-AF65-F5344CB8AC3E}">
+        <p14:creationId xmlns:p14="http://schemas.microsoft.com/office/powerpoint/2010/main" val="3855585840"/>
+      </p:ext>
+    </p:extLst>
+  </p:cSld>
+  <p:clrMapOvr>
+    <a:masterClrMapping/>
+  </p:clrMapOvr>
+</p:sld>
+</file>
+
+<file path=ppt/slides/slide11.xml><?xml version="1.0" encoding="utf-8"?>
+<p:sld xmlns:a="http://schemas.openxmlformats.org/drawingml/2006/main" xmlns:r="http://schemas.openxmlformats.org/officeDocument/2006/relationships" xmlns:p="http://schemas.openxmlformats.org/presentationml/2006/main">
+  <p:cSld>
+    <p:spTree>
+      <p:nvGrpSpPr>
+        <p:cNvPr id="1" name="">
+          <a:extLst>
+            <a:ext uri="{FF2B5EF4-FFF2-40B4-BE49-F238E27FC236}">
+              <a16:creationId xmlns:a16="http://schemas.microsoft.com/office/drawing/2014/main" id="{062063A4-C606-3F49-5C85-5725762D1497}"/>
+            </a:ext>
+          </a:extLst>
+        </p:cNvPr>
+        <p:cNvGrpSpPr/>
+        <p:nvPr/>
+      </p:nvGrpSpPr>
+      <p:grpSpPr>
+        <a:xfrm>
+          <a:off x="0" y="0"/>
+          <a:ext cx="0" cy="0"/>
+          <a:chOff x="0" y="0"/>
+          <a:chExt cx="0" cy="0"/>
+        </a:xfrm>
+      </p:grpSpPr>
+      <p:sp>
+        <p:nvSpPr>
+          <p:cNvPr id="2" name="Título 1">
+            <a:extLst>
+              <a:ext uri="{FF2B5EF4-FFF2-40B4-BE49-F238E27FC236}">
+                <a16:creationId xmlns:a16="http://schemas.microsoft.com/office/drawing/2014/main" id="{86449507-FBA4-EEAC-1559-BAC0C787D821}"/>
+              </a:ext>
+            </a:extLst>
+          </p:cNvPr>
+          <p:cNvSpPr>
+            <a:spLocks noGrp="1"/>
+          </p:cNvSpPr>
+          <p:nvPr>
+            <p:ph type="ctrTitle"/>
+          </p:nvPr>
+        </p:nvSpPr>
+        <p:spPr>
+          <a:xfrm>
+            <a:off x="387212" y="3037144"/>
+            <a:ext cx="3571810" cy="783709"/>
+          </a:xfrm>
+        </p:spPr>
+        <p:txBody>
+          <a:bodyPr>
+            <a:normAutofit/>
+          </a:bodyPr>
+          <a:lstStyle/>
+          <a:p>
+            <a:pPr algn="l"/>
+            <a:r>
+              <a:rPr lang="es-ES" sz="3600" dirty="0" err="1"/>
+              <a:t>Experimentation</a:t>
+            </a:r>
+            <a:endParaRPr lang="es-ES" sz="3600" dirty="0"/>
+          </a:p>
+        </p:txBody>
+      </p:sp>
+      <p:graphicFrame>
+        <p:nvGraphicFramePr>
+          <p:cNvPr id="5" name="Tabla 4">
+            <a:extLst>
+              <a:ext uri="{FF2B5EF4-FFF2-40B4-BE49-F238E27FC236}">
+                <a16:creationId xmlns:a16="http://schemas.microsoft.com/office/drawing/2014/main" id="{E0188A8F-14C3-B5F0-CC1C-A316A61C5FB1}"/>
+              </a:ext>
+            </a:extLst>
+          </p:cNvPr>
+          <p:cNvGraphicFramePr>
+            <a:graphicFrameLocks noGrp="1"/>
+          </p:cNvGraphicFramePr>
+          <p:nvPr>
+            <p:extLst>
+              <p:ext uri="{D42A27DB-BD31-4B8C-83A1-F6EECF244321}">
+                <p14:modId xmlns:p14="http://schemas.microsoft.com/office/powerpoint/2010/main" val="2812895720"/>
+              </p:ext>
+            </p:extLst>
+          </p:nvPr>
+        </p:nvGraphicFramePr>
+        <p:xfrm>
+          <a:off x="4518541" y="1418472"/>
+          <a:ext cx="7214616" cy="4211555"/>
+        </p:xfrm>
+        <a:graphic>
+          <a:graphicData uri="http://schemas.openxmlformats.org/drawingml/2006/table">
+            <a:tbl>
+              <a:tblPr>
+                <a:solidFill>
+                  <a:srgbClr val="F2F2F2">
+                    <a:alpha val="45098"/>
+                  </a:srgbClr>
+                </a:solidFill>
+              </a:tblPr>
+              <a:tblGrid>
+                <a:gridCol w="7214616">
+                  <a:extLst>
+                    <a:ext uri="{9D8B030D-6E8A-4147-A177-3AD203B41FA5}">
+                      <a16:colId xmlns:a16="http://schemas.microsoft.com/office/drawing/2014/main" val="2773077775"/>
+                    </a:ext>
+                  </a:extLst>
+                </a:gridCol>
+              </a:tblGrid>
+              <a:tr h="2996654">
+                <a:tc>
+                  <a:txBody>
+                    <a:bodyPr/>
+                    <a:lstStyle/>
+                    <a:p>
+                      <a:pPr fontAlgn="t">
+                        <a:lnSpc>
+                          <a:spcPts val="1500"/>
+                        </a:lnSpc>
+                        <a:buNone/>
+                      </a:pPr>
+                      <a:r>
+                        <a:rPr lang="es-ES" sz="1500" b="1" i="0" cap="none" spc="0" dirty="0">
+                          <a:solidFill>
+                            <a:schemeClr val="tx1"/>
+                          </a:solidFill>
+                          <a:effectLst/>
+                          <a:latin typeface="Segoe UI" panose="020B0502040204020203" pitchFamily="34" charset="0"/>
+                        </a:rPr>
+                        <a:t>🧮 2368 </a:t>
+                      </a:r>
+                      <a:r>
+                        <a:rPr lang="es-ES" sz="1500" b="1" i="0" cap="none" spc="0" dirty="0" err="1">
+                          <a:solidFill>
+                            <a:schemeClr val="tx1"/>
+                          </a:solidFill>
+                          <a:effectLst/>
+                          <a:latin typeface="Segoe UI" panose="020B0502040204020203" pitchFamily="34" charset="0"/>
+                        </a:rPr>
+                        <a:t>eps</a:t>
+                      </a:r>
+                      <a:r>
+                        <a:rPr lang="es-ES" sz="1500" b="1" i="0" cap="none" spc="0" dirty="0">
+                          <a:solidFill>
+                            <a:schemeClr val="tx1"/>
+                          </a:solidFill>
+                          <a:effectLst/>
+                          <a:latin typeface="Segoe UI" panose="020B0502040204020203" pitchFamily="34" charset="0"/>
+                        </a:rPr>
+                        <a:t> (</a:t>
+                      </a:r>
+                      <a:r>
+                        <a:rPr lang="es-ES" sz="1500" b="1" i="0" cap="none" spc="0" dirty="0" err="1">
+                          <a:solidFill>
+                            <a:schemeClr val="tx1"/>
+                          </a:solidFill>
+                          <a:effectLst/>
+                          <a:latin typeface="Segoe UI" panose="020B0502040204020203" pitchFamily="34" charset="0"/>
+                        </a:rPr>
+                        <a:t>Best</a:t>
+                      </a:r>
+                      <a:r>
+                        <a:rPr lang="es-ES" sz="1500" b="1" i="0" cap="none" spc="0" dirty="0">
+                          <a:solidFill>
+                            <a:schemeClr val="tx1"/>
+                          </a:solidFill>
+                          <a:effectLst/>
+                          <a:latin typeface="Segoe UI" panose="020B0502040204020203" pitchFamily="34" charset="0"/>
+                        </a:rPr>
+                        <a:t> </a:t>
+                      </a:r>
+                      <a:r>
+                        <a:rPr lang="es-ES" sz="1500" b="1" i="0" cap="none" spc="0" dirty="0" err="1">
+                          <a:solidFill>
+                            <a:schemeClr val="tx1"/>
+                          </a:solidFill>
+                          <a:effectLst/>
+                          <a:latin typeface="Segoe UI" panose="020B0502040204020203" pitchFamily="34" charset="0"/>
+                        </a:rPr>
+                        <a:t>model</a:t>
+                      </a:r>
+                      <a:r>
+                        <a:rPr lang="es-ES" sz="1500" b="1" i="0" cap="none" spc="0" dirty="0">
+                          <a:solidFill>
+                            <a:schemeClr val="tx1"/>
+                          </a:solidFill>
+                          <a:effectLst/>
+                          <a:latin typeface="Segoe UI" panose="020B0502040204020203" pitchFamily="34" charset="0"/>
+                        </a:rPr>
+                        <a:t>!) </a:t>
+                      </a:r>
+                      <a:r>
+                        <a:rPr lang="es-ES" sz="1500" b="0" i="0" cap="none" spc="0" dirty="0">
+                          <a:solidFill>
+                            <a:schemeClr val="tx1"/>
+                          </a:solidFill>
+                          <a:effectLst/>
+                          <a:latin typeface="Segoe UI" panose="020B0502040204020203" pitchFamily="34" charset="0"/>
+                        </a:rPr>
+                        <a:t>✅</a:t>
+                      </a:r>
+                      <a:r>
+                        <a:rPr lang="es-ES" sz="1500" b="1" i="0" cap="none" spc="0" dirty="0">
+                          <a:solidFill>
+                            <a:schemeClr val="tx1"/>
+                          </a:solidFill>
+                          <a:effectLst/>
+                          <a:latin typeface="Segoe UI" panose="020B0502040204020203" pitchFamily="34" charset="0"/>
+                        </a:rPr>
+                        <a:t>:</a:t>
+                      </a:r>
+                    </a:p>
+                    <a:p>
+                      <a:pPr fontAlgn="t">
+                        <a:lnSpc>
+                          <a:spcPts val="1500"/>
+                        </a:lnSpc>
+                        <a:buNone/>
+                      </a:pPr>
+                      <a:endParaRPr lang="es-ES" sz="1500" b="1" i="0" cap="none" spc="0" dirty="0">
+                        <a:solidFill>
+                          <a:schemeClr val="tx1"/>
+                        </a:solidFill>
+                        <a:effectLst/>
+                        <a:latin typeface="Segoe UI" panose="020B0502040204020203" pitchFamily="34" charset="0"/>
+                      </a:endParaRPr>
+                    </a:p>
+                    <a:p>
+                      <a:pPr fontAlgn="t">
+                        <a:lnSpc>
+                          <a:spcPts val="1500"/>
+                        </a:lnSpc>
+                        <a:buFont typeface="Arial" panose="020B0604020202020204" pitchFamily="34" charset="0"/>
+                        <a:buChar char="•"/>
+                      </a:pPr>
+                      <a:r>
+                        <a:rPr lang="es-ES" sz="1500" b="1" i="0" cap="none" spc="0" dirty="0">
+                          <a:solidFill>
+                            <a:schemeClr val="tx1"/>
+                          </a:solidFill>
+                          <a:effectLst/>
+                          <a:latin typeface="Segoe UI" panose="020B0502040204020203" pitchFamily="34" charset="0"/>
+                        </a:rPr>
+                        <a:t> </a:t>
+                      </a:r>
+                      <a:r>
+                        <a:rPr lang="es-ES" sz="1500" b="1" i="0" cap="none" spc="0" dirty="0" err="1">
+                          <a:solidFill>
+                            <a:schemeClr val="tx1"/>
+                          </a:solidFill>
+                          <a:effectLst/>
+                          <a:latin typeface="Segoe UI" panose="020B0502040204020203" pitchFamily="34" charset="0"/>
+                        </a:rPr>
+                        <a:t>Most</a:t>
+                      </a:r>
+                      <a:r>
+                        <a:rPr lang="es-ES" sz="1500" b="1" i="0" cap="none" spc="0" dirty="0">
+                          <a:solidFill>
+                            <a:schemeClr val="tx1"/>
+                          </a:solidFill>
+                          <a:effectLst/>
+                          <a:latin typeface="Segoe UI" panose="020B0502040204020203" pitchFamily="34" charset="0"/>
+                        </a:rPr>
+                        <a:t> </a:t>
+                      </a:r>
+                      <a:r>
+                        <a:rPr lang="es-ES" sz="1500" b="1" i="0" cap="none" spc="0" dirty="0" err="1">
+                          <a:solidFill>
+                            <a:schemeClr val="tx1"/>
+                          </a:solidFill>
+                          <a:effectLst/>
+                          <a:latin typeface="Segoe UI" panose="020B0502040204020203" pitchFamily="34" charset="0"/>
+                        </a:rPr>
+                        <a:t>consistent</a:t>
+                      </a:r>
+                      <a:r>
+                        <a:rPr lang="es-ES" sz="1500" b="1" i="0" cap="none" spc="0" dirty="0">
+                          <a:solidFill>
+                            <a:schemeClr val="tx1"/>
+                          </a:solidFill>
+                          <a:effectLst/>
+                          <a:latin typeface="Segoe UI" panose="020B0502040204020203" pitchFamily="34" charset="0"/>
+                        </a:rPr>
+                        <a:t>:</a:t>
+                      </a:r>
+                      <a:r>
+                        <a:rPr lang="es-ES" sz="1500" b="0" i="0" cap="none" spc="0" dirty="0">
+                          <a:solidFill>
+                            <a:schemeClr val="tx1"/>
+                          </a:solidFill>
+                          <a:effectLst/>
+                          <a:latin typeface="Segoe UI" panose="020B0502040204020203" pitchFamily="34" charset="0"/>
+                        </a:rPr>
+                        <a:t> 870 </a:t>
+                      </a:r>
+                      <a:r>
+                        <a:rPr lang="es-ES" sz="1500" b="0" i="0" cap="none" spc="0" dirty="0" err="1">
+                          <a:solidFill>
+                            <a:schemeClr val="tx1"/>
+                          </a:solidFill>
+                          <a:effectLst/>
+                          <a:latin typeface="Segoe UI" panose="020B0502040204020203" pitchFamily="34" charset="0"/>
+                        </a:rPr>
+                        <a:t>avg</a:t>
+                      </a:r>
+                      <a:r>
+                        <a:rPr lang="es-ES" sz="1500" b="0" i="0" cap="none" spc="0" dirty="0">
+                          <a:solidFill>
+                            <a:schemeClr val="tx1"/>
+                          </a:solidFill>
+                          <a:effectLst/>
+                          <a:latin typeface="Segoe UI" panose="020B0502040204020203" pitchFamily="34" charset="0"/>
+                        </a:rPr>
+                        <a:t> </a:t>
+                      </a:r>
+                      <a:r>
+                        <a:rPr lang="es-ES" sz="1500" b="0" i="0" cap="none" spc="0" dirty="0" err="1">
+                          <a:solidFill>
+                            <a:schemeClr val="tx1"/>
+                          </a:solidFill>
+                          <a:effectLst/>
+                          <a:latin typeface="Segoe UI" panose="020B0502040204020203" pitchFamily="34" charset="0"/>
+                        </a:rPr>
+                        <a:t>reward</a:t>
+                      </a:r>
+                      <a:r>
+                        <a:rPr lang="es-ES" sz="1500" b="0" i="0" cap="none" spc="0" dirty="0">
+                          <a:solidFill>
+                            <a:schemeClr val="tx1"/>
+                          </a:solidFill>
+                          <a:effectLst/>
+                          <a:latin typeface="Segoe UI" panose="020B0502040204020203" pitchFamily="34" charset="0"/>
+                        </a:rPr>
+                        <a:t>.</a:t>
+                      </a:r>
+                      <a:endParaRPr lang="es-ES" sz="1500" b="1" i="0" cap="none" spc="0" dirty="0">
+                        <a:solidFill>
+                          <a:schemeClr val="tx1"/>
+                        </a:solidFill>
+                        <a:effectLst/>
+                        <a:latin typeface="Segoe UI" panose="020B0502040204020203" pitchFamily="34" charset="0"/>
+                      </a:endParaRPr>
+                    </a:p>
+                    <a:p>
+                      <a:pPr fontAlgn="t">
+                        <a:lnSpc>
+                          <a:spcPts val="1500"/>
+                        </a:lnSpc>
+                        <a:buFont typeface="Arial" panose="020B0604020202020204" pitchFamily="34" charset="0"/>
+                        <a:buChar char="•"/>
+                      </a:pPr>
+                      <a:r>
+                        <a:rPr lang="es-ES" sz="1500" b="1" i="0" cap="none" spc="0" dirty="0">
+                          <a:solidFill>
+                            <a:schemeClr val="tx1"/>
+                          </a:solidFill>
+                          <a:effectLst/>
+                          <a:latin typeface="Segoe UI" panose="020B0502040204020203" pitchFamily="34" charset="0"/>
+                        </a:rPr>
+                        <a:t> 42/50 </a:t>
+                      </a:r>
+                      <a:r>
+                        <a:rPr lang="es-ES" sz="1500" b="1" i="0" cap="none" spc="0" dirty="0" err="1">
+                          <a:solidFill>
+                            <a:schemeClr val="tx1"/>
+                          </a:solidFill>
+                          <a:effectLst/>
+                          <a:latin typeface="Segoe UI" panose="020B0502040204020203" pitchFamily="34" charset="0"/>
+                        </a:rPr>
+                        <a:t>eps</a:t>
+                      </a:r>
+                      <a:r>
+                        <a:rPr lang="es-ES" sz="1500" b="1" i="0" cap="none" spc="0" dirty="0">
+                          <a:solidFill>
+                            <a:schemeClr val="tx1"/>
+                          </a:solidFill>
+                          <a:effectLst/>
+                          <a:latin typeface="Segoe UI" panose="020B0502040204020203" pitchFamily="34" charset="0"/>
+                        </a:rPr>
+                        <a:t> </a:t>
+                      </a:r>
+                      <a:r>
+                        <a:rPr lang="es-ES" sz="1500" b="1" i="0" cap="none" spc="0" dirty="0" err="1">
+                          <a:solidFill>
+                            <a:schemeClr val="tx1"/>
+                          </a:solidFill>
+                          <a:effectLst/>
+                          <a:latin typeface="Segoe UI" panose="020B0502040204020203" pitchFamily="34" charset="0"/>
+                        </a:rPr>
+                        <a:t>scored</a:t>
+                      </a:r>
+                      <a:r>
+                        <a:rPr lang="es-ES" sz="1500" b="1" i="0" cap="none" spc="0" dirty="0">
+                          <a:solidFill>
+                            <a:schemeClr val="tx1"/>
+                          </a:solidFill>
+                          <a:effectLst/>
+                          <a:latin typeface="Segoe UI" panose="020B0502040204020203" pitchFamily="34" charset="0"/>
+                        </a:rPr>
+                        <a:t> &gt; 850:</a:t>
+                      </a:r>
+                      <a:r>
+                        <a:rPr lang="es-ES" sz="1500" b="0" i="0" cap="none" spc="0" dirty="0">
+                          <a:solidFill>
+                            <a:schemeClr val="tx1"/>
+                          </a:solidFill>
+                          <a:effectLst/>
+                          <a:latin typeface="Segoe UI" panose="020B0502040204020203" pitchFamily="34" charset="0"/>
+                        </a:rPr>
+                        <a:t> </a:t>
+                      </a:r>
+                      <a:r>
+                        <a:rPr lang="es-ES" sz="1500" b="0" i="0" cap="none" spc="0" dirty="0" err="1">
+                          <a:solidFill>
+                            <a:schemeClr val="tx1"/>
+                          </a:solidFill>
+                          <a:effectLst/>
+                          <a:latin typeface="Segoe UI" panose="020B0502040204020203" pitchFamily="34" charset="0"/>
+                        </a:rPr>
+                        <a:t>Strong</a:t>
+                      </a:r>
+                      <a:r>
+                        <a:rPr lang="es-ES" sz="1500" b="0" i="0" cap="none" spc="0" dirty="0">
+                          <a:solidFill>
+                            <a:schemeClr val="tx1"/>
+                          </a:solidFill>
+                          <a:effectLst/>
+                          <a:latin typeface="Segoe UI" panose="020B0502040204020203" pitchFamily="34" charset="0"/>
+                        </a:rPr>
+                        <a:t> </a:t>
+                      </a:r>
+                      <a:r>
+                        <a:rPr lang="es-ES" sz="1500" b="0" i="0" cap="none" spc="0" dirty="0" err="1">
+                          <a:solidFill>
+                            <a:schemeClr val="tx1"/>
+                          </a:solidFill>
+                          <a:effectLst/>
+                          <a:latin typeface="Segoe UI" panose="020B0502040204020203" pitchFamily="34" charset="0"/>
+                        </a:rPr>
+                        <a:t>policy</a:t>
+                      </a:r>
+                      <a:r>
+                        <a:rPr lang="es-ES" sz="1500" b="0" i="0" cap="none" spc="0" dirty="0">
+                          <a:solidFill>
+                            <a:schemeClr val="tx1"/>
+                          </a:solidFill>
+                          <a:effectLst/>
+                          <a:latin typeface="Segoe UI" panose="020B0502040204020203" pitchFamily="34" charset="0"/>
+                        </a:rPr>
+                        <a:t> </a:t>
+                      </a:r>
+                      <a:r>
+                        <a:rPr lang="es-ES" sz="1500" b="0" i="0" cap="none" spc="0" dirty="0" err="1">
+                          <a:solidFill>
+                            <a:schemeClr val="tx1"/>
+                          </a:solidFill>
+                          <a:effectLst/>
+                          <a:latin typeface="Segoe UI" panose="020B0502040204020203" pitchFamily="34" charset="0"/>
+                        </a:rPr>
+                        <a:t>learning</a:t>
+                      </a:r>
+                      <a:r>
+                        <a:rPr lang="es-ES" sz="1500" b="0" i="0" cap="none" spc="0" dirty="0">
+                          <a:solidFill>
+                            <a:schemeClr val="tx1"/>
+                          </a:solidFill>
+                          <a:effectLst/>
+                          <a:latin typeface="Segoe UI" panose="020B0502040204020203" pitchFamily="34" charset="0"/>
+                        </a:rPr>
+                        <a:t>.</a:t>
+                      </a:r>
+                      <a:endParaRPr lang="es-ES" sz="1500" b="1" i="0" cap="none" spc="0" dirty="0">
+                        <a:solidFill>
+                          <a:schemeClr val="tx1"/>
+                        </a:solidFill>
+                        <a:effectLst/>
+                        <a:latin typeface="Segoe UI" panose="020B0502040204020203" pitchFamily="34" charset="0"/>
+                      </a:endParaRPr>
+                    </a:p>
+                    <a:p>
+                      <a:pPr fontAlgn="t">
+                        <a:lnSpc>
+                          <a:spcPts val="1500"/>
+                        </a:lnSpc>
+                        <a:buFont typeface="Arial" panose="020B0604020202020204" pitchFamily="34" charset="0"/>
+                        <a:buChar char="•"/>
+                      </a:pPr>
+                      <a:r>
+                        <a:rPr lang="es-ES" sz="1500" b="1" i="0" cap="none" spc="0" dirty="0">
+                          <a:solidFill>
+                            <a:schemeClr val="tx1"/>
+                          </a:solidFill>
+                          <a:effectLst/>
+                          <a:latin typeface="Segoe UI" panose="020B0502040204020203" pitchFamily="34" charset="0"/>
+                        </a:rPr>
+                        <a:t> </a:t>
+                      </a:r>
+                      <a:r>
+                        <a:rPr lang="es-ES" sz="1500" b="1" i="0" cap="none" spc="0" dirty="0" err="1">
+                          <a:solidFill>
+                            <a:schemeClr val="tx1"/>
+                          </a:solidFill>
+                          <a:effectLst/>
+                          <a:latin typeface="Segoe UI" panose="020B0502040204020203" pitchFamily="34" charset="0"/>
+                        </a:rPr>
+                        <a:t>Peak</a:t>
+                      </a:r>
+                      <a:r>
+                        <a:rPr lang="es-ES" sz="1500" b="1" i="0" cap="none" spc="0" dirty="0">
+                          <a:solidFill>
+                            <a:schemeClr val="tx1"/>
+                          </a:solidFill>
+                          <a:effectLst/>
+                          <a:latin typeface="Segoe UI" panose="020B0502040204020203" pitchFamily="34" charset="0"/>
+                        </a:rPr>
+                        <a:t> performance: </a:t>
+                      </a:r>
+                      <a:r>
+                        <a:rPr lang="es-ES" sz="1500" b="0" i="0" cap="none" spc="0" dirty="0">
+                          <a:solidFill>
+                            <a:schemeClr val="tx1"/>
+                          </a:solidFill>
+                          <a:effectLst/>
+                          <a:latin typeface="Segoe UI" panose="020B0502040204020203" pitchFamily="34" charset="0"/>
+                        </a:rPr>
+                        <a:t>928.5 </a:t>
+                      </a:r>
+                      <a:r>
+                        <a:rPr lang="es-ES" sz="1500" b="0" i="0" cap="none" spc="0" dirty="0" err="1">
+                          <a:solidFill>
+                            <a:schemeClr val="tx1"/>
+                          </a:solidFill>
+                          <a:effectLst/>
+                          <a:latin typeface="Segoe UI" panose="020B0502040204020203" pitchFamily="34" charset="0"/>
+                        </a:rPr>
+                        <a:t>reward</a:t>
+                      </a:r>
+                      <a:endParaRPr lang="es-ES" sz="1500" b="0" i="0" cap="none" spc="0" dirty="0">
+                        <a:solidFill>
+                          <a:schemeClr val="tx1"/>
+                        </a:solidFill>
+                        <a:effectLst/>
+                        <a:latin typeface="Segoe UI" panose="020B0502040204020203" pitchFamily="34" charset="0"/>
+                      </a:endParaRPr>
+                    </a:p>
+                    <a:p>
+                      <a:pPr fontAlgn="t">
+                        <a:lnSpc>
+                          <a:spcPts val="1500"/>
+                        </a:lnSpc>
+                        <a:buNone/>
+                      </a:pPr>
+                      <a:endParaRPr lang="es-ES" sz="1500" b="0" i="0" cap="none" spc="0" dirty="0">
+                        <a:solidFill>
+                          <a:schemeClr val="tx1"/>
+                        </a:solidFill>
+                        <a:effectLst/>
+                        <a:latin typeface="Segoe UI" panose="020B0502040204020203" pitchFamily="34" charset="0"/>
+                      </a:endParaRPr>
+                    </a:p>
+                    <a:p>
+                      <a:pPr fontAlgn="t">
+                        <a:lnSpc>
+                          <a:spcPts val="1500"/>
+                        </a:lnSpc>
+                        <a:buNone/>
+                      </a:pPr>
+                      <a:endParaRPr lang="es-ES" sz="1500" b="0" i="0" cap="none" spc="0" dirty="0">
+                        <a:solidFill>
+                          <a:schemeClr val="tx1"/>
+                        </a:solidFill>
+                        <a:effectLst/>
+                        <a:latin typeface="Segoe UI" panose="020B0502040204020203" pitchFamily="34" charset="0"/>
+                      </a:endParaRPr>
+                    </a:p>
+                    <a:p>
+                      <a:pPr fontAlgn="t">
+                        <a:lnSpc>
+                          <a:spcPts val="1500"/>
+                        </a:lnSpc>
+                        <a:buNone/>
+                      </a:pPr>
+                      <a:r>
+                        <a:rPr lang="es-ES" sz="1500" b="1" i="0" cap="none" spc="0" dirty="0">
+                          <a:solidFill>
+                            <a:schemeClr val="tx1"/>
+                          </a:solidFill>
+                          <a:effectLst/>
+                          <a:latin typeface="Segoe UI" panose="020B0502040204020203" pitchFamily="34" charset="0"/>
+                        </a:rPr>
+                        <a:t>🧮 4600 </a:t>
+                      </a:r>
+                      <a:r>
+                        <a:rPr lang="es-ES" sz="1500" b="1" i="0" cap="none" spc="0" dirty="0" err="1">
+                          <a:solidFill>
+                            <a:schemeClr val="tx1"/>
+                          </a:solidFill>
+                          <a:effectLst/>
+                          <a:latin typeface="Segoe UI" panose="020B0502040204020203" pitchFamily="34" charset="0"/>
+                        </a:rPr>
+                        <a:t>eps</a:t>
+                      </a:r>
+                      <a:r>
+                        <a:rPr lang="es-ES" sz="1500" b="1" i="0" cap="none" spc="0" dirty="0">
+                          <a:solidFill>
+                            <a:schemeClr val="tx1"/>
+                          </a:solidFill>
+                          <a:effectLst/>
+                          <a:latin typeface="Segoe UI" panose="020B0502040204020203" pitchFamily="34" charset="0"/>
+                        </a:rPr>
+                        <a:t>:</a:t>
+                      </a:r>
+                    </a:p>
+                    <a:p>
+                      <a:pPr fontAlgn="t">
+                        <a:lnSpc>
+                          <a:spcPts val="1500"/>
+                        </a:lnSpc>
+                        <a:buNone/>
+                      </a:pPr>
+                      <a:endParaRPr lang="es-ES" sz="1500" b="0" i="0" cap="none" spc="0" dirty="0">
+                        <a:solidFill>
+                          <a:schemeClr val="tx1"/>
+                        </a:solidFill>
+                        <a:effectLst/>
+                        <a:latin typeface="Segoe UI" panose="020B0502040204020203" pitchFamily="34" charset="0"/>
+                      </a:endParaRPr>
+                    </a:p>
+                    <a:p>
+                      <a:pPr fontAlgn="t">
+                        <a:lnSpc>
+                          <a:spcPts val="1500"/>
+                        </a:lnSpc>
+                        <a:buFont typeface="Arial" panose="020B0604020202020204" pitchFamily="34" charset="0"/>
+                        <a:buChar char="•"/>
+                      </a:pPr>
+                      <a:r>
+                        <a:rPr lang="es-ES" sz="1500" b="1" i="0" cap="none" spc="0" dirty="0">
+                          <a:solidFill>
+                            <a:schemeClr val="tx1"/>
+                          </a:solidFill>
+                          <a:effectLst/>
+                          <a:latin typeface="Segoe UI" panose="020B0502040204020203" pitchFamily="34" charset="0"/>
+                        </a:rPr>
+                        <a:t> 2nd </a:t>
+                      </a:r>
+                      <a:r>
+                        <a:rPr lang="es-ES" sz="1500" b="1" i="0" cap="none" spc="0" dirty="0" err="1">
+                          <a:solidFill>
+                            <a:schemeClr val="tx1"/>
+                          </a:solidFill>
+                          <a:effectLst/>
+                          <a:latin typeface="Segoe UI" panose="020B0502040204020203" pitchFamily="34" charset="0"/>
+                        </a:rPr>
+                        <a:t>most</a:t>
+                      </a:r>
+                      <a:r>
+                        <a:rPr lang="es-ES" sz="1500" b="1" i="0" cap="none" spc="0" dirty="0">
+                          <a:solidFill>
+                            <a:schemeClr val="tx1"/>
+                          </a:solidFill>
+                          <a:effectLst/>
+                          <a:latin typeface="Segoe UI" panose="020B0502040204020203" pitchFamily="34" charset="0"/>
+                        </a:rPr>
+                        <a:t> </a:t>
+                      </a:r>
+                      <a:r>
+                        <a:rPr lang="es-ES" sz="1500" b="1" i="0" cap="none" spc="0" dirty="0" err="1">
+                          <a:solidFill>
+                            <a:schemeClr val="tx1"/>
+                          </a:solidFill>
+                          <a:effectLst/>
+                          <a:latin typeface="Segoe UI" panose="020B0502040204020203" pitchFamily="34" charset="0"/>
+                        </a:rPr>
+                        <a:t>consistent</a:t>
+                      </a:r>
+                      <a:r>
+                        <a:rPr lang="es-ES" sz="1500" b="1" i="0" cap="none" spc="0" dirty="0">
+                          <a:solidFill>
+                            <a:schemeClr val="tx1"/>
+                          </a:solidFill>
+                          <a:effectLst/>
+                          <a:latin typeface="Segoe UI" panose="020B0502040204020203" pitchFamily="34" charset="0"/>
+                        </a:rPr>
+                        <a:t>:</a:t>
+                      </a:r>
+                      <a:r>
+                        <a:rPr lang="es-ES" sz="1500" b="0" i="0" cap="none" spc="0" dirty="0">
+                          <a:solidFill>
+                            <a:schemeClr val="tx1"/>
+                          </a:solidFill>
+                          <a:effectLst/>
+                          <a:latin typeface="Segoe UI" panose="020B0502040204020203" pitchFamily="34" charset="0"/>
+                        </a:rPr>
+                        <a:t> 842.03 </a:t>
+                      </a:r>
+                      <a:r>
+                        <a:rPr lang="es-ES" sz="1500" b="0" i="0" cap="none" spc="0" dirty="0" err="1">
+                          <a:solidFill>
+                            <a:schemeClr val="tx1"/>
+                          </a:solidFill>
+                          <a:effectLst/>
+                          <a:latin typeface="Segoe UI" panose="020B0502040204020203" pitchFamily="34" charset="0"/>
+                        </a:rPr>
+                        <a:t>avg</a:t>
+                      </a:r>
+                      <a:r>
+                        <a:rPr lang="es-ES" sz="1500" b="0" i="0" cap="none" spc="0" dirty="0">
+                          <a:solidFill>
+                            <a:schemeClr val="tx1"/>
+                          </a:solidFill>
+                          <a:effectLst/>
+                          <a:latin typeface="Segoe UI" panose="020B0502040204020203" pitchFamily="34" charset="0"/>
+                        </a:rPr>
+                        <a:t> </a:t>
+                      </a:r>
+                      <a:r>
+                        <a:rPr lang="es-ES" sz="1500" b="0" i="0" cap="none" spc="0" dirty="0" err="1">
+                          <a:solidFill>
+                            <a:schemeClr val="tx1"/>
+                          </a:solidFill>
+                          <a:effectLst/>
+                          <a:latin typeface="Segoe UI" panose="020B0502040204020203" pitchFamily="34" charset="0"/>
+                        </a:rPr>
+                        <a:t>reward</a:t>
+                      </a:r>
+                      <a:r>
+                        <a:rPr lang="es-ES" sz="1500" b="0" i="0" cap="none" spc="0" dirty="0">
+                          <a:solidFill>
+                            <a:schemeClr val="tx1"/>
+                          </a:solidFill>
+                          <a:effectLst/>
+                          <a:latin typeface="Segoe UI" panose="020B0502040204020203" pitchFamily="34" charset="0"/>
+                        </a:rPr>
+                        <a:t>.</a:t>
+                      </a:r>
+                      <a:endParaRPr lang="es-ES" sz="1500" b="1" i="0" cap="none" spc="0" dirty="0">
+                        <a:solidFill>
+                          <a:schemeClr val="tx1"/>
+                        </a:solidFill>
+                        <a:effectLst/>
+                        <a:latin typeface="Segoe UI" panose="020B0502040204020203" pitchFamily="34" charset="0"/>
+                      </a:endParaRPr>
+                    </a:p>
+                    <a:p>
+                      <a:pPr fontAlgn="t">
+                        <a:lnSpc>
+                          <a:spcPts val="1500"/>
+                        </a:lnSpc>
+                        <a:buFont typeface="Arial" panose="020B0604020202020204" pitchFamily="34" charset="0"/>
+                        <a:buChar char="•"/>
+                      </a:pPr>
+                      <a:r>
+                        <a:rPr lang="es-ES" sz="1500" b="1" i="0" cap="none" spc="0" dirty="0">
+                          <a:solidFill>
+                            <a:schemeClr val="tx1"/>
+                          </a:solidFill>
+                          <a:effectLst/>
+                          <a:latin typeface="Segoe UI" panose="020B0502040204020203" pitchFamily="34" charset="0"/>
+                        </a:rPr>
+                        <a:t> 35/50 </a:t>
+                      </a:r>
+                      <a:r>
+                        <a:rPr lang="es-ES" sz="1500" b="1" i="0" cap="none" spc="0" dirty="0" err="1">
+                          <a:solidFill>
+                            <a:schemeClr val="tx1"/>
+                          </a:solidFill>
+                          <a:effectLst/>
+                          <a:latin typeface="Segoe UI" panose="020B0502040204020203" pitchFamily="34" charset="0"/>
+                        </a:rPr>
+                        <a:t>eps</a:t>
+                      </a:r>
+                      <a:r>
+                        <a:rPr lang="es-ES" sz="1500" b="1" i="0" cap="none" spc="0" dirty="0">
+                          <a:solidFill>
+                            <a:schemeClr val="tx1"/>
+                          </a:solidFill>
+                          <a:effectLst/>
+                          <a:latin typeface="Segoe UI" panose="020B0502040204020203" pitchFamily="34" charset="0"/>
+                        </a:rPr>
+                        <a:t> </a:t>
+                      </a:r>
+                      <a:r>
+                        <a:rPr lang="es-ES" sz="1500" b="1" i="0" cap="none" spc="0" dirty="0" err="1">
+                          <a:solidFill>
+                            <a:schemeClr val="tx1"/>
+                          </a:solidFill>
+                          <a:effectLst/>
+                          <a:latin typeface="Segoe UI" panose="020B0502040204020203" pitchFamily="34" charset="0"/>
+                        </a:rPr>
+                        <a:t>scored</a:t>
+                      </a:r>
+                      <a:r>
+                        <a:rPr lang="es-ES" sz="1500" b="1" i="0" cap="none" spc="0" dirty="0">
+                          <a:solidFill>
+                            <a:schemeClr val="tx1"/>
+                          </a:solidFill>
+                          <a:effectLst/>
+                          <a:latin typeface="Segoe UI" panose="020B0502040204020203" pitchFamily="34" charset="0"/>
+                        </a:rPr>
+                        <a:t> &gt; 850</a:t>
+                      </a:r>
+                    </a:p>
+                    <a:p>
+                      <a:pPr fontAlgn="t">
+                        <a:lnSpc>
+                          <a:spcPts val="1500"/>
+                        </a:lnSpc>
+                        <a:buFont typeface="Arial" panose="020B0604020202020204" pitchFamily="34" charset="0"/>
+                        <a:buChar char="•"/>
+                      </a:pPr>
+                      <a:r>
+                        <a:rPr lang="es-ES" sz="1500" b="1" i="0" cap="none" spc="0" dirty="0">
+                          <a:solidFill>
+                            <a:schemeClr val="tx1"/>
+                          </a:solidFill>
+                          <a:effectLst/>
+                          <a:latin typeface="Segoe UI" panose="020B0502040204020203" pitchFamily="34" charset="0"/>
+                        </a:rPr>
+                        <a:t> </a:t>
+                      </a:r>
+                      <a:r>
+                        <a:rPr lang="es-ES" sz="1500" b="1" i="0" cap="none" spc="0" dirty="0" err="1">
+                          <a:solidFill>
+                            <a:schemeClr val="tx1"/>
+                          </a:solidFill>
+                          <a:effectLst/>
+                          <a:latin typeface="Segoe UI" panose="020B0502040204020203" pitchFamily="34" charset="0"/>
+                        </a:rPr>
+                        <a:t>Peak</a:t>
+                      </a:r>
+                      <a:r>
+                        <a:rPr lang="es-ES" sz="1500" b="1" i="0" cap="none" spc="0" dirty="0">
+                          <a:solidFill>
+                            <a:schemeClr val="tx1"/>
+                          </a:solidFill>
+                          <a:effectLst/>
+                          <a:latin typeface="Segoe UI" panose="020B0502040204020203" pitchFamily="34" charset="0"/>
+                        </a:rPr>
+                        <a:t> performance: </a:t>
+                      </a:r>
+                      <a:r>
+                        <a:rPr lang="es-ES" sz="1500" b="0" i="0" cap="none" spc="0" dirty="0">
+                          <a:solidFill>
+                            <a:schemeClr val="tx1"/>
+                          </a:solidFill>
+                          <a:effectLst/>
+                          <a:latin typeface="Segoe UI" panose="020B0502040204020203" pitchFamily="34" charset="0"/>
+                        </a:rPr>
+                        <a:t>929.5 </a:t>
+                      </a:r>
+                      <a:r>
+                        <a:rPr lang="es-ES" sz="1500" b="0" i="0" cap="none" spc="0" dirty="0" err="1">
+                          <a:solidFill>
+                            <a:schemeClr val="tx1"/>
+                          </a:solidFill>
+                          <a:effectLst/>
+                          <a:latin typeface="Segoe UI" panose="020B0502040204020203" pitchFamily="34" charset="0"/>
+                        </a:rPr>
+                        <a:t>reward</a:t>
+                      </a:r>
+                      <a:endParaRPr lang="es-ES" sz="1500" b="0" i="0" cap="none" spc="0" dirty="0">
+                        <a:solidFill>
+                          <a:schemeClr val="tx1"/>
+                        </a:solidFill>
+                        <a:effectLst/>
+                        <a:latin typeface="Segoe UI" panose="020B0502040204020203" pitchFamily="34" charset="0"/>
+                      </a:endParaRPr>
+                    </a:p>
+                    <a:p>
+                      <a:pPr fontAlgn="t">
+                        <a:lnSpc>
+                          <a:spcPts val="1500"/>
+                        </a:lnSpc>
+                        <a:buFont typeface="Arial" panose="020B0604020202020204" pitchFamily="34" charset="0"/>
+                        <a:buChar char="•"/>
+                      </a:pPr>
+                      <a:endParaRPr lang="es-ES" sz="1500" b="0" i="0" cap="none" spc="0" dirty="0">
+                        <a:solidFill>
+                          <a:schemeClr val="tx1"/>
+                        </a:solidFill>
+                        <a:effectLst/>
+                        <a:latin typeface="Segoe UI" panose="020B0502040204020203" pitchFamily="34" charset="0"/>
+                      </a:endParaRPr>
+                    </a:p>
+                    <a:p>
+                      <a:pPr fontAlgn="t">
+                        <a:lnSpc>
+                          <a:spcPts val="1500"/>
+                        </a:lnSpc>
+                        <a:buFont typeface="Arial" panose="020B0604020202020204" pitchFamily="34" charset="0"/>
+                        <a:buChar char="•"/>
+                      </a:pPr>
+                      <a:endParaRPr lang="es-ES" sz="1500" b="0" i="0" cap="none" spc="0" dirty="0">
+                        <a:solidFill>
+                          <a:schemeClr val="tx1"/>
+                        </a:solidFill>
+                        <a:effectLst/>
+                        <a:latin typeface="Segoe UI" panose="020B0502040204020203" pitchFamily="34" charset="0"/>
+                      </a:endParaRPr>
+                    </a:p>
+                    <a:p>
+                      <a:pPr marL="0" marR="0" lvl="0" indent="0" algn="l" defTabSz="914400" rtl="0" eaLnBrk="1" fontAlgn="t" latinLnBrk="0" hangingPunct="1">
+                        <a:lnSpc>
+                          <a:spcPts val="1500"/>
+                        </a:lnSpc>
+                        <a:spcBef>
+                          <a:spcPts val="0"/>
+                        </a:spcBef>
+                        <a:spcAft>
+                          <a:spcPts val="0"/>
+                        </a:spcAft>
+                        <a:buClrTx/>
+                        <a:buSzTx/>
+                        <a:buFont typeface="Arial" panose="020B0604020202020204" pitchFamily="34" charset="0"/>
+                        <a:buNone/>
+                        <a:tabLst/>
+                        <a:defRPr/>
+                      </a:pPr>
+                      <a:r>
+                        <a:rPr lang="es-ES" sz="1500" b="1" i="0" cap="none" spc="0" dirty="0">
+                          <a:solidFill>
+                            <a:schemeClr val="tx1"/>
+                          </a:solidFill>
+                          <a:effectLst/>
+                          <a:latin typeface="Segoe UI" panose="020B0502040204020203" pitchFamily="34" charset="0"/>
+                        </a:rPr>
+                        <a:t>🧮 15695 </a:t>
+                      </a:r>
+                      <a:r>
+                        <a:rPr lang="es-ES" sz="1500" b="1" i="0" cap="none" spc="0" dirty="0" err="1">
+                          <a:solidFill>
+                            <a:schemeClr val="tx1"/>
+                          </a:solidFill>
+                          <a:effectLst/>
+                          <a:latin typeface="Segoe UI" panose="020B0502040204020203" pitchFamily="34" charset="0"/>
+                        </a:rPr>
+                        <a:t>eps</a:t>
+                      </a:r>
+                      <a:r>
+                        <a:rPr lang="es-ES" sz="1500" b="1" i="0" cap="none" spc="0" dirty="0">
+                          <a:solidFill>
+                            <a:schemeClr val="tx1"/>
+                          </a:solidFill>
+                          <a:effectLst/>
+                          <a:latin typeface="Segoe UI" panose="020B0502040204020203" pitchFamily="34" charset="0"/>
+                        </a:rPr>
+                        <a:t> (</a:t>
+                      </a:r>
+                      <a:r>
+                        <a:rPr lang="en-US" sz="1500" b="1" i="0" cap="none" spc="0" dirty="0">
+                          <a:solidFill>
+                            <a:schemeClr val="tx1"/>
+                          </a:solidFill>
+                          <a:effectLst/>
+                          <a:latin typeface="Segoe UI" panose="020B0502040204020203" pitchFamily="34" charset="0"/>
+                        </a:rPr>
+                        <a:t>BATCH_SIZE=1024, TAU=0.01, EPSILON_DECAY=0.9995)</a:t>
+                      </a:r>
+                      <a:endParaRPr lang="es-ES" sz="1500" b="1" i="0" cap="none" spc="0" dirty="0">
+                        <a:solidFill>
+                          <a:schemeClr val="tx1"/>
+                        </a:solidFill>
+                        <a:effectLst/>
+                        <a:latin typeface="Segoe UI" panose="020B0502040204020203" pitchFamily="34" charset="0"/>
+                      </a:endParaRPr>
+                    </a:p>
+                    <a:p>
+                      <a:pPr marL="0" marR="0" lvl="0" indent="0" algn="l" defTabSz="914400" rtl="0" eaLnBrk="1" fontAlgn="t" latinLnBrk="0" hangingPunct="1">
+                        <a:lnSpc>
+                          <a:spcPts val="1500"/>
+                        </a:lnSpc>
+                        <a:spcBef>
+                          <a:spcPts val="0"/>
+                        </a:spcBef>
+                        <a:spcAft>
+                          <a:spcPts val="0"/>
+                        </a:spcAft>
+                        <a:buClrTx/>
+                        <a:buSzTx/>
+                        <a:buFont typeface="Arial" panose="020B0604020202020204" pitchFamily="34" charset="0"/>
+                        <a:buNone/>
+                        <a:tabLst/>
+                        <a:defRPr/>
+                      </a:pPr>
+                      <a:endParaRPr lang="es-ES" sz="1500" b="0" i="0" cap="none" spc="0" dirty="0">
+                        <a:solidFill>
+                          <a:schemeClr val="tx1"/>
+                        </a:solidFill>
+                        <a:effectLst/>
+                        <a:latin typeface="Segoe UI" panose="020B0502040204020203" pitchFamily="34" charset="0"/>
+                      </a:endParaRPr>
+                    </a:p>
+                    <a:p>
+                      <a:pPr fontAlgn="t">
+                        <a:lnSpc>
+                          <a:spcPts val="1500"/>
+                        </a:lnSpc>
+                        <a:buFont typeface="Arial" panose="020B0604020202020204" pitchFamily="34" charset="0"/>
+                        <a:buChar char="•"/>
+                      </a:pPr>
+                      <a:r>
+                        <a:rPr lang="es-ES" sz="1500" b="0" i="0" cap="none" spc="0" dirty="0">
+                          <a:solidFill>
+                            <a:schemeClr val="tx1"/>
+                          </a:solidFill>
+                          <a:effectLst/>
+                          <a:latin typeface="Segoe UI" panose="020B0502040204020203" pitchFamily="34" charset="0"/>
+                        </a:rPr>
+                        <a:t> 829.80 </a:t>
+                      </a:r>
+                      <a:r>
+                        <a:rPr lang="es-ES" sz="1500" b="0" i="0" cap="none" spc="0" dirty="0" err="1">
+                          <a:solidFill>
+                            <a:schemeClr val="tx1"/>
+                          </a:solidFill>
+                          <a:effectLst/>
+                          <a:latin typeface="Segoe UI" panose="020B0502040204020203" pitchFamily="34" charset="0"/>
+                        </a:rPr>
+                        <a:t>avg</a:t>
+                      </a:r>
+                      <a:r>
+                        <a:rPr lang="es-ES" sz="1500" b="0" i="0" cap="none" spc="0" dirty="0">
+                          <a:solidFill>
+                            <a:schemeClr val="tx1"/>
+                          </a:solidFill>
+                          <a:effectLst/>
+                          <a:latin typeface="Segoe UI" panose="020B0502040204020203" pitchFamily="34" charset="0"/>
+                        </a:rPr>
+                        <a:t> </a:t>
+                      </a:r>
+                      <a:r>
+                        <a:rPr lang="es-ES" sz="1500" b="0" i="0" cap="none" spc="0" dirty="0" err="1">
+                          <a:solidFill>
+                            <a:schemeClr val="tx1"/>
+                          </a:solidFill>
+                          <a:effectLst/>
+                          <a:latin typeface="Segoe UI" panose="020B0502040204020203" pitchFamily="34" charset="0"/>
+                        </a:rPr>
+                        <a:t>reward</a:t>
+                      </a:r>
+                      <a:r>
+                        <a:rPr lang="es-ES" sz="1500" b="0" i="0" cap="none" spc="0" dirty="0">
+                          <a:solidFill>
+                            <a:schemeClr val="tx1"/>
+                          </a:solidFill>
+                          <a:effectLst/>
+                          <a:latin typeface="Segoe UI" panose="020B0502040204020203" pitchFamily="34" charset="0"/>
+                        </a:rPr>
+                        <a:t>.</a:t>
+                      </a:r>
+                      <a:endParaRPr lang="es-ES" sz="1500" b="1" i="0" cap="none" spc="0" dirty="0">
+                        <a:solidFill>
+                          <a:schemeClr val="tx1"/>
+                        </a:solidFill>
+                        <a:effectLst/>
+                        <a:latin typeface="Segoe UI" panose="020B0502040204020203" pitchFamily="34" charset="0"/>
+                      </a:endParaRPr>
+                    </a:p>
+                    <a:p>
+                      <a:pPr fontAlgn="t">
+                        <a:lnSpc>
+                          <a:spcPts val="1500"/>
+                        </a:lnSpc>
+                        <a:buFont typeface="Arial" panose="020B0604020202020204" pitchFamily="34" charset="0"/>
+                        <a:buChar char="•"/>
+                      </a:pPr>
+                      <a:r>
+                        <a:rPr lang="es-ES" sz="1500" b="1" i="0" cap="none" spc="0" dirty="0">
+                          <a:solidFill>
+                            <a:schemeClr val="tx1"/>
+                          </a:solidFill>
+                          <a:effectLst/>
+                          <a:latin typeface="Segoe UI" panose="020B0502040204020203" pitchFamily="34" charset="0"/>
+                        </a:rPr>
+                        <a:t> 35/50 </a:t>
+                      </a:r>
+                      <a:r>
+                        <a:rPr lang="es-ES" sz="1500" b="1" i="0" cap="none" spc="0" dirty="0" err="1">
+                          <a:solidFill>
+                            <a:schemeClr val="tx1"/>
+                          </a:solidFill>
+                          <a:effectLst/>
+                          <a:latin typeface="Segoe UI" panose="020B0502040204020203" pitchFamily="34" charset="0"/>
+                        </a:rPr>
+                        <a:t>eps</a:t>
+                      </a:r>
+                      <a:r>
+                        <a:rPr lang="es-ES" sz="1500" b="1" i="0" cap="none" spc="0" dirty="0">
+                          <a:solidFill>
+                            <a:schemeClr val="tx1"/>
+                          </a:solidFill>
+                          <a:effectLst/>
+                          <a:latin typeface="Segoe UI" panose="020B0502040204020203" pitchFamily="34" charset="0"/>
+                        </a:rPr>
+                        <a:t> </a:t>
+                      </a:r>
+                      <a:r>
+                        <a:rPr lang="es-ES" sz="1500" b="1" i="0" cap="none" spc="0" dirty="0" err="1">
+                          <a:solidFill>
+                            <a:schemeClr val="tx1"/>
+                          </a:solidFill>
+                          <a:effectLst/>
+                          <a:latin typeface="Segoe UI" panose="020B0502040204020203" pitchFamily="34" charset="0"/>
+                        </a:rPr>
+                        <a:t>scored</a:t>
+                      </a:r>
+                      <a:r>
+                        <a:rPr lang="es-ES" sz="1500" b="1" i="0" cap="none" spc="0" dirty="0">
+                          <a:solidFill>
+                            <a:schemeClr val="tx1"/>
+                          </a:solidFill>
+                          <a:effectLst/>
+                          <a:latin typeface="Segoe UI" panose="020B0502040204020203" pitchFamily="34" charset="0"/>
+                        </a:rPr>
+                        <a:t> &gt; 850:</a:t>
+                      </a:r>
+                      <a:r>
+                        <a:rPr lang="es-ES" sz="1500" b="0" i="0" cap="none" spc="0" dirty="0">
+                          <a:solidFill>
+                            <a:schemeClr val="tx1"/>
+                          </a:solidFill>
+                          <a:effectLst/>
+                          <a:latin typeface="Segoe UI" panose="020B0502040204020203" pitchFamily="34" charset="0"/>
+                        </a:rPr>
+                        <a:t> </a:t>
+                      </a:r>
+                      <a:r>
+                        <a:rPr lang="es-ES" sz="1500" b="0" i="0" cap="none" spc="0" dirty="0" err="1">
+                          <a:solidFill>
+                            <a:schemeClr val="tx1"/>
+                          </a:solidFill>
+                          <a:effectLst/>
+                          <a:latin typeface="Segoe UI" panose="020B0502040204020203" pitchFamily="34" charset="0"/>
+                        </a:rPr>
+                        <a:t>Strong</a:t>
+                      </a:r>
+                      <a:r>
+                        <a:rPr lang="es-ES" sz="1500" b="0" i="0" cap="none" spc="0" dirty="0">
+                          <a:solidFill>
+                            <a:schemeClr val="tx1"/>
+                          </a:solidFill>
+                          <a:effectLst/>
+                          <a:latin typeface="Segoe UI" panose="020B0502040204020203" pitchFamily="34" charset="0"/>
+                        </a:rPr>
+                        <a:t> </a:t>
+                      </a:r>
+                      <a:r>
+                        <a:rPr lang="es-ES" sz="1500" b="0" i="0" cap="none" spc="0" dirty="0" err="1">
+                          <a:solidFill>
+                            <a:schemeClr val="tx1"/>
+                          </a:solidFill>
+                          <a:effectLst/>
+                          <a:latin typeface="Segoe UI" panose="020B0502040204020203" pitchFamily="34" charset="0"/>
+                        </a:rPr>
+                        <a:t>policy</a:t>
+                      </a:r>
+                      <a:r>
+                        <a:rPr lang="es-ES" sz="1500" b="0" i="0" cap="none" spc="0" dirty="0">
+                          <a:solidFill>
+                            <a:schemeClr val="tx1"/>
+                          </a:solidFill>
+                          <a:effectLst/>
+                          <a:latin typeface="Segoe UI" panose="020B0502040204020203" pitchFamily="34" charset="0"/>
+                        </a:rPr>
+                        <a:t> </a:t>
+                      </a:r>
+                      <a:r>
+                        <a:rPr lang="es-ES" sz="1500" b="0" i="0" cap="none" spc="0" dirty="0" err="1">
+                          <a:solidFill>
+                            <a:schemeClr val="tx1"/>
+                          </a:solidFill>
+                          <a:effectLst/>
+                          <a:latin typeface="Segoe UI" panose="020B0502040204020203" pitchFamily="34" charset="0"/>
+                        </a:rPr>
+                        <a:t>learning</a:t>
+                      </a:r>
+                      <a:r>
+                        <a:rPr lang="es-ES" sz="1500" b="0" i="0" cap="none" spc="0" dirty="0">
+                          <a:solidFill>
+                            <a:schemeClr val="tx1"/>
+                          </a:solidFill>
+                          <a:effectLst/>
+                          <a:latin typeface="Segoe UI" panose="020B0502040204020203" pitchFamily="34" charset="0"/>
+                        </a:rPr>
+                        <a:t>.</a:t>
+                      </a:r>
+                      <a:endParaRPr lang="es-ES" sz="1500" b="1" i="0" cap="none" spc="0" dirty="0">
+                        <a:solidFill>
+                          <a:schemeClr val="tx1"/>
+                        </a:solidFill>
+                        <a:effectLst/>
+                        <a:latin typeface="Segoe UI" panose="020B0502040204020203" pitchFamily="34" charset="0"/>
+                      </a:endParaRPr>
+                    </a:p>
+                    <a:p>
+                      <a:pPr fontAlgn="t">
+                        <a:lnSpc>
+                          <a:spcPts val="1500"/>
+                        </a:lnSpc>
+                        <a:buFont typeface="Arial" panose="020B0604020202020204" pitchFamily="34" charset="0"/>
+                        <a:buChar char="•"/>
+                      </a:pPr>
+                      <a:r>
+                        <a:rPr lang="es-ES" sz="1500" b="1" i="0" cap="none" spc="0" dirty="0">
+                          <a:solidFill>
+                            <a:schemeClr val="tx1"/>
+                          </a:solidFill>
+                          <a:effectLst/>
+                          <a:latin typeface="Segoe UI" panose="020B0502040204020203" pitchFamily="34" charset="0"/>
+                        </a:rPr>
+                        <a:t> </a:t>
+                      </a:r>
+                      <a:r>
+                        <a:rPr lang="es-ES" sz="1500" b="1" i="0" cap="none" spc="0" dirty="0" err="1">
+                          <a:solidFill>
+                            <a:schemeClr val="tx1"/>
+                          </a:solidFill>
+                          <a:effectLst/>
+                          <a:latin typeface="Segoe UI" panose="020B0502040204020203" pitchFamily="34" charset="0"/>
+                        </a:rPr>
+                        <a:t>Peak</a:t>
+                      </a:r>
+                      <a:r>
+                        <a:rPr lang="es-ES" sz="1500" b="1" i="0" cap="none" spc="0" dirty="0">
+                          <a:solidFill>
+                            <a:schemeClr val="tx1"/>
+                          </a:solidFill>
+                          <a:effectLst/>
+                          <a:latin typeface="Segoe UI" panose="020B0502040204020203" pitchFamily="34" charset="0"/>
+                        </a:rPr>
+                        <a:t> performance: </a:t>
+                      </a:r>
+                      <a:r>
+                        <a:rPr lang="es-ES" sz="1500" b="0" i="0" cap="none" spc="0" dirty="0">
+                          <a:solidFill>
+                            <a:schemeClr val="tx1"/>
+                          </a:solidFill>
+                          <a:effectLst/>
+                          <a:latin typeface="Segoe UI" panose="020B0502040204020203" pitchFamily="34" charset="0"/>
+                        </a:rPr>
+                        <a:t>931.1 </a:t>
+                      </a:r>
+                      <a:r>
+                        <a:rPr lang="es-ES" sz="1500" b="0" i="0" cap="none" spc="0" dirty="0" err="1">
+                          <a:solidFill>
+                            <a:schemeClr val="tx1"/>
+                          </a:solidFill>
+                          <a:effectLst/>
+                          <a:latin typeface="Segoe UI" panose="020B0502040204020203" pitchFamily="34" charset="0"/>
+                        </a:rPr>
+                        <a:t>reward</a:t>
+                      </a:r>
+                      <a:endParaRPr lang="es-ES" sz="1500" b="0" i="0" cap="none" spc="0" dirty="0">
+                        <a:solidFill>
+                          <a:schemeClr val="tx1"/>
+                        </a:solidFill>
+                        <a:effectLst/>
+                        <a:latin typeface="Segoe UI" panose="020B0502040204020203" pitchFamily="34" charset="0"/>
+                      </a:endParaRPr>
+                    </a:p>
+                  </a:txBody>
+                  <a:tcPr marL="117977" marR="117977" marT="117977" marB="58988">
+                    <a:lnL w="12700" cmpd="sng">
+                      <a:noFill/>
+                      <a:prstDash val="solid"/>
+                    </a:lnL>
+                    <a:lnR w="12700" cmpd="sng">
+                      <a:noFill/>
+                      <a:prstDash val="solid"/>
+                    </a:lnR>
+                    <a:lnT w="12700" cap="flat" cmpd="sng" algn="ctr">
+                      <a:solidFill>
+                        <a:schemeClr val="bg1">
+                          <a:lumMod val="75000"/>
+                        </a:schemeClr>
+                      </a:solidFill>
+                      <a:prstDash val="solid"/>
+                    </a:lnT>
+                    <a:lnB w="12700" cmpd="sng">
+                      <a:noFill/>
+                      <a:prstDash val="solid"/>
+                    </a:lnB>
+                    <a:solidFill>
+                      <a:srgbClr val="F2F2F2">
+                        <a:alpha val="45098"/>
+                      </a:srgbClr>
+                    </a:solidFill>
+                  </a:tcPr>
+                </a:tc>
+                <a:extLst>
+                  <a:ext uri="{0D108BD9-81ED-4DB2-BD59-A6C34878D82A}">
+                    <a16:rowId xmlns:a16="http://schemas.microsoft.com/office/drawing/2014/main" val="3306084499"/>
+                  </a:ext>
+                </a:extLst>
+              </a:tr>
+              <a:tr h="214722">
+                <a:tc>
+                  <a:txBody>
+                    <a:bodyPr/>
+                    <a:lstStyle/>
+                    <a:p>
+                      <a:endParaRPr lang="es-ES" sz="1500" cap="none" spc="0" dirty="0">
+                        <a:solidFill>
+                          <a:schemeClr val="tx1"/>
+                        </a:solidFill>
+                      </a:endParaRPr>
+                    </a:p>
+                  </a:txBody>
+                  <a:tcPr marL="117977" marR="117977" marT="117977" marB="58988">
+                    <a:lnL w="12700" cmpd="sng">
+                      <a:noFill/>
+                      <a:prstDash val="solid"/>
+                    </a:lnL>
+                    <a:lnR w="12700" cmpd="sng">
+                      <a:noFill/>
+                      <a:prstDash val="solid"/>
+                    </a:lnR>
+                    <a:lnT w="12700" cmpd="sng">
+                      <a:noFill/>
+                      <a:prstDash val="solid"/>
+                    </a:lnT>
+                    <a:lnB w="12700" cmpd="sng">
+                      <a:noFill/>
+                      <a:prstDash val="solid"/>
+                    </a:lnB>
+                    <a:solidFill>
+                      <a:srgbClr val="F2F2F2">
+                        <a:alpha val="45098"/>
+                      </a:srgbClr>
+                    </a:solidFill>
+                  </a:tcPr>
+                </a:tc>
+                <a:extLst>
+                  <a:ext uri="{0D108BD9-81ED-4DB2-BD59-A6C34878D82A}">
+                    <a16:rowId xmlns:a16="http://schemas.microsoft.com/office/drawing/2014/main" val="54006571"/>
+                  </a:ext>
+                </a:extLst>
+              </a:tr>
+            </a:tbl>
+          </a:graphicData>
+        </a:graphic>
+      </p:graphicFrame>
+    </p:spTree>
+    <p:extLst>
+      <p:ext uri="{BB962C8B-B14F-4D97-AF65-F5344CB8AC3E}">
+        <p14:creationId xmlns:p14="http://schemas.microsoft.com/office/powerpoint/2010/main" val="2853825434"/>
+      </p:ext>
+    </p:extLst>
+  </p:cSld>
+  <p:clrMapOvr>
+    <a:masterClrMapping/>
+  </p:clrMapOvr>
+</p:sld>
+</file>
+
+<file path=ppt/slides/slide12.xml><?xml version="1.0" encoding="utf-8"?>
+<p:sld xmlns:a="http://schemas.openxmlformats.org/drawingml/2006/main" xmlns:r="http://schemas.openxmlformats.org/officeDocument/2006/relationships" xmlns:p="http://schemas.openxmlformats.org/presentationml/2006/main">
+  <p:cSld>
+    <p:spTree>
+      <p:nvGrpSpPr>
+        <p:cNvPr id="1" name="">
+          <a:extLst>
+            <a:ext uri="{FF2B5EF4-FFF2-40B4-BE49-F238E27FC236}">
               <a16:creationId xmlns:a16="http://schemas.microsoft.com/office/drawing/2014/main" id="{039D7D22-7235-F0F0-DC36-124BB94FA646}"/>
             </a:ext>
           </a:extLst>
@@ -5188,7 +9101,7 @@
 </p:sld>
 </file>
 
-<file path=ppt/slides/slide11.xml><?xml version="1.0" encoding="utf-8"?>
+<file path=ppt/slides/slide13.xml><?xml version="1.0" encoding="utf-8"?>
 <p:sld xmlns:a="http://schemas.openxmlformats.org/drawingml/2006/main" xmlns:r="http://schemas.openxmlformats.org/officeDocument/2006/relationships" xmlns:p="http://schemas.openxmlformats.org/presentationml/2006/main">
   <p:cSld>
     <p:spTree>
@@ -5533,7 +9446,7 @@
 </p:sld>
 </file>
 
-<file path=ppt/slides/slide12.xml><?xml version="1.0" encoding="utf-8"?>
+<file path=ppt/slides/slide14.xml><?xml version="1.0" encoding="utf-8"?>
 <p:sld xmlns:a="http://schemas.openxmlformats.org/drawingml/2006/main" xmlns:r="http://schemas.openxmlformats.org/officeDocument/2006/relationships" xmlns:p="http://schemas.openxmlformats.org/presentationml/2006/main">
   <p:cSld>
     <p:spTree>
@@ -5593,6 +9506,287 @@
 </file>
 
 <file path=ppt/slides/slide2.xml><?xml version="1.0" encoding="utf-8"?>
+<p:sld xmlns:a="http://schemas.openxmlformats.org/drawingml/2006/main" xmlns:r="http://schemas.openxmlformats.org/officeDocument/2006/relationships" xmlns:p="http://schemas.openxmlformats.org/presentationml/2006/main">
+  <p:cSld>
+    <p:spTree>
+      <p:nvGrpSpPr>
+        <p:cNvPr id="1" name=""/>
+        <p:cNvGrpSpPr/>
+        <p:nvPr/>
+      </p:nvGrpSpPr>
+      <p:grpSpPr>
+        <a:xfrm>
+          <a:off x="0" y="0"/>
+          <a:ext cx="0" cy="0"/>
+          <a:chOff x="0" y="0"/>
+          <a:chExt cx="0" cy="0"/>
+        </a:xfrm>
+      </p:grpSpPr>
+      <p:sp>
+        <p:nvSpPr>
+          <p:cNvPr id="2" name="Título 1">
+            <a:extLst>
+              <a:ext uri="{FF2B5EF4-FFF2-40B4-BE49-F238E27FC236}">
+                <a16:creationId xmlns:a16="http://schemas.microsoft.com/office/drawing/2014/main" id="{C08A4D62-90D5-E3D6-9B77-6EC235640BC0}"/>
+              </a:ext>
+            </a:extLst>
+          </p:cNvPr>
+          <p:cNvSpPr>
+            <a:spLocks noGrp="1"/>
+          </p:cNvSpPr>
+          <p:nvPr>
+            <p:ph type="ctrTitle"/>
+          </p:nvPr>
+        </p:nvSpPr>
+        <p:spPr>
+          <a:xfrm>
+            <a:off x="1524000" y="0"/>
+            <a:ext cx="9144000" cy="976488"/>
+          </a:xfrm>
+        </p:spPr>
+        <p:txBody>
+          <a:bodyPr/>
+          <a:lstStyle/>
+          <a:p>
+            <a:r>
+              <a:rPr lang="es-ES"/>
+              <a:t>DQN</a:t>
+            </a:r>
+            <a:endParaRPr lang="es-ES" dirty="0"/>
+          </a:p>
+        </p:txBody>
+      </p:sp>
+      <p:sp>
+        <p:nvSpPr>
+          <p:cNvPr id="3" name="Subtítulo 2">
+            <a:extLst>
+              <a:ext uri="{FF2B5EF4-FFF2-40B4-BE49-F238E27FC236}">
+                <a16:creationId xmlns:a16="http://schemas.microsoft.com/office/drawing/2014/main" id="{56BCBD16-4DF0-E9F3-0D08-79E8F335DD14}"/>
+              </a:ext>
+            </a:extLst>
+          </p:cNvPr>
+          <p:cNvSpPr>
+            <a:spLocks noGrp="1"/>
+          </p:cNvSpPr>
+          <p:nvPr>
+            <p:ph type="subTitle" idx="1"/>
+          </p:nvPr>
+        </p:nvSpPr>
+        <p:spPr>
+          <a:xfrm>
+            <a:off x="0" y="976488"/>
+            <a:ext cx="12192000" cy="5881512"/>
+          </a:xfrm>
+        </p:spPr>
+        <p:txBody>
+          <a:bodyPr/>
+          <a:lstStyle/>
+          <a:p>
+            <a:r>
+              <a:rPr lang="en-US" b="1" dirty="0"/>
+              <a:t>Policy Network</a:t>
+            </a:r>
+            <a:r>
+              <a:rPr lang="en-US" dirty="0"/>
+              <a:t>: Estimates Q-values for all actions given a state (substitutes k-table)</a:t>
+            </a:r>
+          </a:p>
+          <a:p>
+            <a:r>
+              <a:rPr lang="en-US" b="1" dirty="0"/>
+              <a:t>Experience Replay</a:t>
+            </a:r>
+            <a:r>
+              <a:rPr lang="en-US" dirty="0"/>
+              <a:t>: Stores past transitions to break correlation</a:t>
+            </a:r>
+          </a:p>
+          <a:p>
+            <a:r>
+              <a:rPr lang="en-US" dirty="0"/>
+              <a:t>Target Network: Stabilizes learning by using delayed updates</a:t>
+            </a:r>
+          </a:p>
+          <a:p>
+            <a:r>
+              <a:rPr lang="en-US" dirty="0"/>
+              <a:t>Loss Function: Smooth L1 between predicted and target Q-values</a:t>
+            </a:r>
+          </a:p>
+          <a:p>
+            <a:endParaRPr lang="en-US" dirty="0"/>
+          </a:p>
+          <a:p>
+            <a:r>
+              <a:rPr lang="en-US" dirty="0"/>
+              <a:t>Overestimation of Q-values</a:t>
+            </a:r>
+          </a:p>
+          <a:p>
+            <a:r>
+              <a:rPr lang="en-US" dirty="0"/>
+              <a:t>Instability in training</a:t>
+            </a:r>
+            <a:endParaRPr lang="es-ES" dirty="0"/>
+          </a:p>
+        </p:txBody>
+      </p:sp>
+    </p:spTree>
+    <p:extLst>
+      <p:ext uri="{BB962C8B-B14F-4D97-AF65-F5344CB8AC3E}">
+        <p14:creationId xmlns:p14="http://schemas.microsoft.com/office/powerpoint/2010/main" val="366338489"/>
+      </p:ext>
+    </p:extLst>
+  </p:cSld>
+  <p:clrMapOvr>
+    <a:masterClrMapping/>
+  </p:clrMapOvr>
+</p:sld>
+</file>
+
+<file path=ppt/slides/slide3.xml><?xml version="1.0" encoding="utf-8"?>
+<p:sld xmlns:a="http://schemas.openxmlformats.org/drawingml/2006/main" xmlns:r="http://schemas.openxmlformats.org/officeDocument/2006/relationships" xmlns:p="http://schemas.openxmlformats.org/presentationml/2006/main">
+  <p:cSld>
+    <p:spTree>
+      <p:nvGrpSpPr>
+        <p:cNvPr id="1" name="">
+          <a:extLst>
+            <a:ext uri="{FF2B5EF4-FFF2-40B4-BE49-F238E27FC236}">
+              <a16:creationId xmlns:a16="http://schemas.microsoft.com/office/drawing/2014/main" id="{4593B29A-3FB3-DC78-6730-8AB2B65689B6}"/>
+            </a:ext>
+          </a:extLst>
+        </p:cNvPr>
+        <p:cNvGrpSpPr/>
+        <p:nvPr/>
+      </p:nvGrpSpPr>
+      <p:grpSpPr>
+        <a:xfrm>
+          <a:off x="0" y="0"/>
+          <a:ext cx="0" cy="0"/>
+          <a:chOff x="0" y="0"/>
+          <a:chExt cx="0" cy="0"/>
+        </a:xfrm>
+      </p:grpSpPr>
+      <p:sp>
+        <p:nvSpPr>
+          <p:cNvPr id="2" name="Título 1">
+            <a:extLst>
+              <a:ext uri="{FF2B5EF4-FFF2-40B4-BE49-F238E27FC236}">
+                <a16:creationId xmlns:a16="http://schemas.microsoft.com/office/drawing/2014/main" id="{53D0CD31-68E2-64E3-6EDF-9442212A8680}"/>
+              </a:ext>
+            </a:extLst>
+          </p:cNvPr>
+          <p:cNvSpPr>
+            <a:spLocks noGrp="1"/>
+          </p:cNvSpPr>
+          <p:nvPr>
+            <p:ph type="ctrTitle"/>
+          </p:nvPr>
+        </p:nvSpPr>
+        <p:spPr>
+          <a:xfrm>
+            <a:off x="1524000" y="0"/>
+            <a:ext cx="9144000" cy="976488"/>
+          </a:xfrm>
+        </p:spPr>
+        <p:txBody>
+          <a:bodyPr/>
+          <a:lstStyle/>
+          <a:p>
+            <a:r>
+              <a:rPr lang="es-ES" dirty="0"/>
+              <a:t>DDQN (PER)</a:t>
+            </a:r>
+          </a:p>
+        </p:txBody>
+      </p:sp>
+      <p:sp>
+        <p:nvSpPr>
+          <p:cNvPr id="3" name="Subtítulo 2">
+            <a:extLst>
+              <a:ext uri="{FF2B5EF4-FFF2-40B4-BE49-F238E27FC236}">
+                <a16:creationId xmlns:a16="http://schemas.microsoft.com/office/drawing/2014/main" id="{4C1C530A-DAE2-E055-CB65-067C052538D6}"/>
+              </a:ext>
+            </a:extLst>
+          </p:cNvPr>
+          <p:cNvSpPr>
+            <a:spLocks noGrp="1"/>
+          </p:cNvSpPr>
+          <p:nvPr>
+            <p:ph type="subTitle" idx="1"/>
+          </p:nvPr>
+        </p:nvSpPr>
+        <p:spPr>
+          <a:xfrm>
+            <a:off x="0" y="976488"/>
+            <a:ext cx="12192000" cy="5881512"/>
+          </a:xfrm>
+        </p:spPr>
+        <p:txBody>
+          <a:bodyPr/>
+          <a:lstStyle/>
+          <a:p>
+            <a:r>
+              <a:rPr lang="en-US" dirty="0"/>
+              <a:t>Separate action selection and evaluation</a:t>
+            </a:r>
+          </a:p>
+          <a:p>
+            <a:r>
+              <a:rPr lang="en-US" dirty="0"/>
+              <a:t>Policy network chooses best action</a:t>
+            </a:r>
+          </a:p>
+          <a:p>
+            <a:r>
+              <a:rPr lang="en-US" dirty="0"/>
+              <a:t>Target network evaluates that action → reduces overestimation bias</a:t>
+            </a:r>
+          </a:p>
+          <a:p>
+            <a:r>
+              <a:rPr lang="en-US" dirty="0"/>
+              <a:t>Improves stability and performance</a:t>
+            </a:r>
+          </a:p>
+          <a:p>
+            <a:endParaRPr lang="en-US" dirty="0"/>
+          </a:p>
+          <a:p>
+            <a:r>
+              <a:rPr lang="en-US" dirty="0"/>
+              <a:t>PER:</a:t>
+            </a:r>
+          </a:p>
+          <a:p>
+            <a:r>
+              <a:rPr lang="en-US" dirty="0"/>
+              <a:t>Samples important transitions more often</a:t>
+            </a:r>
+          </a:p>
+          <a:p>
+            <a:r>
+              <a:rPr lang="en-US" dirty="0"/>
+              <a:t>Speeds up learning for rare but critical experiences</a:t>
+            </a:r>
+            <a:endParaRPr lang="es-ES" dirty="0"/>
+          </a:p>
+        </p:txBody>
+      </p:sp>
+    </p:spTree>
+    <p:extLst>
+      <p:ext uri="{BB962C8B-B14F-4D97-AF65-F5344CB8AC3E}">
+        <p14:creationId xmlns:p14="http://schemas.microsoft.com/office/powerpoint/2010/main" val="3330372844"/>
+      </p:ext>
+    </p:extLst>
+  </p:cSld>
+  <p:clrMapOvr>
+    <a:masterClrMapping/>
+  </p:clrMapOvr>
+</p:sld>
+</file>
+
+<file path=ppt/slides/slide4.xml><?xml version="1.0" encoding="utf-8"?>
 <p:sld xmlns:a="http://schemas.openxmlformats.org/drawingml/2006/main" xmlns:r="http://schemas.openxmlformats.org/officeDocument/2006/relationships" xmlns:p="http://schemas.openxmlformats.org/presentationml/2006/main">
   <p:cSld>
     <p:bg>
@@ -7440,7 +11634,7 @@
 </p:sld>
 </file>
 
-<file path=ppt/slides/slide3.xml><?xml version="1.0" encoding="utf-8"?>
+<file path=ppt/slides/slide5.xml><?xml version="1.0" encoding="utf-8"?>
 <p:sld xmlns:a="http://schemas.openxmlformats.org/drawingml/2006/main" xmlns:r="http://schemas.openxmlformats.org/officeDocument/2006/relationships" xmlns:p="http://schemas.openxmlformats.org/presentationml/2006/main">
   <p:cSld>
     <p:bg>
@@ -9428,7 +13622,7 @@
 </p:sld>
 </file>
 
-<file path=ppt/slides/slide4.xml><?xml version="1.0" encoding="utf-8"?>
+<file path=ppt/slides/slide6.xml><?xml version="1.0" encoding="utf-8"?>
 <p:sld xmlns:a="http://schemas.openxmlformats.org/drawingml/2006/main" xmlns:r="http://schemas.openxmlformats.org/officeDocument/2006/relationships" xmlns:p="http://schemas.openxmlformats.org/presentationml/2006/main">
   <p:cSld>
     <p:bg>
@@ -12255,7 +16449,7 @@
 </p:sld>
 </file>
 
-<file path=ppt/slides/slide5.xml><?xml version="1.0" encoding="utf-8"?>
+<file path=ppt/slides/slide7.xml><?xml version="1.0" encoding="utf-8"?>
 <p:sld xmlns:a="http://schemas.openxmlformats.org/drawingml/2006/main" xmlns:r="http://schemas.openxmlformats.org/officeDocument/2006/relationships" xmlns:p="http://schemas.openxmlformats.org/presentationml/2006/main">
   <p:cSld>
     <p:spTree>
@@ -15741,7 +19935,7 @@
 </p:sld>
 </file>
 
-<file path=ppt/slides/slide6.xml><?xml version="1.0" encoding="utf-8"?>
+<file path=ppt/slides/slide8.xml><?xml version="1.0" encoding="utf-8"?>
 <p:sld xmlns:a="http://schemas.openxmlformats.org/drawingml/2006/main" xmlns:r="http://schemas.openxmlformats.org/officeDocument/2006/relationships" xmlns:p="http://schemas.openxmlformats.org/presentationml/2006/main">
   <p:cSld>
     <p:spTree>
@@ -15960,7 +20154,7 @@
 </p:sld>
 </file>
 
-<file path=ppt/slides/slide7.xml><?xml version="1.0" encoding="utf-8"?>
+<file path=ppt/slides/slide9.xml><?xml version="1.0" encoding="utf-8"?>
 <p:sld xmlns:a="http://schemas.openxmlformats.org/drawingml/2006/main" xmlns:r="http://schemas.openxmlformats.org/officeDocument/2006/relationships" xmlns:p="http://schemas.openxmlformats.org/presentationml/2006/main">
   <p:cSld>
     <p:bg>
@@ -18074,2857 +22268,6 @@
 </p:sld>
 </file>
 
-<file path=ppt/slides/slide8.xml><?xml version="1.0" encoding="utf-8"?>
-<p:sld xmlns:a="http://schemas.openxmlformats.org/drawingml/2006/main" xmlns:r="http://schemas.openxmlformats.org/officeDocument/2006/relationships" xmlns:p="http://schemas.openxmlformats.org/presentationml/2006/main">
-  <p:cSld>
-    <p:spTree>
-      <p:nvGrpSpPr>
-        <p:cNvPr id="1" name="">
-          <a:extLst>
-            <a:ext uri="{FF2B5EF4-FFF2-40B4-BE49-F238E27FC236}">
-              <a16:creationId xmlns:a16="http://schemas.microsoft.com/office/drawing/2014/main" id="{AB4164A9-576C-7B39-6DA3-FC11907068A3}"/>
-            </a:ext>
-          </a:extLst>
-        </p:cNvPr>
-        <p:cNvGrpSpPr/>
-        <p:nvPr/>
-      </p:nvGrpSpPr>
-      <p:grpSpPr>
-        <a:xfrm>
-          <a:off x="0" y="0"/>
-          <a:ext cx="0" cy="0"/>
-          <a:chOff x="0" y="0"/>
-          <a:chExt cx="0" cy="0"/>
-        </a:xfrm>
-      </p:grpSpPr>
-      <p:sp>
-        <p:nvSpPr>
-          <p:cNvPr id="2" name="Título 1">
-            <a:extLst>
-              <a:ext uri="{FF2B5EF4-FFF2-40B4-BE49-F238E27FC236}">
-                <a16:creationId xmlns:a16="http://schemas.microsoft.com/office/drawing/2014/main" id="{815F950C-379E-3AA8-B5B9-DEE8104CB4F7}"/>
-              </a:ext>
-            </a:extLst>
-          </p:cNvPr>
-          <p:cNvSpPr>
-            <a:spLocks noGrp="1"/>
-          </p:cNvSpPr>
-          <p:nvPr>
-            <p:ph type="ctrTitle"/>
-          </p:nvPr>
-        </p:nvSpPr>
-        <p:spPr>
-          <a:xfrm>
-            <a:off x="630936" y="640823"/>
-            <a:ext cx="3419856" cy="5583148"/>
-          </a:xfrm>
-        </p:spPr>
-        <p:txBody>
-          <a:bodyPr vert="horz" lIns="91440" tIns="45720" rIns="91440" bIns="45720" rtlCol="0" anchor="ctr">
-            <a:normAutofit/>
-          </a:bodyPr>
-          <a:lstStyle/>
-          <a:p>
-            <a:pPr algn="l"/>
-            <a:r>
-              <a:rPr lang="en-US" sz="3400" kern="1200">
-                <a:solidFill>
-                  <a:schemeClr val="tx1"/>
-                </a:solidFill>
-                <a:latin typeface="+mj-lt"/>
-                <a:ea typeface="+mj-ea"/>
-                <a:cs typeface="+mj-cs"/>
-              </a:rPr>
-              <a:t>General Hyperparameters (Training Conditions)</a:t>
-            </a:r>
-          </a:p>
-        </p:txBody>
-      </p:sp>
-      <p:graphicFrame>
-        <p:nvGraphicFramePr>
-          <p:cNvPr id="4" name="Tabla 3">
-            <a:extLst>
-              <a:ext uri="{FF2B5EF4-FFF2-40B4-BE49-F238E27FC236}">
-                <a16:creationId xmlns:a16="http://schemas.microsoft.com/office/drawing/2014/main" id="{8EE3E737-2402-F7C9-943E-A85F986D49DF}"/>
-              </a:ext>
-            </a:extLst>
-          </p:cNvPr>
-          <p:cNvGraphicFramePr>
-            <a:graphicFrameLocks noGrp="1"/>
-          </p:cNvGraphicFramePr>
-          <p:nvPr>
-            <p:extLst>
-              <p:ext uri="{D42A27DB-BD31-4B8C-83A1-F6EECF244321}">
-                <p14:modId xmlns:p14="http://schemas.microsoft.com/office/powerpoint/2010/main" val="2401190035"/>
-              </p:ext>
-            </p:extLst>
-          </p:nvPr>
-        </p:nvGraphicFramePr>
-        <p:xfrm>
-          <a:off x="4654296" y="864581"/>
-          <a:ext cx="6906768" cy="5435401"/>
-        </p:xfrm>
-        <a:graphic>
-          <a:graphicData uri="http://schemas.openxmlformats.org/drawingml/2006/table">
-            <a:tbl>
-              <a:tblPr>
-                <a:noFill/>
-              </a:tblPr>
-              <a:tblGrid>
-                <a:gridCol w="6906768">
-                  <a:extLst>
-                    <a:ext uri="{9D8B030D-6E8A-4147-A177-3AD203B41FA5}">
-                      <a16:colId xmlns:a16="http://schemas.microsoft.com/office/drawing/2014/main" val="2222495668"/>
-                    </a:ext>
-                  </a:extLst>
-                </a:gridCol>
-              </a:tblGrid>
-              <a:tr h="3641407">
-                <a:tc>
-                  <a:txBody>
-                    <a:bodyPr/>
-                    <a:lstStyle/>
-                    <a:p>
-                      <a:pPr fontAlgn="t">
-                        <a:lnSpc>
-                          <a:spcPts val="1500"/>
-                        </a:lnSpc>
-                        <a:buNone/>
-                      </a:pPr>
-                      <a:r>
-                        <a:rPr lang="es-ES" sz="1700" b="1" i="0" dirty="0">
-                          <a:solidFill>
-                            <a:schemeClr val="tx1">
-                              <a:lumMod val="75000"/>
-                              <a:lumOff val="25000"/>
-                            </a:schemeClr>
-                          </a:solidFill>
-                          <a:effectLst/>
-                          <a:latin typeface="Segoe UI" panose="020B0502040204020203" pitchFamily="34" charset="0"/>
-                        </a:rPr>
-                        <a:t>🤖 </a:t>
-                      </a:r>
-                      <a:r>
-                        <a:rPr lang="es-ES" sz="1700" b="1" i="0" dirty="0" err="1">
-                          <a:solidFill>
-                            <a:schemeClr val="tx1">
-                              <a:lumMod val="75000"/>
-                              <a:lumOff val="25000"/>
-                            </a:schemeClr>
-                          </a:solidFill>
-                          <a:effectLst/>
-                          <a:latin typeface="Segoe UI" panose="020B0502040204020203" pitchFamily="34" charset="0"/>
-                        </a:rPr>
-                        <a:t>Algorithm</a:t>
-                      </a:r>
-                      <a:r>
-                        <a:rPr lang="es-ES" sz="1700" b="1" i="0" dirty="0">
-                          <a:solidFill>
-                            <a:schemeClr val="tx1">
-                              <a:lumMod val="75000"/>
-                              <a:lumOff val="25000"/>
-                            </a:schemeClr>
-                          </a:solidFill>
-                          <a:effectLst/>
-                          <a:latin typeface="Segoe UI" panose="020B0502040204020203" pitchFamily="34" charset="0"/>
-                        </a:rPr>
-                        <a:t>:</a:t>
-                      </a:r>
-                      <a:r>
-                        <a:rPr lang="es-ES" sz="1700" b="0" i="0" dirty="0">
-                          <a:solidFill>
-                            <a:schemeClr val="tx1">
-                              <a:lumMod val="75000"/>
-                              <a:lumOff val="25000"/>
-                            </a:schemeClr>
-                          </a:solidFill>
-                          <a:effectLst/>
-                          <a:latin typeface="Segoe UI" panose="020B0502040204020203" pitchFamily="34" charset="0"/>
-                        </a:rPr>
-                        <a:t> DDQN </a:t>
-                      </a:r>
-                      <a:r>
-                        <a:rPr lang="es-ES" sz="1700" b="0" i="0" dirty="0" err="1">
-                          <a:solidFill>
-                            <a:schemeClr val="tx1">
-                              <a:lumMod val="75000"/>
-                              <a:lumOff val="25000"/>
-                            </a:schemeClr>
-                          </a:solidFill>
-                          <a:effectLst/>
-                          <a:latin typeface="Segoe UI" panose="020B0502040204020203" pitchFamily="34" charset="0"/>
-                        </a:rPr>
-                        <a:t>with</a:t>
-                      </a:r>
-                      <a:r>
-                        <a:rPr lang="es-ES" sz="1700" b="0" i="0" dirty="0">
-                          <a:solidFill>
-                            <a:schemeClr val="tx1">
-                              <a:lumMod val="75000"/>
-                              <a:lumOff val="25000"/>
-                            </a:schemeClr>
-                          </a:solidFill>
-                          <a:effectLst/>
-                          <a:latin typeface="Segoe UI" panose="020B0502040204020203" pitchFamily="34" charset="0"/>
-                        </a:rPr>
-                        <a:t> PER</a:t>
-                      </a:r>
-                    </a:p>
-                    <a:p>
-                      <a:br>
-                        <a:rPr lang="es-ES" sz="1700" b="0" i="0" dirty="0">
-                          <a:solidFill>
-                            <a:schemeClr val="tx1">
-                              <a:lumMod val="75000"/>
-                              <a:lumOff val="25000"/>
-                            </a:schemeClr>
-                          </a:solidFill>
-                          <a:effectLst/>
-                          <a:latin typeface="Segoe UI" panose="020B0502040204020203" pitchFamily="34" charset="0"/>
-                        </a:rPr>
-                      </a:br>
-                      <a:r>
-                        <a:rPr lang="es-ES" sz="1700" b="1" i="0" dirty="0">
-                          <a:solidFill>
-                            <a:schemeClr val="tx1">
-                              <a:lumMod val="75000"/>
-                              <a:lumOff val="25000"/>
-                            </a:schemeClr>
-                          </a:solidFill>
-                          <a:effectLst/>
-                          <a:latin typeface="Segoe UI" panose="020B0502040204020203" pitchFamily="34" charset="0"/>
-                        </a:rPr>
-                        <a:t>🧠 Neural Network:</a:t>
-                      </a:r>
-                      <a:r>
-                        <a:rPr lang="es-ES" sz="1700" b="0" i="0" dirty="0">
-                          <a:solidFill>
-                            <a:schemeClr val="tx1">
-                              <a:lumMod val="75000"/>
-                              <a:lumOff val="25000"/>
-                            </a:schemeClr>
-                          </a:solidFill>
-                          <a:effectLst/>
-                          <a:latin typeface="Segoe UI" panose="020B0502040204020203" pitchFamily="34" charset="0"/>
-                        </a:rPr>
-                        <a:t> </a:t>
-                      </a:r>
-                      <a:r>
-                        <a:rPr lang="es-ES" sz="1800" b="0" kern="1200" dirty="0">
-                          <a:solidFill>
-                            <a:schemeClr val="tx1"/>
-                          </a:solidFill>
-                          <a:effectLst/>
-                          <a:latin typeface="+mn-lt"/>
-                          <a:ea typeface="+mn-ea"/>
-                          <a:cs typeface="+mn-cs"/>
-                        </a:rPr>
-                        <a:t>Input: (4, 84, 84) -&gt; Conv1: (32, 20, 20) -&gt; Conv2: (64, 9, 9) -&gt; Conv3: (64, 7, 7) -&gt; </a:t>
-                      </a:r>
-                      <a:r>
-                        <a:rPr lang="es-ES" sz="1800" b="0" kern="1200" dirty="0" err="1">
-                          <a:solidFill>
-                            <a:schemeClr val="tx1"/>
-                          </a:solidFill>
-                          <a:effectLst/>
-                          <a:latin typeface="+mn-lt"/>
-                          <a:ea typeface="+mn-ea"/>
-                          <a:cs typeface="+mn-cs"/>
-                        </a:rPr>
-                        <a:t>Flatten</a:t>
-                      </a:r>
-                      <a:r>
-                        <a:rPr lang="es-ES" sz="1800" b="0" kern="1200" dirty="0">
-                          <a:solidFill>
-                            <a:schemeClr val="tx1"/>
-                          </a:solidFill>
-                          <a:effectLst/>
-                          <a:latin typeface="+mn-lt"/>
-                          <a:ea typeface="+mn-ea"/>
-                          <a:cs typeface="+mn-cs"/>
-                        </a:rPr>
-                        <a:t>: (3136, 512) -&gt; Output: (512, </a:t>
-                      </a:r>
-                      <a:r>
-                        <a:rPr lang="es-ES" sz="1800" b="0" kern="1200" dirty="0" err="1">
-                          <a:solidFill>
-                            <a:schemeClr val="tx1"/>
-                          </a:solidFill>
-                          <a:effectLst/>
-                          <a:latin typeface="+mn-lt"/>
-                          <a:ea typeface="+mn-ea"/>
-                          <a:cs typeface="+mn-cs"/>
-                        </a:rPr>
-                        <a:t>num_actions</a:t>
-                      </a:r>
-                      <a:r>
-                        <a:rPr lang="es-ES" sz="1800" b="0" kern="1200" dirty="0">
-                          <a:solidFill>
-                            <a:schemeClr val="tx1"/>
-                          </a:solidFill>
-                          <a:effectLst/>
-                          <a:latin typeface="+mn-lt"/>
-                          <a:ea typeface="+mn-ea"/>
-                          <a:cs typeface="+mn-cs"/>
-                        </a:rPr>
-                        <a:t>=5)</a:t>
-                      </a:r>
-                      <a:br>
-                        <a:rPr lang="es-ES" sz="1700" b="0" i="0" dirty="0">
-                          <a:solidFill>
-                            <a:schemeClr val="tx1">
-                              <a:lumMod val="75000"/>
-                              <a:lumOff val="25000"/>
-                            </a:schemeClr>
-                          </a:solidFill>
-                          <a:effectLst/>
-                          <a:latin typeface="Segoe UI" panose="020B0502040204020203" pitchFamily="34" charset="0"/>
-                        </a:rPr>
-                      </a:br>
-                      <a:endParaRPr lang="es-ES" sz="1700" b="0" i="0" dirty="0">
-                        <a:solidFill>
-                          <a:schemeClr val="tx1">
-                            <a:lumMod val="75000"/>
-                            <a:lumOff val="25000"/>
-                          </a:schemeClr>
-                        </a:solidFill>
-                        <a:effectLst/>
-                        <a:latin typeface="Segoe UI" panose="020B0502040204020203" pitchFamily="34" charset="0"/>
-                      </a:endParaRPr>
-                    </a:p>
-                    <a:p>
-                      <a:pPr fontAlgn="t">
-                        <a:lnSpc>
-                          <a:spcPts val="1500"/>
-                        </a:lnSpc>
-                        <a:buNone/>
-                      </a:pPr>
-                      <a:r>
-                        <a:rPr lang="es-ES" sz="1700" b="1" i="0" dirty="0">
-                          <a:solidFill>
-                            <a:schemeClr val="tx1">
-                              <a:lumMod val="75000"/>
-                              <a:lumOff val="25000"/>
-                            </a:schemeClr>
-                          </a:solidFill>
-                          <a:effectLst/>
-                          <a:latin typeface="Segoe UI" panose="020B0502040204020203" pitchFamily="34" charset="0"/>
-                        </a:rPr>
-                        <a:t>⚡ </a:t>
-                      </a:r>
-                      <a:r>
-                        <a:rPr lang="es-ES" sz="1700" b="1" i="0" dirty="0" err="1">
-                          <a:solidFill>
-                            <a:schemeClr val="tx1">
-                              <a:lumMod val="75000"/>
-                              <a:lumOff val="25000"/>
-                            </a:schemeClr>
-                          </a:solidFill>
-                          <a:effectLst/>
-                          <a:latin typeface="Segoe UI" panose="020B0502040204020203" pitchFamily="34" charset="0"/>
-                        </a:rPr>
-                        <a:t>Learning</a:t>
-                      </a:r>
-                      <a:r>
-                        <a:rPr lang="es-ES" sz="1700" b="1" i="0" dirty="0">
-                          <a:solidFill>
-                            <a:schemeClr val="tx1">
-                              <a:lumMod val="75000"/>
-                              <a:lumOff val="25000"/>
-                            </a:schemeClr>
-                          </a:solidFill>
-                          <a:effectLst/>
-                          <a:latin typeface="Segoe UI" panose="020B0502040204020203" pitchFamily="34" charset="0"/>
-                        </a:rPr>
-                        <a:t> </a:t>
-                      </a:r>
-                      <a:r>
-                        <a:rPr lang="es-ES" sz="1700" b="1" i="0" dirty="0" err="1">
-                          <a:solidFill>
-                            <a:schemeClr val="tx1">
-                              <a:lumMod val="75000"/>
-                              <a:lumOff val="25000"/>
-                            </a:schemeClr>
-                          </a:solidFill>
-                          <a:effectLst/>
-                          <a:latin typeface="Segoe UI" panose="020B0502040204020203" pitchFamily="34" charset="0"/>
-                        </a:rPr>
-                        <a:t>Rate</a:t>
-                      </a:r>
-                      <a:r>
-                        <a:rPr lang="es-ES" sz="1700" b="1" i="0" dirty="0">
-                          <a:solidFill>
-                            <a:schemeClr val="tx1">
-                              <a:lumMod val="75000"/>
-                              <a:lumOff val="25000"/>
-                            </a:schemeClr>
-                          </a:solidFill>
-                          <a:effectLst/>
-                          <a:latin typeface="Segoe UI" panose="020B0502040204020203" pitchFamily="34" charset="0"/>
-                        </a:rPr>
-                        <a:t>:</a:t>
-                      </a:r>
-                      <a:r>
-                        <a:rPr lang="es-ES" sz="1700" b="0" i="0" dirty="0">
-                          <a:solidFill>
-                            <a:schemeClr val="tx1">
-                              <a:lumMod val="75000"/>
-                              <a:lumOff val="25000"/>
-                            </a:schemeClr>
-                          </a:solidFill>
-                          <a:effectLst/>
-                          <a:latin typeface="Segoe UI" panose="020B0502040204020203" pitchFamily="34" charset="0"/>
-                        </a:rPr>
-                        <a:t> 0.0001</a:t>
-                      </a:r>
-                      <a:br>
-                        <a:rPr lang="es-ES" sz="1700" b="0" i="0" dirty="0">
-                          <a:solidFill>
-                            <a:schemeClr val="tx1">
-                              <a:lumMod val="75000"/>
-                              <a:lumOff val="25000"/>
-                            </a:schemeClr>
-                          </a:solidFill>
-                          <a:effectLst/>
-                          <a:latin typeface="Segoe UI" panose="020B0502040204020203" pitchFamily="34" charset="0"/>
-                        </a:rPr>
-                      </a:br>
-                      <a:endParaRPr lang="es-ES" sz="1700" b="0" i="0" dirty="0">
-                        <a:solidFill>
-                          <a:schemeClr val="tx1">
-                            <a:lumMod val="75000"/>
-                            <a:lumOff val="25000"/>
-                          </a:schemeClr>
-                        </a:solidFill>
-                        <a:effectLst/>
-                        <a:latin typeface="Segoe UI" panose="020B0502040204020203" pitchFamily="34" charset="0"/>
-                      </a:endParaRPr>
-                    </a:p>
-                    <a:p>
-                      <a:pPr fontAlgn="t">
-                        <a:lnSpc>
-                          <a:spcPts val="1500"/>
-                        </a:lnSpc>
-                        <a:buNone/>
-                      </a:pPr>
-                      <a:r>
-                        <a:rPr lang="es-ES" sz="1700" b="1" i="0" dirty="0">
-                          <a:solidFill>
-                            <a:schemeClr val="tx1">
-                              <a:lumMod val="75000"/>
-                              <a:lumOff val="25000"/>
-                            </a:schemeClr>
-                          </a:solidFill>
-                          <a:effectLst/>
-                          <a:latin typeface="Segoe UI" panose="020B0502040204020203" pitchFamily="34" charset="0"/>
-                        </a:rPr>
-                        <a:t>🎯 </a:t>
-                      </a:r>
-                      <a:r>
-                        <a:rPr lang="es-ES" sz="1700" b="1" i="0" dirty="0" err="1">
-                          <a:solidFill>
-                            <a:schemeClr val="tx1">
-                              <a:lumMod val="75000"/>
-                              <a:lumOff val="25000"/>
-                            </a:schemeClr>
-                          </a:solidFill>
-                          <a:effectLst/>
-                          <a:latin typeface="Segoe UI" panose="020B0502040204020203" pitchFamily="34" charset="0"/>
-                        </a:rPr>
-                        <a:t>Discount</a:t>
-                      </a:r>
-                      <a:r>
-                        <a:rPr lang="es-ES" sz="1700" b="1" i="0" dirty="0">
-                          <a:solidFill>
-                            <a:schemeClr val="tx1">
-                              <a:lumMod val="75000"/>
-                              <a:lumOff val="25000"/>
-                            </a:schemeClr>
-                          </a:solidFill>
-                          <a:effectLst/>
-                          <a:latin typeface="Segoe UI" panose="020B0502040204020203" pitchFamily="34" charset="0"/>
-                        </a:rPr>
-                        <a:t> Factor (Gamma):</a:t>
-                      </a:r>
-                      <a:r>
-                        <a:rPr lang="es-ES" sz="1700" b="0" i="0" dirty="0">
-                          <a:solidFill>
-                            <a:schemeClr val="tx1">
-                              <a:lumMod val="75000"/>
-                              <a:lumOff val="25000"/>
-                            </a:schemeClr>
-                          </a:solidFill>
-                          <a:effectLst/>
-                          <a:latin typeface="Segoe UI" panose="020B0502040204020203" pitchFamily="34" charset="0"/>
-                        </a:rPr>
-                        <a:t> 0.99</a:t>
-                      </a:r>
-                      <a:br>
-                        <a:rPr lang="es-ES" sz="1700" b="0" i="0" dirty="0">
-                          <a:solidFill>
-                            <a:schemeClr val="tx1">
-                              <a:lumMod val="75000"/>
-                              <a:lumOff val="25000"/>
-                            </a:schemeClr>
-                          </a:solidFill>
-                          <a:effectLst/>
-                          <a:latin typeface="Segoe UI" panose="020B0502040204020203" pitchFamily="34" charset="0"/>
-                        </a:rPr>
-                      </a:br>
-                      <a:endParaRPr lang="es-ES" sz="1700" b="0" i="0" dirty="0">
-                        <a:solidFill>
-                          <a:schemeClr val="tx1">
-                            <a:lumMod val="75000"/>
-                            <a:lumOff val="25000"/>
-                          </a:schemeClr>
-                        </a:solidFill>
-                        <a:effectLst/>
-                        <a:latin typeface="Segoe UI" panose="020B0502040204020203" pitchFamily="34" charset="0"/>
-                      </a:endParaRPr>
-                    </a:p>
-                    <a:p>
-                      <a:pPr fontAlgn="t">
-                        <a:lnSpc>
-                          <a:spcPts val="1500"/>
-                        </a:lnSpc>
-                        <a:buNone/>
-                      </a:pPr>
-                      <a:r>
-                        <a:rPr lang="es-ES" sz="1700" b="1" i="0" dirty="0">
-                          <a:solidFill>
-                            <a:schemeClr val="tx1">
-                              <a:lumMod val="75000"/>
-                              <a:lumOff val="25000"/>
-                            </a:schemeClr>
-                          </a:solidFill>
-                          <a:effectLst/>
-                          <a:latin typeface="Segoe UI" panose="020B0502040204020203" pitchFamily="34" charset="0"/>
-                        </a:rPr>
-                        <a:t>📦 Replay Buffer </a:t>
-                      </a:r>
-                      <a:r>
-                        <a:rPr lang="es-ES" sz="1700" b="1" i="0" dirty="0" err="1">
-                          <a:solidFill>
-                            <a:schemeClr val="tx1">
-                              <a:lumMod val="75000"/>
-                              <a:lumOff val="25000"/>
-                            </a:schemeClr>
-                          </a:solidFill>
-                          <a:effectLst/>
-                          <a:latin typeface="Segoe UI" panose="020B0502040204020203" pitchFamily="34" charset="0"/>
-                        </a:rPr>
-                        <a:t>Size</a:t>
-                      </a:r>
-                      <a:r>
-                        <a:rPr lang="es-ES" sz="1700" b="1" i="0" dirty="0">
-                          <a:solidFill>
-                            <a:schemeClr val="tx1">
-                              <a:lumMod val="75000"/>
-                              <a:lumOff val="25000"/>
-                            </a:schemeClr>
-                          </a:solidFill>
-                          <a:effectLst/>
-                          <a:latin typeface="Segoe UI" panose="020B0502040204020203" pitchFamily="34" charset="0"/>
-                        </a:rPr>
-                        <a:t>:</a:t>
-                      </a:r>
-                      <a:r>
-                        <a:rPr lang="es-ES" sz="1700" b="0" i="0" dirty="0">
-                          <a:solidFill>
-                            <a:schemeClr val="tx1">
-                              <a:lumMod val="75000"/>
-                              <a:lumOff val="25000"/>
-                            </a:schemeClr>
-                          </a:solidFill>
-                          <a:effectLst/>
-                          <a:latin typeface="Segoe UI" panose="020B0502040204020203" pitchFamily="34" charset="0"/>
-                        </a:rPr>
-                        <a:t> 100000</a:t>
-                      </a:r>
-                      <a:br>
-                        <a:rPr lang="es-ES" sz="1700" b="0" i="0" dirty="0">
-                          <a:solidFill>
-                            <a:schemeClr val="tx1">
-                              <a:lumMod val="75000"/>
-                              <a:lumOff val="25000"/>
-                            </a:schemeClr>
-                          </a:solidFill>
-                          <a:effectLst/>
-                          <a:latin typeface="Segoe UI" panose="020B0502040204020203" pitchFamily="34" charset="0"/>
-                        </a:rPr>
-                      </a:br>
-                      <a:endParaRPr lang="es-ES" sz="1700" b="0" i="0" dirty="0">
-                        <a:solidFill>
-                          <a:schemeClr val="tx1">
-                            <a:lumMod val="75000"/>
-                            <a:lumOff val="25000"/>
-                          </a:schemeClr>
-                        </a:solidFill>
-                        <a:effectLst/>
-                        <a:latin typeface="Segoe UI" panose="020B0502040204020203" pitchFamily="34" charset="0"/>
-                      </a:endParaRPr>
-                    </a:p>
-                    <a:p>
-                      <a:pPr fontAlgn="t">
-                        <a:lnSpc>
-                          <a:spcPts val="1500"/>
-                        </a:lnSpc>
-                        <a:buNone/>
-                      </a:pPr>
-                      <a:r>
-                        <a:rPr lang="es-ES" sz="1700" b="1" i="0" dirty="0">
-                          <a:solidFill>
-                            <a:schemeClr val="tx1">
-                              <a:lumMod val="75000"/>
-                              <a:lumOff val="25000"/>
-                            </a:schemeClr>
-                          </a:solidFill>
-                          <a:effectLst/>
-                          <a:latin typeface="Segoe UI" panose="020B0502040204020203" pitchFamily="34" charset="0"/>
-                        </a:rPr>
-                        <a:t>📐 </a:t>
-                      </a:r>
-                      <a:r>
-                        <a:rPr lang="es-ES" sz="1700" b="1" i="0" dirty="0" err="1">
-                          <a:solidFill>
-                            <a:schemeClr val="tx1">
-                              <a:lumMod val="75000"/>
-                              <a:lumOff val="25000"/>
-                            </a:schemeClr>
-                          </a:solidFill>
-                          <a:effectLst/>
-                          <a:latin typeface="Segoe UI" panose="020B0502040204020203" pitchFamily="34" charset="0"/>
-                        </a:rPr>
-                        <a:t>Batch</a:t>
-                      </a:r>
-                      <a:r>
-                        <a:rPr lang="es-ES" sz="1700" b="1" i="0" dirty="0">
-                          <a:solidFill>
-                            <a:schemeClr val="tx1">
-                              <a:lumMod val="75000"/>
-                              <a:lumOff val="25000"/>
-                            </a:schemeClr>
-                          </a:solidFill>
-                          <a:effectLst/>
-                          <a:latin typeface="Segoe UI" panose="020B0502040204020203" pitchFamily="34" charset="0"/>
-                        </a:rPr>
-                        <a:t> </a:t>
-                      </a:r>
-                      <a:r>
-                        <a:rPr lang="es-ES" sz="1700" b="1" i="0" dirty="0" err="1">
-                          <a:solidFill>
-                            <a:schemeClr val="tx1">
-                              <a:lumMod val="75000"/>
-                              <a:lumOff val="25000"/>
-                            </a:schemeClr>
-                          </a:solidFill>
-                          <a:effectLst/>
-                          <a:latin typeface="Segoe UI" panose="020B0502040204020203" pitchFamily="34" charset="0"/>
-                        </a:rPr>
-                        <a:t>Size</a:t>
-                      </a:r>
-                      <a:r>
-                        <a:rPr lang="es-ES" sz="1700" b="1" i="0" dirty="0">
-                          <a:solidFill>
-                            <a:schemeClr val="tx1">
-                              <a:lumMod val="75000"/>
-                              <a:lumOff val="25000"/>
-                            </a:schemeClr>
-                          </a:solidFill>
-                          <a:effectLst/>
-                          <a:latin typeface="Segoe UI" panose="020B0502040204020203" pitchFamily="34" charset="0"/>
-                        </a:rPr>
-                        <a:t>:</a:t>
-                      </a:r>
-                      <a:r>
-                        <a:rPr lang="es-ES" sz="1700" b="0" i="0" dirty="0">
-                          <a:solidFill>
-                            <a:schemeClr val="tx1">
-                              <a:lumMod val="75000"/>
-                              <a:lumOff val="25000"/>
-                            </a:schemeClr>
-                          </a:solidFill>
-                          <a:effectLst/>
-                          <a:latin typeface="Segoe UI" panose="020B0502040204020203" pitchFamily="34" charset="0"/>
-                        </a:rPr>
-                        <a:t> 128</a:t>
-                      </a:r>
-                      <a:br>
-                        <a:rPr lang="es-ES" sz="1700" b="0" i="0" dirty="0">
-                          <a:solidFill>
-                            <a:schemeClr val="tx1">
-                              <a:lumMod val="75000"/>
-                              <a:lumOff val="25000"/>
-                            </a:schemeClr>
-                          </a:solidFill>
-                          <a:effectLst/>
-                          <a:latin typeface="Segoe UI" panose="020B0502040204020203" pitchFamily="34" charset="0"/>
-                        </a:rPr>
-                      </a:br>
-                      <a:endParaRPr lang="es-ES" sz="1700" b="0" i="0" dirty="0">
-                        <a:solidFill>
-                          <a:schemeClr val="tx1">
-                            <a:lumMod val="75000"/>
-                            <a:lumOff val="25000"/>
-                          </a:schemeClr>
-                        </a:solidFill>
-                        <a:effectLst/>
-                        <a:latin typeface="Segoe UI" panose="020B0502040204020203" pitchFamily="34" charset="0"/>
-                      </a:endParaRPr>
-                    </a:p>
-                    <a:p>
-                      <a:pPr fontAlgn="t">
-                        <a:lnSpc>
-                          <a:spcPts val="1500"/>
-                        </a:lnSpc>
-                        <a:buNone/>
-                      </a:pPr>
-                      <a:r>
-                        <a:rPr lang="es-ES" sz="1700" b="1" i="0" dirty="0">
-                          <a:solidFill>
-                            <a:schemeClr val="tx1">
-                              <a:lumMod val="75000"/>
-                              <a:lumOff val="25000"/>
-                            </a:schemeClr>
-                          </a:solidFill>
-                          <a:effectLst/>
-                          <a:latin typeface="Segoe UI" panose="020B0502040204020203" pitchFamily="34" charset="0"/>
-                        </a:rPr>
-                        <a:t>🔄 Target </a:t>
-                      </a:r>
-                      <a:r>
-                        <a:rPr lang="es-ES" sz="1700" b="1" i="0" dirty="0" err="1">
-                          <a:solidFill>
-                            <a:schemeClr val="tx1">
-                              <a:lumMod val="75000"/>
-                              <a:lumOff val="25000"/>
-                            </a:schemeClr>
-                          </a:solidFill>
-                          <a:effectLst/>
-                          <a:latin typeface="Segoe UI" panose="020B0502040204020203" pitchFamily="34" charset="0"/>
-                        </a:rPr>
-                        <a:t>Update</a:t>
-                      </a:r>
-                      <a:r>
-                        <a:rPr lang="es-ES" sz="1700" b="1" i="0" dirty="0">
-                          <a:solidFill>
-                            <a:schemeClr val="tx1">
-                              <a:lumMod val="75000"/>
-                              <a:lumOff val="25000"/>
-                            </a:schemeClr>
-                          </a:solidFill>
-                          <a:effectLst/>
-                          <a:latin typeface="Segoe UI" panose="020B0502040204020203" pitchFamily="34" charset="0"/>
-                        </a:rPr>
-                        <a:t>:</a:t>
-                      </a:r>
-                      <a:r>
-                        <a:rPr lang="es-ES" sz="1700" b="0" i="0" dirty="0">
-                          <a:solidFill>
-                            <a:schemeClr val="tx1">
-                              <a:lumMod val="75000"/>
-                              <a:lumOff val="25000"/>
-                            </a:schemeClr>
-                          </a:solidFill>
-                          <a:effectLst/>
-                          <a:latin typeface="Segoe UI" panose="020B0502040204020203" pitchFamily="34" charset="0"/>
-                        </a:rPr>
-                        <a:t> </a:t>
-                      </a:r>
-                      <a:r>
-                        <a:rPr lang="es-ES" sz="1700" b="0" i="0" dirty="0" err="1">
-                          <a:solidFill>
-                            <a:schemeClr val="tx1">
-                              <a:lumMod val="75000"/>
-                              <a:lumOff val="25000"/>
-                            </a:schemeClr>
-                          </a:solidFill>
-                          <a:effectLst/>
-                          <a:latin typeface="Segoe UI" panose="020B0502040204020203" pitchFamily="34" charset="0"/>
-                        </a:rPr>
-                        <a:t>Soft</a:t>
-                      </a:r>
-                      <a:r>
-                        <a:rPr lang="es-ES" sz="1700" b="0" i="0" dirty="0">
-                          <a:solidFill>
-                            <a:schemeClr val="tx1">
-                              <a:lumMod val="75000"/>
-                              <a:lumOff val="25000"/>
-                            </a:schemeClr>
-                          </a:solidFill>
-                          <a:effectLst/>
-                          <a:latin typeface="Segoe UI" panose="020B0502040204020203" pitchFamily="34" charset="0"/>
-                        </a:rPr>
-                        <a:t> </a:t>
-                      </a:r>
-                      <a:r>
-                        <a:rPr lang="es-ES" sz="1700" b="0" i="0" dirty="0" err="1">
-                          <a:solidFill>
-                            <a:schemeClr val="tx1">
-                              <a:lumMod val="75000"/>
-                              <a:lumOff val="25000"/>
-                            </a:schemeClr>
-                          </a:solidFill>
-                          <a:effectLst/>
-                          <a:latin typeface="Segoe UI" panose="020B0502040204020203" pitchFamily="34" charset="0"/>
-                        </a:rPr>
-                        <a:t>Updates</a:t>
-                      </a:r>
-                      <a:r>
-                        <a:rPr lang="es-ES" sz="1700" b="0" i="0" dirty="0">
-                          <a:solidFill>
-                            <a:schemeClr val="tx1">
-                              <a:lumMod val="75000"/>
-                              <a:lumOff val="25000"/>
-                            </a:schemeClr>
-                          </a:solidFill>
-                          <a:effectLst/>
-                          <a:latin typeface="Segoe UI" panose="020B0502040204020203" pitchFamily="34" charset="0"/>
-                        </a:rPr>
-                        <a:t> (</a:t>
-                      </a:r>
-                      <a:r>
-                        <a:rPr lang="es-ES" sz="1700" b="0" i="0" dirty="0" err="1">
-                          <a:solidFill>
-                            <a:schemeClr val="tx1">
-                              <a:lumMod val="75000"/>
-                              <a:lumOff val="25000"/>
-                            </a:schemeClr>
-                          </a:solidFill>
-                          <a:effectLst/>
-                          <a:latin typeface="Segoe UI" panose="020B0502040204020203" pitchFamily="34" charset="0"/>
-                        </a:rPr>
-                        <a:t>Polyak</a:t>
-                      </a:r>
-                      <a:r>
-                        <a:rPr lang="es-ES" sz="1700" b="0" i="0" dirty="0">
-                          <a:solidFill>
-                            <a:schemeClr val="tx1">
-                              <a:lumMod val="75000"/>
-                              <a:lumOff val="25000"/>
-                            </a:schemeClr>
-                          </a:solidFill>
-                          <a:effectLst/>
-                          <a:latin typeface="Segoe UI" panose="020B0502040204020203" pitchFamily="34" charset="0"/>
-                        </a:rPr>
-                        <a:t> </a:t>
-                      </a:r>
-                      <a:r>
-                        <a:rPr lang="es-ES" sz="1700" b="0" i="0" dirty="0" err="1">
-                          <a:solidFill>
-                            <a:schemeClr val="tx1">
-                              <a:lumMod val="75000"/>
-                              <a:lumOff val="25000"/>
-                            </a:schemeClr>
-                          </a:solidFill>
-                          <a:effectLst/>
-                          <a:latin typeface="Segoe UI" panose="020B0502040204020203" pitchFamily="34" charset="0"/>
-                        </a:rPr>
-                        <a:t>Averaging</a:t>
-                      </a:r>
-                      <a:r>
-                        <a:rPr lang="es-ES" sz="1700" b="0" i="0" dirty="0">
-                          <a:solidFill>
-                            <a:schemeClr val="tx1">
-                              <a:lumMod val="75000"/>
-                              <a:lumOff val="25000"/>
-                            </a:schemeClr>
-                          </a:solidFill>
-                          <a:effectLst/>
-                          <a:latin typeface="Segoe UI" panose="020B0502040204020203" pitchFamily="34" charset="0"/>
-                        </a:rPr>
-                        <a:t>), TAU = 0.005</a:t>
-                      </a:r>
-                      <a:br>
-                        <a:rPr lang="es-ES" sz="1700" b="0" i="0" dirty="0">
-                          <a:solidFill>
-                            <a:schemeClr val="tx1">
-                              <a:lumMod val="75000"/>
-                              <a:lumOff val="25000"/>
-                            </a:schemeClr>
-                          </a:solidFill>
-                          <a:effectLst/>
-                          <a:latin typeface="Segoe UI" panose="020B0502040204020203" pitchFamily="34" charset="0"/>
-                        </a:rPr>
-                      </a:br>
-                      <a:endParaRPr lang="es-ES" sz="1700" b="0" i="0" dirty="0">
-                        <a:solidFill>
-                          <a:schemeClr val="tx1">
-                            <a:lumMod val="75000"/>
-                            <a:lumOff val="25000"/>
-                          </a:schemeClr>
-                        </a:solidFill>
-                        <a:effectLst/>
-                        <a:latin typeface="Segoe UI" panose="020B0502040204020203" pitchFamily="34" charset="0"/>
-                      </a:endParaRPr>
-                    </a:p>
-                    <a:p>
-                      <a:pPr fontAlgn="t">
-                        <a:lnSpc>
-                          <a:spcPts val="1500"/>
-                        </a:lnSpc>
-                        <a:buNone/>
-                      </a:pPr>
-                      <a:r>
-                        <a:rPr lang="es-ES" sz="1700" b="1" i="0" dirty="0">
-                          <a:solidFill>
-                            <a:schemeClr val="tx1">
-                              <a:lumMod val="75000"/>
-                              <a:lumOff val="25000"/>
-                            </a:schemeClr>
-                          </a:solidFill>
-                          <a:effectLst/>
-                          <a:latin typeface="Segoe UI" panose="020B0502040204020203" pitchFamily="34" charset="0"/>
-                        </a:rPr>
-                        <a:t>🎲 </a:t>
-                      </a:r>
-                      <a:r>
-                        <a:rPr lang="es-ES" sz="1700" b="1" i="0" dirty="0" err="1">
-                          <a:solidFill>
-                            <a:schemeClr val="tx1">
-                              <a:lumMod val="75000"/>
-                              <a:lumOff val="25000"/>
-                            </a:schemeClr>
-                          </a:solidFill>
-                          <a:effectLst/>
-                          <a:latin typeface="Segoe UI" panose="020B0502040204020203" pitchFamily="34" charset="0"/>
-                        </a:rPr>
-                        <a:t>Exploration</a:t>
-                      </a:r>
-                      <a:r>
-                        <a:rPr lang="es-ES" sz="1700" b="1" i="0" dirty="0">
-                          <a:solidFill>
-                            <a:schemeClr val="tx1">
-                              <a:lumMod val="75000"/>
-                              <a:lumOff val="25000"/>
-                            </a:schemeClr>
-                          </a:solidFill>
-                          <a:effectLst/>
-                          <a:latin typeface="Segoe UI" panose="020B0502040204020203" pitchFamily="34" charset="0"/>
-                        </a:rPr>
-                        <a:t> </a:t>
-                      </a:r>
-                      <a:r>
-                        <a:rPr lang="es-ES" sz="1700" b="1" i="0" dirty="0" err="1">
-                          <a:solidFill>
-                            <a:schemeClr val="tx1">
-                              <a:lumMod val="75000"/>
-                              <a:lumOff val="25000"/>
-                            </a:schemeClr>
-                          </a:solidFill>
-                          <a:effectLst/>
-                          <a:latin typeface="Segoe UI" panose="020B0502040204020203" pitchFamily="34" charset="0"/>
-                        </a:rPr>
-                        <a:t>Strategy</a:t>
-                      </a:r>
-                      <a:r>
-                        <a:rPr lang="es-ES" sz="1700" b="1" i="0" dirty="0">
-                          <a:solidFill>
-                            <a:schemeClr val="tx1">
-                              <a:lumMod val="75000"/>
-                              <a:lumOff val="25000"/>
-                            </a:schemeClr>
-                          </a:solidFill>
-                          <a:effectLst/>
-                          <a:latin typeface="Segoe UI" panose="020B0502040204020203" pitchFamily="34" charset="0"/>
-                        </a:rPr>
-                        <a:t>:</a:t>
-                      </a:r>
-                      <a:r>
-                        <a:rPr lang="es-ES" sz="1700" b="0" i="0" dirty="0">
-                          <a:solidFill>
-                            <a:schemeClr val="tx1">
-                              <a:lumMod val="75000"/>
-                              <a:lumOff val="25000"/>
-                            </a:schemeClr>
-                          </a:solidFill>
-                          <a:effectLst/>
-                          <a:latin typeface="Segoe UI" panose="020B0502040204020203" pitchFamily="34" charset="0"/>
-                        </a:rPr>
-                        <a:t> </a:t>
-                      </a:r>
-                      <a:r>
-                        <a:rPr lang="el-GR" sz="1700" b="0" i="0" dirty="0">
-                          <a:solidFill>
-                            <a:schemeClr val="tx1">
-                              <a:lumMod val="75000"/>
-                              <a:lumOff val="25000"/>
-                            </a:schemeClr>
-                          </a:solidFill>
-                          <a:effectLst/>
-                          <a:latin typeface="Segoe UI" panose="020B0502040204020203" pitchFamily="34" charset="0"/>
-                        </a:rPr>
-                        <a:t>ε-</a:t>
-                      </a:r>
-                      <a:r>
-                        <a:rPr lang="es-ES" sz="1700" b="0" i="0" dirty="0" err="1">
-                          <a:solidFill>
-                            <a:schemeClr val="tx1">
-                              <a:lumMod val="75000"/>
-                              <a:lumOff val="25000"/>
-                            </a:schemeClr>
-                          </a:solidFill>
-                          <a:effectLst/>
-                          <a:latin typeface="Segoe UI" panose="020B0502040204020203" pitchFamily="34" charset="0"/>
-                        </a:rPr>
-                        <a:t>greedy</a:t>
-                      </a:r>
-                      <a:r>
-                        <a:rPr lang="es-ES" sz="1700" b="0" i="0" dirty="0">
-                          <a:solidFill>
-                            <a:schemeClr val="tx1">
-                              <a:lumMod val="75000"/>
-                              <a:lumOff val="25000"/>
-                            </a:schemeClr>
-                          </a:solidFill>
-                          <a:effectLst/>
-                          <a:latin typeface="Segoe UI" panose="020B0502040204020203" pitchFamily="34" charset="0"/>
-                        </a:rPr>
-                        <a:t> (</a:t>
-                      </a:r>
-                      <a:r>
-                        <a:rPr lang="el-GR" sz="1700" b="0" i="0" dirty="0">
-                          <a:solidFill>
-                            <a:schemeClr val="tx1">
-                              <a:lumMod val="75000"/>
-                              <a:lumOff val="25000"/>
-                            </a:schemeClr>
-                          </a:solidFill>
-                          <a:effectLst/>
-                          <a:latin typeface="Segoe UI" panose="020B0502040204020203" pitchFamily="34" charset="0"/>
-                        </a:rPr>
-                        <a:t>ε </a:t>
-                      </a:r>
-                      <a:r>
-                        <a:rPr lang="es-ES" sz="1700" b="0" i="0" dirty="0" err="1">
-                          <a:solidFill>
-                            <a:schemeClr val="tx1">
-                              <a:lumMod val="75000"/>
-                              <a:lumOff val="25000"/>
-                            </a:schemeClr>
-                          </a:solidFill>
-                          <a:effectLst/>
-                          <a:latin typeface="Segoe UI" panose="020B0502040204020203" pitchFamily="34" charset="0"/>
-                        </a:rPr>
-                        <a:t>decays</a:t>
-                      </a:r>
-                      <a:r>
-                        <a:rPr lang="es-ES" sz="1700" b="0" i="0" dirty="0">
-                          <a:solidFill>
-                            <a:schemeClr val="tx1">
-                              <a:lumMod val="75000"/>
-                              <a:lumOff val="25000"/>
-                            </a:schemeClr>
-                          </a:solidFill>
-                          <a:effectLst/>
-                          <a:latin typeface="Segoe UI" panose="020B0502040204020203" pitchFamily="34" charset="0"/>
-                        </a:rPr>
-                        <a:t> </a:t>
-                      </a:r>
-                      <a:r>
-                        <a:rPr lang="es-ES" sz="1700" b="0" i="0" dirty="0" err="1">
-                          <a:solidFill>
-                            <a:schemeClr val="tx1">
-                              <a:lumMod val="75000"/>
-                              <a:lumOff val="25000"/>
-                            </a:schemeClr>
-                          </a:solidFill>
-                          <a:effectLst/>
-                          <a:latin typeface="Segoe UI" panose="020B0502040204020203" pitchFamily="34" charset="0"/>
-                        </a:rPr>
-                        <a:t>from</a:t>
-                      </a:r>
-                      <a:r>
-                        <a:rPr lang="es-ES" sz="1700" b="0" i="0" dirty="0">
-                          <a:solidFill>
-                            <a:schemeClr val="tx1">
-                              <a:lumMod val="75000"/>
-                              <a:lumOff val="25000"/>
-                            </a:schemeClr>
-                          </a:solidFill>
-                          <a:effectLst/>
-                          <a:latin typeface="Segoe UI" panose="020B0502040204020203" pitchFamily="34" charset="0"/>
-                        </a:rPr>
-                        <a:t> 1.0 </a:t>
-                      </a:r>
-                      <a:r>
-                        <a:rPr lang="es-ES" sz="1700" b="0" i="0" dirty="0" err="1">
-                          <a:solidFill>
-                            <a:schemeClr val="tx1">
-                              <a:lumMod val="75000"/>
-                              <a:lumOff val="25000"/>
-                            </a:schemeClr>
-                          </a:solidFill>
-                          <a:effectLst/>
-                          <a:latin typeface="Segoe UI" panose="020B0502040204020203" pitchFamily="34" charset="0"/>
-                        </a:rPr>
-                        <a:t>to</a:t>
-                      </a:r>
-                      <a:r>
-                        <a:rPr lang="es-ES" sz="1700" b="0" i="0" dirty="0">
-                          <a:solidFill>
-                            <a:schemeClr val="tx1">
-                              <a:lumMod val="75000"/>
-                              <a:lumOff val="25000"/>
-                            </a:schemeClr>
-                          </a:solidFill>
-                          <a:effectLst/>
-                          <a:latin typeface="Segoe UI" panose="020B0502040204020203" pitchFamily="34" charset="0"/>
-                        </a:rPr>
-                        <a:t> 0.01 </a:t>
-                      </a:r>
-                      <a:r>
-                        <a:rPr lang="es-ES" sz="1700" b="0" i="0" dirty="0" err="1">
-                          <a:solidFill>
-                            <a:schemeClr val="tx1">
-                              <a:lumMod val="75000"/>
-                              <a:lumOff val="25000"/>
-                            </a:schemeClr>
-                          </a:solidFill>
-                          <a:effectLst/>
-                          <a:latin typeface="Segoe UI" panose="020B0502040204020203" pitchFamily="34" charset="0"/>
-                        </a:rPr>
-                        <a:t>with</a:t>
-                      </a:r>
-                      <a:r>
-                        <a:rPr lang="es-ES" sz="1700" b="0" i="0" dirty="0">
-                          <a:solidFill>
-                            <a:schemeClr val="tx1">
-                              <a:lumMod val="75000"/>
-                              <a:lumOff val="25000"/>
-                            </a:schemeClr>
-                          </a:solidFill>
-                          <a:effectLst/>
-                          <a:latin typeface="Segoe UI" panose="020B0502040204020203" pitchFamily="34" charset="0"/>
-                        </a:rPr>
-                        <a:t> a 0.99 </a:t>
-                      </a:r>
-                      <a:r>
-                        <a:rPr lang="es-ES" sz="1700" b="0" i="0" dirty="0" err="1">
-                          <a:solidFill>
-                            <a:schemeClr val="tx1">
-                              <a:lumMod val="75000"/>
-                              <a:lumOff val="25000"/>
-                            </a:schemeClr>
-                          </a:solidFill>
-                          <a:effectLst/>
-                          <a:latin typeface="Segoe UI" panose="020B0502040204020203" pitchFamily="34" charset="0"/>
-                        </a:rPr>
-                        <a:t>decay</a:t>
-                      </a:r>
-                      <a:r>
-                        <a:rPr lang="es-ES" sz="1700" b="0" i="0" dirty="0">
-                          <a:solidFill>
-                            <a:schemeClr val="tx1">
-                              <a:lumMod val="75000"/>
-                              <a:lumOff val="25000"/>
-                            </a:schemeClr>
-                          </a:solidFill>
-                          <a:effectLst/>
-                          <a:latin typeface="Segoe UI" panose="020B0502040204020203" pitchFamily="34" charset="0"/>
-                        </a:rPr>
-                        <a:t> factor per </a:t>
-                      </a:r>
-                      <a:r>
-                        <a:rPr lang="es-ES" sz="1700" b="0" i="0" dirty="0" err="1">
-                          <a:solidFill>
-                            <a:schemeClr val="tx1">
-                              <a:lumMod val="75000"/>
-                              <a:lumOff val="25000"/>
-                            </a:schemeClr>
-                          </a:solidFill>
-                          <a:effectLst/>
-                          <a:latin typeface="Segoe UI" panose="020B0502040204020203" pitchFamily="34" charset="0"/>
-                        </a:rPr>
-                        <a:t>episode</a:t>
-                      </a:r>
-                      <a:r>
-                        <a:rPr lang="es-ES" sz="1700" b="0" i="0" dirty="0">
-                          <a:solidFill>
-                            <a:schemeClr val="tx1">
-                              <a:lumMod val="75000"/>
-                              <a:lumOff val="25000"/>
-                            </a:schemeClr>
-                          </a:solidFill>
-                          <a:effectLst/>
-                          <a:latin typeface="Segoe UI" panose="020B0502040204020203" pitchFamily="34" charset="0"/>
-                        </a:rPr>
-                        <a:t>)</a:t>
-                      </a:r>
-                      <a:br>
-                        <a:rPr lang="es-ES" sz="1700" b="0" i="0" dirty="0">
-                          <a:solidFill>
-                            <a:schemeClr val="tx1">
-                              <a:lumMod val="75000"/>
-                              <a:lumOff val="25000"/>
-                            </a:schemeClr>
-                          </a:solidFill>
-                          <a:effectLst/>
-                          <a:latin typeface="Segoe UI" panose="020B0502040204020203" pitchFamily="34" charset="0"/>
-                        </a:rPr>
-                      </a:br>
-                      <a:endParaRPr lang="es-ES" sz="1700" b="0" i="0" dirty="0">
-                        <a:solidFill>
-                          <a:schemeClr val="tx1">
-                            <a:lumMod val="75000"/>
-                            <a:lumOff val="25000"/>
-                          </a:schemeClr>
-                        </a:solidFill>
-                        <a:effectLst/>
-                        <a:latin typeface="Segoe UI" panose="020B0502040204020203" pitchFamily="34" charset="0"/>
-                      </a:endParaRPr>
-                    </a:p>
-                    <a:p>
-                      <a:pPr fontAlgn="t">
-                        <a:lnSpc>
-                          <a:spcPts val="1500"/>
-                        </a:lnSpc>
-                        <a:buNone/>
-                      </a:pPr>
-                      <a:r>
-                        <a:rPr lang="es-ES" sz="1700" b="1" i="0" dirty="0">
-                          <a:solidFill>
-                            <a:schemeClr val="tx1">
-                              <a:lumMod val="75000"/>
-                              <a:lumOff val="25000"/>
-                            </a:schemeClr>
-                          </a:solidFill>
-                          <a:effectLst/>
-                          <a:latin typeface="Segoe UI" panose="020B0502040204020203" pitchFamily="34" charset="0"/>
-                        </a:rPr>
-                        <a:t>🛠️ </a:t>
-                      </a:r>
-                      <a:r>
-                        <a:rPr lang="es-ES" sz="1700" b="1" i="0" dirty="0" err="1">
-                          <a:solidFill>
-                            <a:schemeClr val="tx1">
-                              <a:lumMod val="75000"/>
-                              <a:lumOff val="25000"/>
-                            </a:schemeClr>
-                          </a:solidFill>
-                          <a:effectLst/>
-                          <a:latin typeface="Segoe UI" panose="020B0502040204020203" pitchFamily="34" charset="0"/>
-                        </a:rPr>
-                        <a:t>Optimizer</a:t>
-                      </a:r>
-                      <a:r>
-                        <a:rPr lang="es-ES" sz="1700" b="1" i="0" dirty="0">
-                          <a:solidFill>
-                            <a:schemeClr val="tx1">
-                              <a:lumMod val="75000"/>
-                              <a:lumOff val="25000"/>
-                            </a:schemeClr>
-                          </a:solidFill>
-                          <a:effectLst/>
-                          <a:latin typeface="Segoe UI" panose="020B0502040204020203" pitchFamily="34" charset="0"/>
-                        </a:rPr>
-                        <a:t>:</a:t>
-                      </a:r>
-                      <a:r>
-                        <a:rPr lang="es-ES" sz="1700" b="0" i="0" dirty="0">
-                          <a:solidFill>
-                            <a:schemeClr val="tx1">
-                              <a:lumMod val="75000"/>
-                              <a:lumOff val="25000"/>
-                            </a:schemeClr>
-                          </a:solidFill>
-                          <a:effectLst/>
-                          <a:latin typeface="Segoe UI" panose="020B0502040204020203" pitchFamily="34" charset="0"/>
-                        </a:rPr>
-                        <a:t> </a:t>
-                      </a:r>
-                      <a:r>
-                        <a:rPr lang="es-ES" sz="1700" b="0" i="0" dirty="0" err="1">
-                          <a:solidFill>
-                            <a:schemeClr val="tx1">
-                              <a:lumMod val="75000"/>
-                              <a:lumOff val="25000"/>
-                            </a:schemeClr>
-                          </a:solidFill>
-                          <a:effectLst/>
-                          <a:latin typeface="Segoe UI" panose="020B0502040204020203" pitchFamily="34" charset="0"/>
-                        </a:rPr>
-                        <a:t>AdamW</a:t>
-                      </a:r>
-                      <a:br>
-                        <a:rPr lang="es-ES" sz="1700" b="0" i="0" dirty="0">
-                          <a:solidFill>
-                            <a:schemeClr val="tx1">
-                              <a:lumMod val="75000"/>
-                              <a:lumOff val="25000"/>
-                            </a:schemeClr>
-                          </a:solidFill>
-                          <a:effectLst/>
-                          <a:latin typeface="Segoe UI" panose="020B0502040204020203" pitchFamily="34" charset="0"/>
-                        </a:rPr>
-                      </a:br>
-                      <a:endParaRPr lang="es-ES" sz="1700" b="0" i="0" dirty="0">
-                        <a:solidFill>
-                          <a:schemeClr val="tx1">
-                            <a:lumMod val="75000"/>
-                            <a:lumOff val="25000"/>
-                          </a:schemeClr>
-                        </a:solidFill>
-                        <a:effectLst/>
-                        <a:latin typeface="Segoe UI" panose="020B0502040204020203" pitchFamily="34" charset="0"/>
-                      </a:endParaRPr>
-                    </a:p>
-                    <a:p>
-                      <a:pPr fontAlgn="t">
-                        <a:lnSpc>
-                          <a:spcPts val="1500"/>
-                        </a:lnSpc>
-                        <a:buNone/>
-                      </a:pPr>
-                      <a:r>
-                        <a:rPr lang="es-ES" sz="1700" b="1" i="0" dirty="0">
-                          <a:solidFill>
-                            <a:schemeClr val="tx1">
-                              <a:lumMod val="75000"/>
-                              <a:lumOff val="25000"/>
-                            </a:schemeClr>
-                          </a:solidFill>
-                          <a:effectLst/>
-                          <a:latin typeface="Segoe UI" panose="020B0502040204020203" pitchFamily="34" charset="0"/>
-                        </a:rPr>
-                        <a:t>📉 </a:t>
-                      </a:r>
-                      <a:r>
-                        <a:rPr lang="es-ES" sz="1700" b="1" i="0" dirty="0" err="1">
-                          <a:solidFill>
-                            <a:schemeClr val="tx1">
-                              <a:lumMod val="75000"/>
-                              <a:lumOff val="25000"/>
-                            </a:schemeClr>
-                          </a:solidFill>
-                          <a:effectLst/>
-                          <a:latin typeface="Segoe UI" panose="020B0502040204020203" pitchFamily="34" charset="0"/>
-                        </a:rPr>
-                        <a:t>Loss</a:t>
-                      </a:r>
-                      <a:r>
-                        <a:rPr lang="es-ES" sz="1700" b="1" i="0" dirty="0">
-                          <a:solidFill>
-                            <a:schemeClr val="tx1">
-                              <a:lumMod val="75000"/>
-                              <a:lumOff val="25000"/>
-                            </a:schemeClr>
-                          </a:solidFill>
-                          <a:effectLst/>
-                          <a:latin typeface="Segoe UI" panose="020B0502040204020203" pitchFamily="34" charset="0"/>
-                        </a:rPr>
-                        <a:t> </a:t>
-                      </a:r>
-                      <a:r>
-                        <a:rPr lang="es-ES" sz="1700" b="1" i="0" dirty="0" err="1">
-                          <a:solidFill>
-                            <a:schemeClr val="tx1">
-                              <a:lumMod val="75000"/>
-                              <a:lumOff val="25000"/>
-                            </a:schemeClr>
-                          </a:solidFill>
-                          <a:effectLst/>
-                          <a:latin typeface="Segoe UI" panose="020B0502040204020203" pitchFamily="34" charset="0"/>
-                        </a:rPr>
-                        <a:t>Function</a:t>
-                      </a:r>
-                      <a:r>
-                        <a:rPr lang="es-ES" sz="1700" b="1" i="0" dirty="0">
-                          <a:solidFill>
-                            <a:schemeClr val="tx1">
-                              <a:lumMod val="75000"/>
-                              <a:lumOff val="25000"/>
-                            </a:schemeClr>
-                          </a:solidFill>
-                          <a:effectLst/>
-                          <a:latin typeface="Segoe UI" panose="020B0502040204020203" pitchFamily="34" charset="0"/>
-                        </a:rPr>
-                        <a:t>:</a:t>
-                      </a:r>
-                      <a:r>
-                        <a:rPr lang="es-ES" sz="1700" b="0" i="0" dirty="0">
-                          <a:solidFill>
-                            <a:schemeClr val="tx1">
-                              <a:lumMod val="75000"/>
-                              <a:lumOff val="25000"/>
-                            </a:schemeClr>
-                          </a:solidFill>
-                          <a:effectLst/>
-                          <a:latin typeface="Segoe UI" panose="020B0502040204020203" pitchFamily="34" charset="0"/>
-                        </a:rPr>
-                        <a:t> </a:t>
-                      </a:r>
-                      <a:r>
-                        <a:rPr lang="es-ES" sz="1700" b="0" i="0" dirty="0" err="1">
-                          <a:solidFill>
-                            <a:schemeClr val="tx1">
-                              <a:lumMod val="75000"/>
-                              <a:lumOff val="25000"/>
-                            </a:schemeClr>
-                          </a:solidFill>
-                          <a:effectLst/>
-                          <a:latin typeface="Segoe UI" panose="020B0502040204020203" pitchFamily="34" charset="0"/>
-                        </a:rPr>
-                        <a:t>Smooth</a:t>
-                      </a:r>
-                      <a:r>
-                        <a:rPr lang="es-ES" sz="1700" b="0" i="0" dirty="0">
-                          <a:solidFill>
-                            <a:schemeClr val="tx1">
-                              <a:lumMod val="75000"/>
-                              <a:lumOff val="25000"/>
-                            </a:schemeClr>
-                          </a:solidFill>
-                          <a:effectLst/>
-                          <a:latin typeface="Segoe UI" panose="020B0502040204020203" pitchFamily="34" charset="0"/>
-                        </a:rPr>
-                        <a:t> L1 los</a:t>
-                      </a:r>
-                    </a:p>
-                  </a:txBody>
-                  <a:tcPr marL="278632" marR="144889" marT="144889" marB="144889">
-                    <a:lnL w="12700" cmpd="sng">
-                      <a:noFill/>
-                      <a:prstDash val="solid"/>
-                    </a:lnL>
-                    <a:lnR w="12700" cmpd="sng">
-                      <a:noFill/>
-                      <a:prstDash val="solid"/>
-                    </a:lnR>
-                    <a:lnT w="12700" cmpd="sng">
-                      <a:noFill/>
-                      <a:prstDash val="solid"/>
-                    </a:lnT>
-                    <a:lnB w="12700" cmpd="sng">
-                      <a:noFill/>
-                      <a:prstDash val="solid"/>
-                    </a:lnB>
-                    <a:solidFill>
-                      <a:srgbClr val="B4BCBE">
-                        <a:alpha val="34902"/>
-                      </a:srgbClr>
-                    </a:solidFill>
-                  </a:tcPr>
-                </a:tc>
-                <a:extLst>
-                  <a:ext uri="{0D108BD9-81ED-4DB2-BD59-A6C34878D82A}">
-                    <a16:rowId xmlns:a16="http://schemas.microsoft.com/office/drawing/2014/main" val="1838742390"/>
-                  </a:ext>
-                </a:extLst>
-              </a:tr>
-              <a:tr h="485463">
-                <a:tc>
-                  <a:txBody>
-                    <a:bodyPr/>
-                    <a:lstStyle/>
-                    <a:p>
-                      <a:endParaRPr lang="es-ES" sz="1700" dirty="0">
-                        <a:solidFill>
-                          <a:schemeClr val="tx1">
-                            <a:lumMod val="75000"/>
-                            <a:lumOff val="25000"/>
-                          </a:schemeClr>
-                        </a:solidFill>
-                      </a:endParaRPr>
-                    </a:p>
-                  </a:txBody>
-                  <a:tcPr marL="278632" marR="144889" marT="144889" marB="144889">
-                    <a:lnL w="12700" cmpd="sng">
-                      <a:noFill/>
-                      <a:prstDash val="solid"/>
-                    </a:lnL>
-                    <a:lnR w="12700" cmpd="sng">
-                      <a:noFill/>
-                      <a:prstDash val="solid"/>
-                    </a:lnR>
-                    <a:lnT w="12700" cmpd="sng">
-                      <a:noFill/>
-                      <a:prstDash val="solid"/>
-                    </a:lnT>
-                    <a:lnB w="12700" cmpd="sng">
-                      <a:noFill/>
-                      <a:prstDash val="solid"/>
-                    </a:lnB>
-                    <a:solidFill>
-                      <a:srgbClr val="B4BCBE">
-                        <a:alpha val="34902"/>
-                      </a:srgbClr>
-                    </a:solidFill>
-                  </a:tcPr>
-                </a:tc>
-                <a:extLst>
-                  <a:ext uri="{0D108BD9-81ED-4DB2-BD59-A6C34878D82A}">
-                    <a16:rowId xmlns:a16="http://schemas.microsoft.com/office/drawing/2014/main" val="1612969945"/>
-                  </a:ext>
-                </a:extLst>
-              </a:tr>
-            </a:tbl>
-          </a:graphicData>
-        </a:graphic>
-      </p:graphicFrame>
-    </p:spTree>
-    <p:extLst>
-      <p:ext uri="{BB962C8B-B14F-4D97-AF65-F5344CB8AC3E}">
-        <p14:creationId xmlns:p14="http://schemas.microsoft.com/office/powerpoint/2010/main" val="3855585840"/>
-      </p:ext>
-    </p:extLst>
-  </p:cSld>
-  <p:clrMapOvr>
-    <a:masterClrMapping/>
-  </p:clrMapOvr>
-</p:sld>
-</file>
-
-<file path=ppt/slides/slide9.xml><?xml version="1.0" encoding="utf-8"?>
-<p:sld xmlns:a="http://schemas.openxmlformats.org/drawingml/2006/main" xmlns:r="http://schemas.openxmlformats.org/officeDocument/2006/relationships" xmlns:p="http://schemas.openxmlformats.org/presentationml/2006/main">
-  <p:cSld>
-    <p:spTree>
-      <p:nvGrpSpPr>
-        <p:cNvPr id="1" name="">
-          <a:extLst>
-            <a:ext uri="{FF2B5EF4-FFF2-40B4-BE49-F238E27FC236}">
-              <a16:creationId xmlns:a16="http://schemas.microsoft.com/office/drawing/2014/main" id="{062063A4-C606-3F49-5C85-5725762D1497}"/>
-            </a:ext>
-          </a:extLst>
-        </p:cNvPr>
-        <p:cNvGrpSpPr/>
-        <p:nvPr/>
-      </p:nvGrpSpPr>
-      <p:grpSpPr>
-        <a:xfrm>
-          <a:off x="0" y="0"/>
-          <a:ext cx="0" cy="0"/>
-          <a:chOff x="0" y="0"/>
-          <a:chExt cx="0" cy="0"/>
-        </a:xfrm>
-      </p:grpSpPr>
-      <p:sp>
-        <p:nvSpPr>
-          <p:cNvPr id="2" name="Título 1">
-            <a:extLst>
-              <a:ext uri="{FF2B5EF4-FFF2-40B4-BE49-F238E27FC236}">
-                <a16:creationId xmlns:a16="http://schemas.microsoft.com/office/drawing/2014/main" id="{86449507-FBA4-EEAC-1559-BAC0C787D821}"/>
-              </a:ext>
-            </a:extLst>
-          </p:cNvPr>
-          <p:cNvSpPr>
-            <a:spLocks noGrp="1"/>
-          </p:cNvSpPr>
-          <p:nvPr>
-            <p:ph type="ctrTitle"/>
-          </p:nvPr>
-        </p:nvSpPr>
-        <p:spPr>
-          <a:xfrm>
-            <a:off x="387212" y="3037144"/>
-            <a:ext cx="3571810" cy="783709"/>
-          </a:xfrm>
-        </p:spPr>
-        <p:txBody>
-          <a:bodyPr>
-            <a:normAutofit/>
-          </a:bodyPr>
-          <a:lstStyle/>
-          <a:p>
-            <a:pPr algn="l"/>
-            <a:r>
-              <a:rPr lang="es-ES" sz="3600" dirty="0" err="1"/>
-              <a:t>Experimentation</a:t>
-            </a:r>
-            <a:endParaRPr lang="es-ES" sz="3600" dirty="0"/>
-          </a:p>
-        </p:txBody>
-      </p:sp>
-      <p:graphicFrame>
-        <p:nvGraphicFramePr>
-          <p:cNvPr id="5" name="Tabla 4">
-            <a:extLst>
-              <a:ext uri="{FF2B5EF4-FFF2-40B4-BE49-F238E27FC236}">
-                <a16:creationId xmlns:a16="http://schemas.microsoft.com/office/drawing/2014/main" id="{E0188A8F-14C3-B5F0-CC1C-A316A61C5FB1}"/>
-              </a:ext>
-            </a:extLst>
-          </p:cNvPr>
-          <p:cNvGraphicFramePr>
-            <a:graphicFrameLocks noGrp="1"/>
-          </p:cNvGraphicFramePr>
-          <p:nvPr>
-            <p:extLst>
-              <p:ext uri="{D42A27DB-BD31-4B8C-83A1-F6EECF244321}">
-                <p14:modId xmlns:p14="http://schemas.microsoft.com/office/powerpoint/2010/main" val="2812895720"/>
-              </p:ext>
-            </p:extLst>
-          </p:nvPr>
-        </p:nvGraphicFramePr>
-        <p:xfrm>
-          <a:off x="4518541" y="1418472"/>
-          <a:ext cx="7214616" cy="4211555"/>
-        </p:xfrm>
-        <a:graphic>
-          <a:graphicData uri="http://schemas.openxmlformats.org/drawingml/2006/table">
-            <a:tbl>
-              <a:tblPr>
-                <a:solidFill>
-                  <a:srgbClr val="F2F2F2">
-                    <a:alpha val="45098"/>
-                  </a:srgbClr>
-                </a:solidFill>
-              </a:tblPr>
-              <a:tblGrid>
-                <a:gridCol w="7214616">
-                  <a:extLst>
-                    <a:ext uri="{9D8B030D-6E8A-4147-A177-3AD203B41FA5}">
-                      <a16:colId xmlns:a16="http://schemas.microsoft.com/office/drawing/2014/main" val="2773077775"/>
-                    </a:ext>
-                  </a:extLst>
-                </a:gridCol>
-              </a:tblGrid>
-              <a:tr h="2996654">
-                <a:tc>
-                  <a:txBody>
-                    <a:bodyPr/>
-                    <a:lstStyle/>
-                    <a:p>
-                      <a:pPr fontAlgn="t">
-                        <a:lnSpc>
-                          <a:spcPts val="1500"/>
-                        </a:lnSpc>
-                        <a:buNone/>
-                      </a:pPr>
-                      <a:r>
-                        <a:rPr lang="es-ES" sz="1500" b="1" i="0" cap="none" spc="0" dirty="0">
-                          <a:solidFill>
-                            <a:schemeClr val="tx1"/>
-                          </a:solidFill>
-                          <a:effectLst/>
-                          <a:latin typeface="Segoe UI" panose="020B0502040204020203" pitchFamily="34" charset="0"/>
-                        </a:rPr>
-                        <a:t>🧮 2368 </a:t>
-                      </a:r>
-                      <a:r>
-                        <a:rPr lang="es-ES" sz="1500" b="1" i="0" cap="none" spc="0" dirty="0" err="1">
-                          <a:solidFill>
-                            <a:schemeClr val="tx1"/>
-                          </a:solidFill>
-                          <a:effectLst/>
-                          <a:latin typeface="Segoe UI" panose="020B0502040204020203" pitchFamily="34" charset="0"/>
-                        </a:rPr>
-                        <a:t>eps</a:t>
-                      </a:r>
-                      <a:r>
-                        <a:rPr lang="es-ES" sz="1500" b="1" i="0" cap="none" spc="0" dirty="0">
-                          <a:solidFill>
-                            <a:schemeClr val="tx1"/>
-                          </a:solidFill>
-                          <a:effectLst/>
-                          <a:latin typeface="Segoe UI" panose="020B0502040204020203" pitchFamily="34" charset="0"/>
-                        </a:rPr>
-                        <a:t> (</a:t>
-                      </a:r>
-                      <a:r>
-                        <a:rPr lang="es-ES" sz="1500" b="1" i="0" cap="none" spc="0" dirty="0" err="1">
-                          <a:solidFill>
-                            <a:schemeClr val="tx1"/>
-                          </a:solidFill>
-                          <a:effectLst/>
-                          <a:latin typeface="Segoe UI" panose="020B0502040204020203" pitchFamily="34" charset="0"/>
-                        </a:rPr>
-                        <a:t>Best</a:t>
-                      </a:r>
-                      <a:r>
-                        <a:rPr lang="es-ES" sz="1500" b="1" i="0" cap="none" spc="0" dirty="0">
-                          <a:solidFill>
-                            <a:schemeClr val="tx1"/>
-                          </a:solidFill>
-                          <a:effectLst/>
-                          <a:latin typeface="Segoe UI" panose="020B0502040204020203" pitchFamily="34" charset="0"/>
-                        </a:rPr>
-                        <a:t> </a:t>
-                      </a:r>
-                      <a:r>
-                        <a:rPr lang="es-ES" sz="1500" b="1" i="0" cap="none" spc="0" dirty="0" err="1">
-                          <a:solidFill>
-                            <a:schemeClr val="tx1"/>
-                          </a:solidFill>
-                          <a:effectLst/>
-                          <a:latin typeface="Segoe UI" panose="020B0502040204020203" pitchFamily="34" charset="0"/>
-                        </a:rPr>
-                        <a:t>model</a:t>
-                      </a:r>
-                      <a:r>
-                        <a:rPr lang="es-ES" sz="1500" b="1" i="0" cap="none" spc="0" dirty="0">
-                          <a:solidFill>
-                            <a:schemeClr val="tx1"/>
-                          </a:solidFill>
-                          <a:effectLst/>
-                          <a:latin typeface="Segoe UI" panose="020B0502040204020203" pitchFamily="34" charset="0"/>
-                        </a:rPr>
-                        <a:t>!) </a:t>
-                      </a:r>
-                      <a:r>
-                        <a:rPr lang="es-ES" sz="1500" b="0" i="0" cap="none" spc="0" dirty="0">
-                          <a:solidFill>
-                            <a:schemeClr val="tx1"/>
-                          </a:solidFill>
-                          <a:effectLst/>
-                          <a:latin typeface="Segoe UI" panose="020B0502040204020203" pitchFamily="34" charset="0"/>
-                        </a:rPr>
-                        <a:t>✅</a:t>
-                      </a:r>
-                      <a:r>
-                        <a:rPr lang="es-ES" sz="1500" b="1" i="0" cap="none" spc="0" dirty="0">
-                          <a:solidFill>
-                            <a:schemeClr val="tx1"/>
-                          </a:solidFill>
-                          <a:effectLst/>
-                          <a:latin typeface="Segoe UI" panose="020B0502040204020203" pitchFamily="34" charset="0"/>
-                        </a:rPr>
-                        <a:t>:</a:t>
-                      </a:r>
-                    </a:p>
-                    <a:p>
-                      <a:pPr fontAlgn="t">
-                        <a:lnSpc>
-                          <a:spcPts val="1500"/>
-                        </a:lnSpc>
-                        <a:buNone/>
-                      </a:pPr>
-                      <a:endParaRPr lang="es-ES" sz="1500" b="1" i="0" cap="none" spc="0" dirty="0">
-                        <a:solidFill>
-                          <a:schemeClr val="tx1"/>
-                        </a:solidFill>
-                        <a:effectLst/>
-                        <a:latin typeface="Segoe UI" panose="020B0502040204020203" pitchFamily="34" charset="0"/>
-                      </a:endParaRPr>
-                    </a:p>
-                    <a:p>
-                      <a:pPr fontAlgn="t">
-                        <a:lnSpc>
-                          <a:spcPts val="1500"/>
-                        </a:lnSpc>
-                        <a:buFont typeface="Arial" panose="020B0604020202020204" pitchFamily="34" charset="0"/>
-                        <a:buChar char="•"/>
-                      </a:pPr>
-                      <a:r>
-                        <a:rPr lang="es-ES" sz="1500" b="1" i="0" cap="none" spc="0" dirty="0">
-                          <a:solidFill>
-                            <a:schemeClr val="tx1"/>
-                          </a:solidFill>
-                          <a:effectLst/>
-                          <a:latin typeface="Segoe UI" panose="020B0502040204020203" pitchFamily="34" charset="0"/>
-                        </a:rPr>
-                        <a:t> </a:t>
-                      </a:r>
-                      <a:r>
-                        <a:rPr lang="es-ES" sz="1500" b="1" i="0" cap="none" spc="0" dirty="0" err="1">
-                          <a:solidFill>
-                            <a:schemeClr val="tx1"/>
-                          </a:solidFill>
-                          <a:effectLst/>
-                          <a:latin typeface="Segoe UI" panose="020B0502040204020203" pitchFamily="34" charset="0"/>
-                        </a:rPr>
-                        <a:t>Most</a:t>
-                      </a:r>
-                      <a:r>
-                        <a:rPr lang="es-ES" sz="1500" b="1" i="0" cap="none" spc="0" dirty="0">
-                          <a:solidFill>
-                            <a:schemeClr val="tx1"/>
-                          </a:solidFill>
-                          <a:effectLst/>
-                          <a:latin typeface="Segoe UI" panose="020B0502040204020203" pitchFamily="34" charset="0"/>
-                        </a:rPr>
-                        <a:t> </a:t>
-                      </a:r>
-                      <a:r>
-                        <a:rPr lang="es-ES" sz="1500" b="1" i="0" cap="none" spc="0" dirty="0" err="1">
-                          <a:solidFill>
-                            <a:schemeClr val="tx1"/>
-                          </a:solidFill>
-                          <a:effectLst/>
-                          <a:latin typeface="Segoe UI" panose="020B0502040204020203" pitchFamily="34" charset="0"/>
-                        </a:rPr>
-                        <a:t>consistent</a:t>
-                      </a:r>
-                      <a:r>
-                        <a:rPr lang="es-ES" sz="1500" b="1" i="0" cap="none" spc="0" dirty="0">
-                          <a:solidFill>
-                            <a:schemeClr val="tx1"/>
-                          </a:solidFill>
-                          <a:effectLst/>
-                          <a:latin typeface="Segoe UI" panose="020B0502040204020203" pitchFamily="34" charset="0"/>
-                        </a:rPr>
-                        <a:t>:</a:t>
-                      </a:r>
-                      <a:r>
-                        <a:rPr lang="es-ES" sz="1500" b="0" i="0" cap="none" spc="0" dirty="0">
-                          <a:solidFill>
-                            <a:schemeClr val="tx1"/>
-                          </a:solidFill>
-                          <a:effectLst/>
-                          <a:latin typeface="Segoe UI" panose="020B0502040204020203" pitchFamily="34" charset="0"/>
-                        </a:rPr>
-                        <a:t> 870 </a:t>
-                      </a:r>
-                      <a:r>
-                        <a:rPr lang="es-ES" sz="1500" b="0" i="0" cap="none" spc="0" dirty="0" err="1">
-                          <a:solidFill>
-                            <a:schemeClr val="tx1"/>
-                          </a:solidFill>
-                          <a:effectLst/>
-                          <a:latin typeface="Segoe UI" panose="020B0502040204020203" pitchFamily="34" charset="0"/>
-                        </a:rPr>
-                        <a:t>avg</a:t>
-                      </a:r>
-                      <a:r>
-                        <a:rPr lang="es-ES" sz="1500" b="0" i="0" cap="none" spc="0" dirty="0">
-                          <a:solidFill>
-                            <a:schemeClr val="tx1"/>
-                          </a:solidFill>
-                          <a:effectLst/>
-                          <a:latin typeface="Segoe UI" panose="020B0502040204020203" pitchFamily="34" charset="0"/>
-                        </a:rPr>
-                        <a:t> </a:t>
-                      </a:r>
-                      <a:r>
-                        <a:rPr lang="es-ES" sz="1500" b="0" i="0" cap="none" spc="0" dirty="0" err="1">
-                          <a:solidFill>
-                            <a:schemeClr val="tx1"/>
-                          </a:solidFill>
-                          <a:effectLst/>
-                          <a:latin typeface="Segoe UI" panose="020B0502040204020203" pitchFamily="34" charset="0"/>
-                        </a:rPr>
-                        <a:t>reward</a:t>
-                      </a:r>
-                      <a:r>
-                        <a:rPr lang="es-ES" sz="1500" b="0" i="0" cap="none" spc="0" dirty="0">
-                          <a:solidFill>
-                            <a:schemeClr val="tx1"/>
-                          </a:solidFill>
-                          <a:effectLst/>
-                          <a:latin typeface="Segoe UI" panose="020B0502040204020203" pitchFamily="34" charset="0"/>
-                        </a:rPr>
-                        <a:t>.</a:t>
-                      </a:r>
-                      <a:endParaRPr lang="es-ES" sz="1500" b="1" i="0" cap="none" spc="0" dirty="0">
-                        <a:solidFill>
-                          <a:schemeClr val="tx1"/>
-                        </a:solidFill>
-                        <a:effectLst/>
-                        <a:latin typeface="Segoe UI" panose="020B0502040204020203" pitchFamily="34" charset="0"/>
-                      </a:endParaRPr>
-                    </a:p>
-                    <a:p>
-                      <a:pPr fontAlgn="t">
-                        <a:lnSpc>
-                          <a:spcPts val="1500"/>
-                        </a:lnSpc>
-                        <a:buFont typeface="Arial" panose="020B0604020202020204" pitchFamily="34" charset="0"/>
-                        <a:buChar char="•"/>
-                      </a:pPr>
-                      <a:r>
-                        <a:rPr lang="es-ES" sz="1500" b="1" i="0" cap="none" spc="0" dirty="0">
-                          <a:solidFill>
-                            <a:schemeClr val="tx1"/>
-                          </a:solidFill>
-                          <a:effectLst/>
-                          <a:latin typeface="Segoe UI" panose="020B0502040204020203" pitchFamily="34" charset="0"/>
-                        </a:rPr>
-                        <a:t> 42/50 </a:t>
-                      </a:r>
-                      <a:r>
-                        <a:rPr lang="es-ES" sz="1500" b="1" i="0" cap="none" spc="0" dirty="0" err="1">
-                          <a:solidFill>
-                            <a:schemeClr val="tx1"/>
-                          </a:solidFill>
-                          <a:effectLst/>
-                          <a:latin typeface="Segoe UI" panose="020B0502040204020203" pitchFamily="34" charset="0"/>
-                        </a:rPr>
-                        <a:t>eps</a:t>
-                      </a:r>
-                      <a:r>
-                        <a:rPr lang="es-ES" sz="1500" b="1" i="0" cap="none" spc="0" dirty="0">
-                          <a:solidFill>
-                            <a:schemeClr val="tx1"/>
-                          </a:solidFill>
-                          <a:effectLst/>
-                          <a:latin typeface="Segoe UI" panose="020B0502040204020203" pitchFamily="34" charset="0"/>
-                        </a:rPr>
-                        <a:t> </a:t>
-                      </a:r>
-                      <a:r>
-                        <a:rPr lang="es-ES" sz="1500" b="1" i="0" cap="none" spc="0" dirty="0" err="1">
-                          <a:solidFill>
-                            <a:schemeClr val="tx1"/>
-                          </a:solidFill>
-                          <a:effectLst/>
-                          <a:latin typeface="Segoe UI" panose="020B0502040204020203" pitchFamily="34" charset="0"/>
-                        </a:rPr>
-                        <a:t>scored</a:t>
-                      </a:r>
-                      <a:r>
-                        <a:rPr lang="es-ES" sz="1500" b="1" i="0" cap="none" spc="0" dirty="0">
-                          <a:solidFill>
-                            <a:schemeClr val="tx1"/>
-                          </a:solidFill>
-                          <a:effectLst/>
-                          <a:latin typeface="Segoe UI" panose="020B0502040204020203" pitchFamily="34" charset="0"/>
-                        </a:rPr>
-                        <a:t> &gt; 850:</a:t>
-                      </a:r>
-                      <a:r>
-                        <a:rPr lang="es-ES" sz="1500" b="0" i="0" cap="none" spc="0" dirty="0">
-                          <a:solidFill>
-                            <a:schemeClr val="tx1"/>
-                          </a:solidFill>
-                          <a:effectLst/>
-                          <a:latin typeface="Segoe UI" panose="020B0502040204020203" pitchFamily="34" charset="0"/>
-                        </a:rPr>
-                        <a:t> </a:t>
-                      </a:r>
-                      <a:r>
-                        <a:rPr lang="es-ES" sz="1500" b="0" i="0" cap="none" spc="0" dirty="0" err="1">
-                          <a:solidFill>
-                            <a:schemeClr val="tx1"/>
-                          </a:solidFill>
-                          <a:effectLst/>
-                          <a:latin typeface="Segoe UI" panose="020B0502040204020203" pitchFamily="34" charset="0"/>
-                        </a:rPr>
-                        <a:t>Strong</a:t>
-                      </a:r>
-                      <a:r>
-                        <a:rPr lang="es-ES" sz="1500" b="0" i="0" cap="none" spc="0" dirty="0">
-                          <a:solidFill>
-                            <a:schemeClr val="tx1"/>
-                          </a:solidFill>
-                          <a:effectLst/>
-                          <a:latin typeface="Segoe UI" panose="020B0502040204020203" pitchFamily="34" charset="0"/>
-                        </a:rPr>
-                        <a:t> </a:t>
-                      </a:r>
-                      <a:r>
-                        <a:rPr lang="es-ES" sz="1500" b="0" i="0" cap="none" spc="0" dirty="0" err="1">
-                          <a:solidFill>
-                            <a:schemeClr val="tx1"/>
-                          </a:solidFill>
-                          <a:effectLst/>
-                          <a:latin typeface="Segoe UI" panose="020B0502040204020203" pitchFamily="34" charset="0"/>
-                        </a:rPr>
-                        <a:t>policy</a:t>
-                      </a:r>
-                      <a:r>
-                        <a:rPr lang="es-ES" sz="1500" b="0" i="0" cap="none" spc="0" dirty="0">
-                          <a:solidFill>
-                            <a:schemeClr val="tx1"/>
-                          </a:solidFill>
-                          <a:effectLst/>
-                          <a:latin typeface="Segoe UI" panose="020B0502040204020203" pitchFamily="34" charset="0"/>
-                        </a:rPr>
-                        <a:t> </a:t>
-                      </a:r>
-                      <a:r>
-                        <a:rPr lang="es-ES" sz="1500" b="0" i="0" cap="none" spc="0" dirty="0" err="1">
-                          <a:solidFill>
-                            <a:schemeClr val="tx1"/>
-                          </a:solidFill>
-                          <a:effectLst/>
-                          <a:latin typeface="Segoe UI" panose="020B0502040204020203" pitchFamily="34" charset="0"/>
-                        </a:rPr>
-                        <a:t>learning</a:t>
-                      </a:r>
-                      <a:r>
-                        <a:rPr lang="es-ES" sz="1500" b="0" i="0" cap="none" spc="0" dirty="0">
-                          <a:solidFill>
-                            <a:schemeClr val="tx1"/>
-                          </a:solidFill>
-                          <a:effectLst/>
-                          <a:latin typeface="Segoe UI" panose="020B0502040204020203" pitchFamily="34" charset="0"/>
-                        </a:rPr>
-                        <a:t>.</a:t>
-                      </a:r>
-                      <a:endParaRPr lang="es-ES" sz="1500" b="1" i="0" cap="none" spc="0" dirty="0">
-                        <a:solidFill>
-                          <a:schemeClr val="tx1"/>
-                        </a:solidFill>
-                        <a:effectLst/>
-                        <a:latin typeface="Segoe UI" panose="020B0502040204020203" pitchFamily="34" charset="0"/>
-                      </a:endParaRPr>
-                    </a:p>
-                    <a:p>
-                      <a:pPr fontAlgn="t">
-                        <a:lnSpc>
-                          <a:spcPts val="1500"/>
-                        </a:lnSpc>
-                        <a:buFont typeface="Arial" panose="020B0604020202020204" pitchFamily="34" charset="0"/>
-                        <a:buChar char="•"/>
-                      </a:pPr>
-                      <a:r>
-                        <a:rPr lang="es-ES" sz="1500" b="1" i="0" cap="none" spc="0" dirty="0">
-                          <a:solidFill>
-                            <a:schemeClr val="tx1"/>
-                          </a:solidFill>
-                          <a:effectLst/>
-                          <a:latin typeface="Segoe UI" panose="020B0502040204020203" pitchFamily="34" charset="0"/>
-                        </a:rPr>
-                        <a:t> </a:t>
-                      </a:r>
-                      <a:r>
-                        <a:rPr lang="es-ES" sz="1500" b="1" i="0" cap="none" spc="0" dirty="0" err="1">
-                          <a:solidFill>
-                            <a:schemeClr val="tx1"/>
-                          </a:solidFill>
-                          <a:effectLst/>
-                          <a:latin typeface="Segoe UI" panose="020B0502040204020203" pitchFamily="34" charset="0"/>
-                        </a:rPr>
-                        <a:t>Peak</a:t>
-                      </a:r>
-                      <a:r>
-                        <a:rPr lang="es-ES" sz="1500" b="1" i="0" cap="none" spc="0" dirty="0">
-                          <a:solidFill>
-                            <a:schemeClr val="tx1"/>
-                          </a:solidFill>
-                          <a:effectLst/>
-                          <a:latin typeface="Segoe UI" panose="020B0502040204020203" pitchFamily="34" charset="0"/>
-                        </a:rPr>
-                        <a:t> performance: </a:t>
-                      </a:r>
-                      <a:r>
-                        <a:rPr lang="es-ES" sz="1500" b="0" i="0" cap="none" spc="0" dirty="0">
-                          <a:solidFill>
-                            <a:schemeClr val="tx1"/>
-                          </a:solidFill>
-                          <a:effectLst/>
-                          <a:latin typeface="Segoe UI" panose="020B0502040204020203" pitchFamily="34" charset="0"/>
-                        </a:rPr>
-                        <a:t>928.5 </a:t>
-                      </a:r>
-                      <a:r>
-                        <a:rPr lang="es-ES" sz="1500" b="0" i="0" cap="none" spc="0" dirty="0" err="1">
-                          <a:solidFill>
-                            <a:schemeClr val="tx1"/>
-                          </a:solidFill>
-                          <a:effectLst/>
-                          <a:latin typeface="Segoe UI" panose="020B0502040204020203" pitchFamily="34" charset="0"/>
-                        </a:rPr>
-                        <a:t>reward</a:t>
-                      </a:r>
-                      <a:endParaRPr lang="es-ES" sz="1500" b="0" i="0" cap="none" spc="0" dirty="0">
-                        <a:solidFill>
-                          <a:schemeClr val="tx1"/>
-                        </a:solidFill>
-                        <a:effectLst/>
-                        <a:latin typeface="Segoe UI" panose="020B0502040204020203" pitchFamily="34" charset="0"/>
-                      </a:endParaRPr>
-                    </a:p>
-                    <a:p>
-                      <a:pPr fontAlgn="t">
-                        <a:lnSpc>
-                          <a:spcPts val="1500"/>
-                        </a:lnSpc>
-                        <a:buNone/>
-                      </a:pPr>
-                      <a:endParaRPr lang="es-ES" sz="1500" b="0" i="0" cap="none" spc="0" dirty="0">
-                        <a:solidFill>
-                          <a:schemeClr val="tx1"/>
-                        </a:solidFill>
-                        <a:effectLst/>
-                        <a:latin typeface="Segoe UI" panose="020B0502040204020203" pitchFamily="34" charset="0"/>
-                      </a:endParaRPr>
-                    </a:p>
-                    <a:p>
-                      <a:pPr fontAlgn="t">
-                        <a:lnSpc>
-                          <a:spcPts val="1500"/>
-                        </a:lnSpc>
-                        <a:buNone/>
-                      </a:pPr>
-                      <a:endParaRPr lang="es-ES" sz="1500" b="0" i="0" cap="none" spc="0" dirty="0">
-                        <a:solidFill>
-                          <a:schemeClr val="tx1"/>
-                        </a:solidFill>
-                        <a:effectLst/>
-                        <a:latin typeface="Segoe UI" panose="020B0502040204020203" pitchFamily="34" charset="0"/>
-                      </a:endParaRPr>
-                    </a:p>
-                    <a:p>
-                      <a:pPr fontAlgn="t">
-                        <a:lnSpc>
-                          <a:spcPts val="1500"/>
-                        </a:lnSpc>
-                        <a:buNone/>
-                      </a:pPr>
-                      <a:r>
-                        <a:rPr lang="es-ES" sz="1500" b="1" i="0" cap="none" spc="0" dirty="0">
-                          <a:solidFill>
-                            <a:schemeClr val="tx1"/>
-                          </a:solidFill>
-                          <a:effectLst/>
-                          <a:latin typeface="Segoe UI" panose="020B0502040204020203" pitchFamily="34" charset="0"/>
-                        </a:rPr>
-                        <a:t>🧮 4600 </a:t>
-                      </a:r>
-                      <a:r>
-                        <a:rPr lang="es-ES" sz="1500" b="1" i="0" cap="none" spc="0" dirty="0" err="1">
-                          <a:solidFill>
-                            <a:schemeClr val="tx1"/>
-                          </a:solidFill>
-                          <a:effectLst/>
-                          <a:latin typeface="Segoe UI" panose="020B0502040204020203" pitchFamily="34" charset="0"/>
-                        </a:rPr>
-                        <a:t>eps</a:t>
-                      </a:r>
-                      <a:r>
-                        <a:rPr lang="es-ES" sz="1500" b="1" i="0" cap="none" spc="0" dirty="0">
-                          <a:solidFill>
-                            <a:schemeClr val="tx1"/>
-                          </a:solidFill>
-                          <a:effectLst/>
-                          <a:latin typeface="Segoe UI" panose="020B0502040204020203" pitchFamily="34" charset="0"/>
-                        </a:rPr>
-                        <a:t>:</a:t>
-                      </a:r>
-                    </a:p>
-                    <a:p>
-                      <a:pPr fontAlgn="t">
-                        <a:lnSpc>
-                          <a:spcPts val="1500"/>
-                        </a:lnSpc>
-                        <a:buNone/>
-                      </a:pPr>
-                      <a:endParaRPr lang="es-ES" sz="1500" b="0" i="0" cap="none" spc="0" dirty="0">
-                        <a:solidFill>
-                          <a:schemeClr val="tx1"/>
-                        </a:solidFill>
-                        <a:effectLst/>
-                        <a:latin typeface="Segoe UI" panose="020B0502040204020203" pitchFamily="34" charset="0"/>
-                      </a:endParaRPr>
-                    </a:p>
-                    <a:p>
-                      <a:pPr fontAlgn="t">
-                        <a:lnSpc>
-                          <a:spcPts val="1500"/>
-                        </a:lnSpc>
-                        <a:buFont typeface="Arial" panose="020B0604020202020204" pitchFamily="34" charset="0"/>
-                        <a:buChar char="•"/>
-                      </a:pPr>
-                      <a:r>
-                        <a:rPr lang="es-ES" sz="1500" b="1" i="0" cap="none" spc="0" dirty="0">
-                          <a:solidFill>
-                            <a:schemeClr val="tx1"/>
-                          </a:solidFill>
-                          <a:effectLst/>
-                          <a:latin typeface="Segoe UI" panose="020B0502040204020203" pitchFamily="34" charset="0"/>
-                        </a:rPr>
-                        <a:t> 2nd </a:t>
-                      </a:r>
-                      <a:r>
-                        <a:rPr lang="es-ES" sz="1500" b="1" i="0" cap="none" spc="0" dirty="0" err="1">
-                          <a:solidFill>
-                            <a:schemeClr val="tx1"/>
-                          </a:solidFill>
-                          <a:effectLst/>
-                          <a:latin typeface="Segoe UI" panose="020B0502040204020203" pitchFamily="34" charset="0"/>
-                        </a:rPr>
-                        <a:t>most</a:t>
-                      </a:r>
-                      <a:r>
-                        <a:rPr lang="es-ES" sz="1500" b="1" i="0" cap="none" spc="0" dirty="0">
-                          <a:solidFill>
-                            <a:schemeClr val="tx1"/>
-                          </a:solidFill>
-                          <a:effectLst/>
-                          <a:latin typeface="Segoe UI" panose="020B0502040204020203" pitchFamily="34" charset="0"/>
-                        </a:rPr>
-                        <a:t> </a:t>
-                      </a:r>
-                      <a:r>
-                        <a:rPr lang="es-ES" sz="1500" b="1" i="0" cap="none" spc="0" dirty="0" err="1">
-                          <a:solidFill>
-                            <a:schemeClr val="tx1"/>
-                          </a:solidFill>
-                          <a:effectLst/>
-                          <a:latin typeface="Segoe UI" panose="020B0502040204020203" pitchFamily="34" charset="0"/>
-                        </a:rPr>
-                        <a:t>consistent</a:t>
-                      </a:r>
-                      <a:r>
-                        <a:rPr lang="es-ES" sz="1500" b="1" i="0" cap="none" spc="0" dirty="0">
-                          <a:solidFill>
-                            <a:schemeClr val="tx1"/>
-                          </a:solidFill>
-                          <a:effectLst/>
-                          <a:latin typeface="Segoe UI" panose="020B0502040204020203" pitchFamily="34" charset="0"/>
-                        </a:rPr>
-                        <a:t>:</a:t>
-                      </a:r>
-                      <a:r>
-                        <a:rPr lang="es-ES" sz="1500" b="0" i="0" cap="none" spc="0" dirty="0">
-                          <a:solidFill>
-                            <a:schemeClr val="tx1"/>
-                          </a:solidFill>
-                          <a:effectLst/>
-                          <a:latin typeface="Segoe UI" panose="020B0502040204020203" pitchFamily="34" charset="0"/>
-                        </a:rPr>
-                        <a:t> 842.03 </a:t>
-                      </a:r>
-                      <a:r>
-                        <a:rPr lang="es-ES" sz="1500" b="0" i="0" cap="none" spc="0" dirty="0" err="1">
-                          <a:solidFill>
-                            <a:schemeClr val="tx1"/>
-                          </a:solidFill>
-                          <a:effectLst/>
-                          <a:latin typeface="Segoe UI" panose="020B0502040204020203" pitchFamily="34" charset="0"/>
-                        </a:rPr>
-                        <a:t>avg</a:t>
-                      </a:r>
-                      <a:r>
-                        <a:rPr lang="es-ES" sz="1500" b="0" i="0" cap="none" spc="0" dirty="0">
-                          <a:solidFill>
-                            <a:schemeClr val="tx1"/>
-                          </a:solidFill>
-                          <a:effectLst/>
-                          <a:latin typeface="Segoe UI" panose="020B0502040204020203" pitchFamily="34" charset="0"/>
-                        </a:rPr>
-                        <a:t> </a:t>
-                      </a:r>
-                      <a:r>
-                        <a:rPr lang="es-ES" sz="1500" b="0" i="0" cap="none" spc="0" dirty="0" err="1">
-                          <a:solidFill>
-                            <a:schemeClr val="tx1"/>
-                          </a:solidFill>
-                          <a:effectLst/>
-                          <a:latin typeface="Segoe UI" panose="020B0502040204020203" pitchFamily="34" charset="0"/>
-                        </a:rPr>
-                        <a:t>reward</a:t>
-                      </a:r>
-                      <a:r>
-                        <a:rPr lang="es-ES" sz="1500" b="0" i="0" cap="none" spc="0" dirty="0">
-                          <a:solidFill>
-                            <a:schemeClr val="tx1"/>
-                          </a:solidFill>
-                          <a:effectLst/>
-                          <a:latin typeface="Segoe UI" panose="020B0502040204020203" pitchFamily="34" charset="0"/>
-                        </a:rPr>
-                        <a:t>.</a:t>
-                      </a:r>
-                      <a:endParaRPr lang="es-ES" sz="1500" b="1" i="0" cap="none" spc="0" dirty="0">
-                        <a:solidFill>
-                          <a:schemeClr val="tx1"/>
-                        </a:solidFill>
-                        <a:effectLst/>
-                        <a:latin typeface="Segoe UI" panose="020B0502040204020203" pitchFamily="34" charset="0"/>
-                      </a:endParaRPr>
-                    </a:p>
-                    <a:p>
-                      <a:pPr fontAlgn="t">
-                        <a:lnSpc>
-                          <a:spcPts val="1500"/>
-                        </a:lnSpc>
-                        <a:buFont typeface="Arial" panose="020B0604020202020204" pitchFamily="34" charset="0"/>
-                        <a:buChar char="•"/>
-                      </a:pPr>
-                      <a:r>
-                        <a:rPr lang="es-ES" sz="1500" b="1" i="0" cap="none" spc="0" dirty="0">
-                          <a:solidFill>
-                            <a:schemeClr val="tx1"/>
-                          </a:solidFill>
-                          <a:effectLst/>
-                          <a:latin typeface="Segoe UI" panose="020B0502040204020203" pitchFamily="34" charset="0"/>
-                        </a:rPr>
-                        <a:t> 35/50 </a:t>
-                      </a:r>
-                      <a:r>
-                        <a:rPr lang="es-ES" sz="1500" b="1" i="0" cap="none" spc="0" dirty="0" err="1">
-                          <a:solidFill>
-                            <a:schemeClr val="tx1"/>
-                          </a:solidFill>
-                          <a:effectLst/>
-                          <a:latin typeface="Segoe UI" panose="020B0502040204020203" pitchFamily="34" charset="0"/>
-                        </a:rPr>
-                        <a:t>eps</a:t>
-                      </a:r>
-                      <a:r>
-                        <a:rPr lang="es-ES" sz="1500" b="1" i="0" cap="none" spc="0" dirty="0">
-                          <a:solidFill>
-                            <a:schemeClr val="tx1"/>
-                          </a:solidFill>
-                          <a:effectLst/>
-                          <a:latin typeface="Segoe UI" panose="020B0502040204020203" pitchFamily="34" charset="0"/>
-                        </a:rPr>
-                        <a:t> </a:t>
-                      </a:r>
-                      <a:r>
-                        <a:rPr lang="es-ES" sz="1500" b="1" i="0" cap="none" spc="0" dirty="0" err="1">
-                          <a:solidFill>
-                            <a:schemeClr val="tx1"/>
-                          </a:solidFill>
-                          <a:effectLst/>
-                          <a:latin typeface="Segoe UI" panose="020B0502040204020203" pitchFamily="34" charset="0"/>
-                        </a:rPr>
-                        <a:t>scored</a:t>
-                      </a:r>
-                      <a:r>
-                        <a:rPr lang="es-ES" sz="1500" b="1" i="0" cap="none" spc="0" dirty="0">
-                          <a:solidFill>
-                            <a:schemeClr val="tx1"/>
-                          </a:solidFill>
-                          <a:effectLst/>
-                          <a:latin typeface="Segoe UI" panose="020B0502040204020203" pitchFamily="34" charset="0"/>
-                        </a:rPr>
-                        <a:t> &gt; 850</a:t>
-                      </a:r>
-                    </a:p>
-                    <a:p>
-                      <a:pPr fontAlgn="t">
-                        <a:lnSpc>
-                          <a:spcPts val="1500"/>
-                        </a:lnSpc>
-                        <a:buFont typeface="Arial" panose="020B0604020202020204" pitchFamily="34" charset="0"/>
-                        <a:buChar char="•"/>
-                      </a:pPr>
-                      <a:r>
-                        <a:rPr lang="es-ES" sz="1500" b="1" i="0" cap="none" spc="0" dirty="0">
-                          <a:solidFill>
-                            <a:schemeClr val="tx1"/>
-                          </a:solidFill>
-                          <a:effectLst/>
-                          <a:latin typeface="Segoe UI" panose="020B0502040204020203" pitchFamily="34" charset="0"/>
-                        </a:rPr>
-                        <a:t> </a:t>
-                      </a:r>
-                      <a:r>
-                        <a:rPr lang="es-ES" sz="1500" b="1" i="0" cap="none" spc="0" dirty="0" err="1">
-                          <a:solidFill>
-                            <a:schemeClr val="tx1"/>
-                          </a:solidFill>
-                          <a:effectLst/>
-                          <a:latin typeface="Segoe UI" panose="020B0502040204020203" pitchFamily="34" charset="0"/>
-                        </a:rPr>
-                        <a:t>Peak</a:t>
-                      </a:r>
-                      <a:r>
-                        <a:rPr lang="es-ES" sz="1500" b="1" i="0" cap="none" spc="0" dirty="0">
-                          <a:solidFill>
-                            <a:schemeClr val="tx1"/>
-                          </a:solidFill>
-                          <a:effectLst/>
-                          <a:latin typeface="Segoe UI" panose="020B0502040204020203" pitchFamily="34" charset="0"/>
-                        </a:rPr>
-                        <a:t> performance: </a:t>
-                      </a:r>
-                      <a:r>
-                        <a:rPr lang="es-ES" sz="1500" b="0" i="0" cap="none" spc="0" dirty="0">
-                          <a:solidFill>
-                            <a:schemeClr val="tx1"/>
-                          </a:solidFill>
-                          <a:effectLst/>
-                          <a:latin typeface="Segoe UI" panose="020B0502040204020203" pitchFamily="34" charset="0"/>
-                        </a:rPr>
-                        <a:t>929.5 </a:t>
-                      </a:r>
-                      <a:r>
-                        <a:rPr lang="es-ES" sz="1500" b="0" i="0" cap="none" spc="0" dirty="0" err="1">
-                          <a:solidFill>
-                            <a:schemeClr val="tx1"/>
-                          </a:solidFill>
-                          <a:effectLst/>
-                          <a:latin typeface="Segoe UI" panose="020B0502040204020203" pitchFamily="34" charset="0"/>
-                        </a:rPr>
-                        <a:t>reward</a:t>
-                      </a:r>
-                      <a:endParaRPr lang="es-ES" sz="1500" b="0" i="0" cap="none" spc="0" dirty="0">
-                        <a:solidFill>
-                          <a:schemeClr val="tx1"/>
-                        </a:solidFill>
-                        <a:effectLst/>
-                        <a:latin typeface="Segoe UI" panose="020B0502040204020203" pitchFamily="34" charset="0"/>
-                      </a:endParaRPr>
-                    </a:p>
-                    <a:p>
-                      <a:pPr fontAlgn="t">
-                        <a:lnSpc>
-                          <a:spcPts val="1500"/>
-                        </a:lnSpc>
-                        <a:buFont typeface="Arial" panose="020B0604020202020204" pitchFamily="34" charset="0"/>
-                        <a:buChar char="•"/>
-                      </a:pPr>
-                      <a:endParaRPr lang="es-ES" sz="1500" b="0" i="0" cap="none" spc="0" dirty="0">
-                        <a:solidFill>
-                          <a:schemeClr val="tx1"/>
-                        </a:solidFill>
-                        <a:effectLst/>
-                        <a:latin typeface="Segoe UI" panose="020B0502040204020203" pitchFamily="34" charset="0"/>
-                      </a:endParaRPr>
-                    </a:p>
-                    <a:p>
-                      <a:pPr fontAlgn="t">
-                        <a:lnSpc>
-                          <a:spcPts val="1500"/>
-                        </a:lnSpc>
-                        <a:buFont typeface="Arial" panose="020B0604020202020204" pitchFamily="34" charset="0"/>
-                        <a:buChar char="•"/>
-                      </a:pPr>
-                      <a:endParaRPr lang="es-ES" sz="1500" b="0" i="0" cap="none" spc="0" dirty="0">
-                        <a:solidFill>
-                          <a:schemeClr val="tx1"/>
-                        </a:solidFill>
-                        <a:effectLst/>
-                        <a:latin typeface="Segoe UI" panose="020B0502040204020203" pitchFamily="34" charset="0"/>
-                      </a:endParaRPr>
-                    </a:p>
-                    <a:p>
-                      <a:pPr marL="0" marR="0" lvl="0" indent="0" algn="l" defTabSz="914400" rtl="0" eaLnBrk="1" fontAlgn="t" latinLnBrk="0" hangingPunct="1">
-                        <a:lnSpc>
-                          <a:spcPts val="1500"/>
-                        </a:lnSpc>
-                        <a:spcBef>
-                          <a:spcPts val="0"/>
-                        </a:spcBef>
-                        <a:spcAft>
-                          <a:spcPts val="0"/>
-                        </a:spcAft>
-                        <a:buClrTx/>
-                        <a:buSzTx/>
-                        <a:buFont typeface="Arial" panose="020B0604020202020204" pitchFamily="34" charset="0"/>
-                        <a:buNone/>
-                        <a:tabLst/>
-                        <a:defRPr/>
-                      </a:pPr>
-                      <a:r>
-                        <a:rPr lang="es-ES" sz="1500" b="1" i="0" cap="none" spc="0" dirty="0">
-                          <a:solidFill>
-                            <a:schemeClr val="tx1"/>
-                          </a:solidFill>
-                          <a:effectLst/>
-                          <a:latin typeface="Segoe UI" panose="020B0502040204020203" pitchFamily="34" charset="0"/>
-                        </a:rPr>
-                        <a:t>🧮 15695 </a:t>
-                      </a:r>
-                      <a:r>
-                        <a:rPr lang="es-ES" sz="1500" b="1" i="0" cap="none" spc="0" dirty="0" err="1">
-                          <a:solidFill>
-                            <a:schemeClr val="tx1"/>
-                          </a:solidFill>
-                          <a:effectLst/>
-                          <a:latin typeface="Segoe UI" panose="020B0502040204020203" pitchFamily="34" charset="0"/>
-                        </a:rPr>
-                        <a:t>eps</a:t>
-                      </a:r>
-                      <a:r>
-                        <a:rPr lang="es-ES" sz="1500" b="1" i="0" cap="none" spc="0" dirty="0">
-                          <a:solidFill>
-                            <a:schemeClr val="tx1"/>
-                          </a:solidFill>
-                          <a:effectLst/>
-                          <a:latin typeface="Segoe UI" panose="020B0502040204020203" pitchFamily="34" charset="0"/>
-                        </a:rPr>
-                        <a:t> (</a:t>
-                      </a:r>
-                      <a:r>
-                        <a:rPr lang="en-US" sz="1500" b="1" i="0" cap="none" spc="0" dirty="0">
-                          <a:solidFill>
-                            <a:schemeClr val="tx1"/>
-                          </a:solidFill>
-                          <a:effectLst/>
-                          <a:latin typeface="Segoe UI" panose="020B0502040204020203" pitchFamily="34" charset="0"/>
-                        </a:rPr>
-                        <a:t>BATCH_SIZE=1024, TAU=0.01, EPSILON_DECAY=0.9995)</a:t>
-                      </a:r>
-                      <a:endParaRPr lang="es-ES" sz="1500" b="1" i="0" cap="none" spc="0" dirty="0">
-                        <a:solidFill>
-                          <a:schemeClr val="tx1"/>
-                        </a:solidFill>
-                        <a:effectLst/>
-                        <a:latin typeface="Segoe UI" panose="020B0502040204020203" pitchFamily="34" charset="0"/>
-                      </a:endParaRPr>
-                    </a:p>
-                    <a:p>
-                      <a:pPr marL="0" marR="0" lvl="0" indent="0" algn="l" defTabSz="914400" rtl="0" eaLnBrk="1" fontAlgn="t" latinLnBrk="0" hangingPunct="1">
-                        <a:lnSpc>
-                          <a:spcPts val="1500"/>
-                        </a:lnSpc>
-                        <a:spcBef>
-                          <a:spcPts val="0"/>
-                        </a:spcBef>
-                        <a:spcAft>
-                          <a:spcPts val="0"/>
-                        </a:spcAft>
-                        <a:buClrTx/>
-                        <a:buSzTx/>
-                        <a:buFont typeface="Arial" panose="020B0604020202020204" pitchFamily="34" charset="0"/>
-                        <a:buNone/>
-                        <a:tabLst/>
-                        <a:defRPr/>
-                      </a:pPr>
-                      <a:endParaRPr lang="es-ES" sz="1500" b="0" i="0" cap="none" spc="0" dirty="0">
-                        <a:solidFill>
-                          <a:schemeClr val="tx1"/>
-                        </a:solidFill>
-                        <a:effectLst/>
-                        <a:latin typeface="Segoe UI" panose="020B0502040204020203" pitchFamily="34" charset="0"/>
-                      </a:endParaRPr>
-                    </a:p>
-                    <a:p>
-                      <a:pPr fontAlgn="t">
-                        <a:lnSpc>
-                          <a:spcPts val="1500"/>
-                        </a:lnSpc>
-                        <a:buFont typeface="Arial" panose="020B0604020202020204" pitchFamily="34" charset="0"/>
-                        <a:buChar char="•"/>
-                      </a:pPr>
-                      <a:r>
-                        <a:rPr lang="es-ES" sz="1500" b="0" i="0" cap="none" spc="0" dirty="0">
-                          <a:solidFill>
-                            <a:schemeClr val="tx1"/>
-                          </a:solidFill>
-                          <a:effectLst/>
-                          <a:latin typeface="Segoe UI" panose="020B0502040204020203" pitchFamily="34" charset="0"/>
-                        </a:rPr>
-                        <a:t> 829.80 </a:t>
-                      </a:r>
-                      <a:r>
-                        <a:rPr lang="es-ES" sz="1500" b="0" i="0" cap="none" spc="0" dirty="0" err="1">
-                          <a:solidFill>
-                            <a:schemeClr val="tx1"/>
-                          </a:solidFill>
-                          <a:effectLst/>
-                          <a:latin typeface="Segoe UI" panose="020B0502040204020203" pitchFamily="34" charset="0"/>
-                        </a:rPr>
-                        <a:t>avg</a:t>
-                      </a:r>
-                      <a:r>
-                        <a:rPr lang="es-ES" sz="1500" b="0" i="0" cap="none" spc="0" dirty="0">
-                          <a:solidFill>
-                            <a:schemeClr val="tx1"/>
-                          </a:solidFill>
-                          <a:effectLst/>
-                          <a:latin typeface="Segoe UI" panose="020B0502040204020203" pitchFamily="34" charset="0"/>
-                        </a:rPr>
-                        <a:t> </a:t>
-                      </a:r>
-                      <a:r>
-                        <a:rPr lang="es-ES" sz="1500" b="0" i="0" cap="none" spc="0" dirty="0" err="1">
-                          <a:solidFill>
-                            <a:schemeClr val="tx1"/>
-                          </a:solidFill>
-                          <a:effectLst/>
-                          <a:latin typeface="Segoe UI" panose="020B0502040204020203" pitchFamily="34" charset="0"/>
-                        </a:rPr>
-                        <a:t>reward</a:t>
-                      </a:r>
-                      <a:r>
-                        <a:rPr lang="es-ES" sz="1500" b="0" i="0" cap="none" spc="0" dirty="0">
-                          <a:solidFill>
-                            <a:schemeClr val="tx1"/>
-                          </a:solidFill>
-                          <a:effectLst/>
-                          <a:latin typeface="Segoe UI" panose="020B0502040204020203" pitchFamily="34" charset="0"/>
-                        </a:rPr>
-                        <a:t>.</a:t>
-                      </a:r>
-                      <a:endParaRPr lang="es-ES" sz="1500" b="1" i="0" cap="none" spc="0" dirty="0">
-                        <a:solidFill>
-                          <a:schemeClr val="tx1"/>
-                        </a:solidFill>
-                        <a:effectLst/>
-                        <a:latin typeface="Segoe UI" panose="020B0502040204020203" pitchFamily="34" charset="0"/>
-                      </a:endParaRPr>
-                    </a:p>
-                    <a:p>
-                      <a:pPr fontAlgn="t">
-                        <a:lnSpc>
-                          <a:spcPts val="1500"/>
-                        </a:lnSpc>
-                        <a:buFont typeface="Arial" panose="020B0604020202020204" pitchFamily="34" charset="0"/>
-                        <a:buChar char="•"/>
-                      </a:pPr>
-                      <a:r>
-                        <a:rPr lang="es-ES" sz="1500" b="1" i="0" cap="none" spc="0" dirty="0">
-                          <a:solidFill>
-                            <a:schemeClr val="tx1"/>
-                          </a:solidFill>
-                          <a:effectLst/>
-                          <a:latin typeface="Segoe UI" panose="020B0502040204020203" pitchFamily="34" charset="0"/>
-                        </a:rPr>
-                        <a:t> 35/50 </a:t>
-                      </a:r>
-                      <a:r>
-                        <a:rPr lang="es-ES" sz="1500" b="1" i="0" cap="none" spc="0" dirty="0" err="1">
-                          <a:solidFill>
-                            <a:schemeClr val="tx1"/>
-                          </a:solidFill>
-                          <a:effectLst/>
-                          <a:latin typeface="Segoe UI" panose="020B0502040204020203" pitchFamily="34" charset="0"/>
-                        </a:rPr>
-                        <a:t>eps</a:t>
-                      </a:r>
-                      <a:r>
-                        <a:rPr lang="es-ES" sz="1500" b="1" i="0" cap="none" spc="0" dirty="0">
-                          <a:solidFill>
-                            <a:schemeClr val="tx1"/>
-                          </a:solidFill>
-                          <a:effectLst/>
-                          <a:latin typeface="Segoe UI" panose="020B0502040204020203" pitchFamily="34" charset="0"/>
-                        </a:rPr>
-                        <a:t> </a:t>
-                      </a:r>
-                      <a:r>
-                        <a:rPr lang="es-ES" sz="1500" b="1" i="0" cap="none" spc="0" dirty="0" err="1">
-                          <a:solidFill>
-                            <a:schemeClr val="tx1"/>
-                          </a:solidFill>
-                          <a:effectLst/>
-                          <a:latin typeface="Segoe UI" panose="020B0502040204020203" pitchFamily="34" charset="0"/>
-                        </a:rPr>
-                        <a:t>scored</a:t>
-                      </a:r>
-                      <a:r>
-                        <a:rPr lang="es-ES" sz="1500" b="1" i="0" cap="none" spc="0" dirty="0">
-                          <a:solidFill>
-                            <a:schemeClr val="tx1"/>
-                          </a:solidFill>
-                          <a:effectLst/>
-                          <a:latin typeface="Segoe UI" panose="020B0502040204020203" pitchFamily="34" charset="0"/>
-                        </a:rPr>
-                        <a:t> &gt; 850:</a:t>
-                      </a:r>
-                      <a:r>
-                        <a:rPr lang="es-ES" sz="1500" b="0" i="0" cap="none" spc="0" dirty="0">
-                          <a:solidFill>
-                            <a:schemeClr val="tx1"/>
-                          </a:solidFill>
-                          <a:effectLst/>
-                          <a:latin typeface="Segoe UI" panose="020B0502040204020203" pitchFamily="34" charset="0"/>
-                        </a:rPr>
-                        <a:t> </a:t>
-                      </a:r>
-                      <a:r>
-                        <a:rPr lang="es-ES" sz="1500" b="0" i="0" cap="none" spc="0" dirty="0" err="1">
-                          <a:solidFill>
-                            <a:schemeClr val="tx1"/>
-                          </a:solidFill>
-                          <a:effectLst/>
-                          <a:latin typeface="Segoe UI" panose="020B0502040204020203" pitchFamily="34" charset="0"/>
-                        </a:rPr>
-                        <a:t>Strong</a:t>
-                      </a:r>
-                      <a:r>
-                        <a:rPr lang="es-ES" sz="1500" b="0" i="0" cap="none" spc="0" dirty="0">
-                          <a:solidFill>
-                            <a:schemeClr val="tx1"/>
-                          </a:solidFill>
-                          <a:effectLst/>
-                          <a:latin typeface="Segoe UI" panose="020B0502040204020203" pitchFamily="34" charset="0"/>
-                        </a:rPr>
-                        <a:t> </a:t>
-                      </a:r>
-                      <a:r>
-                        <a:rPr lang="es-ES" sz="1500" b="0" i="0" cap="none" spc="0" dirty="0" err="1">
-                          <a:solidFill>
-                            <a:schemeClr val="tx1"/>
-                          </a:solidFill>
-                          <a:effectLst/>
-                          <a:latin typeface="Segoe UI" panose="020B0502040204020203" pitchFamily="34" charset="0"/>
-                        </a:rPr>
-                        <a:t>policy</a:t>
-                      </a:r>
-                      <a:r>
-                        <a:rPr lang="es-ES" sz="1500" b="0" i="0" cap="none" spc="0" dirty="0">
-                          <a:solidFill>
-                            <a:schemeClr val="tx1"/>
-                          </a:solidFill>
-                          <a:effectLst/>
-                          <a:latin typeface="Segoe UI" panose="020B0502040204020203" pitchFamily="34" charset="0"/>
-                        </a:rPr>
-                        <a:t> </a:t>
-                      </a:r>
-                      <a:r>
-                        <a:rPr lang="es-ES" sz="1500" b="0" i="0" cap="none" spc="0" dirty="0" err="1">
-                          <a:solidFill>
-                            <a:schemeClr val="tx1"/>
-                          </a:solidFill>
-                          <a:effectLst/>
-                          <a:latin typeface="Segoe UI" panose="020B0502040204020203" pitchFamily="34" charset="0"/>
-                        </a:rPr>
-                        <a:t>learning</a:t>
-                      </a:r>
-                      <a:r>
-                        <a:rPr lang="es-ES" sz="1500" b="0" i="0" cap="none" spc="0" dirty="0">
-                          <a:solidFill>
-                            <a:schemeClr val="tx1"/>
-                          </a:solidFill>
-                          <a:effectLst/>
-                          <a:latin typeface="Segoe UI" panose="020B0502040204020203" pitchFamily="34" charset="0"/>
-                        </a:rPr>
-                        <a:t>.</a:t>
-                      </a:r>
-                      <a:endParaRPr lang="es-ES" sz="1500" b="1" i="0" cap="none" spc="0" dirty="0">
-                        <a:solidFill>
-                          <a:schemeClr val="tx1"/>
-                        </a:solidFill>
-                        <a:effectLst/>
-                        <a:latin typeface="Segoe UI" panose="020B0502040204020203" pitchFamily="34" charset="0"/>
-                      </a:endParaRPr>
-                    </a:p>
-                    <a:p>
-                      <a:pPr fontAlgn="t">
-                        <a:lnSpc>
-                          <a:spcPts val="1500"/>
-                        </a:lnSpc>
-                        <a:buFont typeface="Arial" panose="020B0604020202020204" pitchFamily="34" charset="0"/>
-                        <a:buChar char="•"/>
-                      </a:pPr>
-                      <a:r>
-                        <a:rPr lang="es-ES" sz="1500" b="1" i="0" cap="none" spc="0" dirty="0">
-                          <a:solidFill>
-                            <a:schemeClr val="tx1"/>
-                          </a:solidFill>
-                          <a:effectLst/>
-                          <a:latin typeface="Segoe UI" panose="020B0502040204020203" pitchFamily="34" charset="0"/>
-                        </a:rPr>
-                        <a:t> </a:t>
-                      </a:r>
-                      <a:r>
-                        <a:rPr lang="es-ES" sz="1500" b="1" i="0" cap="none" spc="0" dirty="0" err="1">
-                          <a:solidFill>
-                            <a:schemeClr val="tx1"/>
-                          </a:solidFill>
-                          <a:effectLst/>
-                          <a:latin typeface="Segoe UI" panose="020B0502040204020203" pitchFamily="34" charset="0"/>
-                        </a:rPr>
-                        <a:t>Peak</a:t>
-                      </a:r>
-                      <a:r>
-                        <a:rPr lang="es-ES" sz="1500" b="1" i="0" cap="none" spc="0" dirty="0">
-                          <a:solidFill>
-                            <a:schemeClr val="tx1"/>
-                          </a:solidFill>
-                          <a:effectLst/>
-                          <a:latin typeface="Segoe UI" panose="020B0502040204020203" pitchFamily="34" charset="0"/>
-                        </a:rPr>
-                        <a:t> performance: </a:t>
-                      </a:r>
-                      <a:r>
-                        <a:rPr lang="es-ES" sz="1500" b="0" i="0" cap="none" spc="0" dirty="0">
-                          <a:solidFill>
-                            <a:schemeClr val="tx1"/>
-                          </a:solidFill>
-                          <a:effectLst/>
-                          <a:latin typeface="Segoe UI" panose="020B0502040204020203" pitchFamily="34" charset="0"/>
-                        </a:rPr>
-                        <a:t>931.1 </a:t>
-                      </a:r>
-                      <a:r>
-                        <a:rPr lang="es-ES" sz="1500" b="0" i="0" cap="none" spc="0" dirty="0" err="1">
-                          <a:solidFill>
-                            <a:schemeClr val="tx1"/>
-                          </a:solidFill>
-                          <a:effectLst/>
-                          <a:latin typeface="Segoe UI" panose="020B0502040204020203" pitchFamily="34" charset="0"/>
-                        </a:rPr>
-                        <a:t>reward</a:t>
-                      </a:r>
-                      <a:endParaRPr lang="es-ES" sz="1500" b="0" i="0" cap="none" spc="0" dirty="0">
-                        <a:solidFill>
-                          <a:schemeClr val="tx1"/>
-                        </a:solidFill>
-                        <a:effectLst/>
-                        <a:latin typeface="Segoe UI" panose="020B0502040204020203" pitchFamily="34" charset="0"/>
-                      </a:endParaRPr>
-                    </a:p>
-                  </a:txBody>
-                  <a:tcPr marL="117977" marR="117977" marT="117977" marB="58988">
-                    <a:lnL w="12700" cmpd="sng">
-                      <a:noFill/>
-                      <a:prstDash val="solid"/>
-                    </a:lnL>
-                    <a:lnR w="12700" cmpd="sng">
-                      <a:noFill/>
-                      <a:prstDash val="solid"/>
-                    </a:lnR>
-                    <a:lnT w="12700" cap="flat" cmpd="sng" algn="ctr">
-                      <a:solidFill>
-                        <a:schemeClr val="bg1">
-                          <a:lumMod val="75000"/>
-                        </a:schemeClr>
-                      </a:solidFill>
-                      <a:prstDash val="solid"/>
-                    </a:lnT>
-                    <a:lnB w="12700" cmpd="sng">
-                      <a:noFill/>
-                      <a:prstDash val="solid"/>
-                    </a:lnB>
-                    <a:solidFill>
-                      <a:srgbClr val="F2F2F2">
-                        <a:alpha val="45098"/>
-                      </a:srgbClr>
-                    </a:solidFill>
-                  </a:tcPr>
-                </a:tc>
-                <a:extLst>
-                  <a:ext uri="{0D108BD9-81ED-4DB2-BD59-A6C34878D82A}">
-                    <a16:rowId xmlns:a16="http://schemas.microsoft.com/office/drawing/2014/main" val="3306084499"/>
-                  </a:ext>
-                </a:extLst>
-              </a:tr>
-              <a:tr h="214722">
-                <a:tc>
-                  <a:txBody>
-                    <a:bodyPr/>
-                    <a:lstStyle/>
-                    <a:p>
-                      <a:endParaRPr lang="es-ES" sz="1500" cap="none" spc="0" dirty="0">
-                        <a:solidFill>
-                          <a:schemeClr val="tx1"/>
-                        </a:solidFill>
-                      </a:endParaRPr>
-                    </a:p>
-                  </a:txBody>
-                  <a:tcPr marL="117977" marR="117977" marT="117977" marB="58988">
-                    <a:lnL w="12700" cmpd="sng">
-                      <a:noFill/>
-                      <a:prstDash val="solid"/>
-                    </a:lnL>
-                    <a:lnR w="12700" cmpd="sng">
-                      <a:noFill/>
-                      <a:prstDash val="solid"/>
-                    </a:lnR>
-                    <a:lnT w="12700" cmpd="sng">
-                      <a:noFill/>
-                      <a:prstDash val="solid"/>
-                    </a:lnT>
-                    <a:lnB w="12700" cmpd="sng">
-                      <a:noFill/>
-                      <a:prstDash val="solid"/>
-                    </a:lnB>
-                    <a:solidFill>
-                      <a:srgbClr val="F2F2F2">
-                        <a:alpha val="45098"/>
-                      </a:srgbClr>
-                    </a:solidFill>
-                  </a:tcPr>
-                </a:tc>
-                <a:extLst>
-                  <a:ext uri="{0D108BD9-81ED-4DB2-BD59-A6C34878D82A}">
-                    <a16:rowId xmlns:a16="http://schemas.microsoft.com/office/drawing/2014/main" val="54006571"/>
-                  </a:ext>
-                </a:extLst>
-              </a:tr>
-            </a:tbl>
-          </a:graphicData>
-        </a:graphic>
-      </p:graphicFrame>
-    </p:spTree>
-    <p:extLst>
-      <p:ext uri="{BB962C8B-B14F-4D97-AF65-F5344CB8AC3E}">
-        <p14:creationId xmlns:p14="http://schemas.microsoft.com/office/powerpoint/2010/main" val="2853825434"/>
-      </p:ext>
-    </p:extLst>
-  </p:cSld>
-  <p:clrMapOvr>
-    <a:masterClrMapping/>
-  </p:clrMapOvr>
-</p:sld>
-</file>
-
 <file path=ppt/theme/theme1.xml><?xml version="1.0" encoding="utf-8"?>
 <a:theme xmlns:a="http://schemas.openxmlformats.org/drawingml/2006/main" name="Tema de Office">
   <a:themeElements>
@@ -21238,4 +22581,319 @@
     </a:ext>
   </a:extLst>
 </a:theme>
+</file>
+
+<file path=ppt/theme/theme2.xml><?xml version="1.0" encoding="utf-8"?>
+<a:theme xmlns:a="http://schemas.openxmlformats.org/drawingml/2006/main" name="Tema de Office">
+  <a:themeElements>
+    <a:clrScheme name="Office">
+      <a:dk1>
+        <a:sysClr val="windowText" lastClr="000000"/>
+      </a:dk1>
+      <a:lt1>
+        <a:sysClr val="window" lastClr="FFFFFF"/>
+      </a:lt1>
+      <a:dk2>
+        <a:srgbClr val="0E2841"/>
+      </a:dk2>
+      <a:lt2>
+        <a:srgbClr val="E8E8E8"/>
+      </a:lt2>
+      <a:accent1>
+        <a:srgbClr val="156082"/>
+      </a:accent1>
+      <a:accent2>
+        <a:srgbClr val="E97132"/>
+      </a:accent2>
+      <a:accent3>
+        <a:srgbClr val="196B24"/>
+      </a:accent3>
+      <a:accent4>
+        <a:srgbClr val="0F9ED5"/>
+      </a:accent4>
+      <a:accent5>
+        <a:srgbClr val="A02B93"/>
+      </a:accent5>
+      <a:accent6>
+        <a:srgbClr val="4EA72E"/>
+      </a:accent6>
+      <a:hlink>
+        <a:srgbClr val="467886"/>
+      </a:hlink>
+      <a:folHlink>
+        <a:srgbClr val="96607D"/>
+      </a:folHlink>
+    </a:clrScheme>
+    <a:fontScheme name="Office">
+      <a:majorFont>
+        <a:latin typeface="Aptos Display" panose="02110004020202020204"/>
+        <a:ea typeface=""/>
+        <a:cs typeface=""/>
+        <a:font script="Jpan" typeface="游ゴシック Light"/>
+        <a:font script="Hang" typeface="맑은 고딕"/>
+        <a:font script="Hans" typeface="等线 Light"/>
+        <a:font script="Hant" typeface="新細明體"/>
+        <a:font script="Arab" typeface="Times New Roman"/>
+        <a:font script="Hebr" typeface="Times New Roman"/>
+        <a:font script="Thai" typeface="Angsana New"/>
+        <a:font script="Ethi" typeface="Nyala"/>
+        <a:font script="Beng" typeface="Vrinda"/>
+        <a:font script="Gujr" typeface="Shruti"/>
+        <a:font script="Khmr" typeface="MoolBoran"/>
+        <a:font script="Knda" typeface="Tunga"/>
+        <a:font script="Guru" typeface="Raavi"/>
+        <a:font script="Cans" typeface="Euphemia"/>
+        <a:font script="Cher" typeface="Plantagenet Cherokee"/>
+        <a:font script="Yiii" typeface="Microsoft Yi Baiti"/>
+        <a:font script="Tibt" typeface="Microsoft Himalaya"/>
+        <a:font script="Thaa" typeface="MV Boli"/>
+        <a:font script="Deva" typeface="Mangal"/>
+        <a:font script="Telu" typeface="Gautami"/>
+        <a:font script="Taml" typeface="Latha"/>
+        <a:font script="Syrc" typeface="Estrangelo Edessa"/>
+        <a:font script="Orya" typeface="Kalinga"/>
+        <a:font script="Mlym" typeface="Kartika"/>
+        <a:font script="Laoo" typeface="DokChampa"/>
+        <a:font script="Sinh" typeface="Iskoola Pota"/>
+        <a:font script="Mong" typeface="Mongolian Baiti"/>
+        <a:font script="Viet" typeface="Times New Roman"/>
+        <a:font script="Uigh" typeface="Microsoft Uighur"/>
+        <a:font script="Geor" typeface="Sylfaen"/>
+        <a:font script="Armn" typeface="Arial"/>
+        <a:font script="Bugi" typeface="Leelawadee UI"/>
+        <a:font script="Bopo" typeface="Microsoft JhengHei"/>
+        <a:font script="Java" typeface="Javanese Text"/>
+        <a:font script="Lisu" typeface="Segoe UI"/>
+        <a:font script="Mymr" typeface="Myanmar Text"/>
+        <a:font script="Nkoo" typeface="Ebrima"/>
+        <a:font script="Olck" typeface="Nirmala UI"/>
+        <a:font script="Osma" typeface="Ebrima"/>
+        <a:font script="Phag" typeface="Phagspa"/>
+        <a:font script="Syrn" typeface="Estrangelo Edessa"/>
+        <a:font script="Syrj" typeface="Estrangelo Edessa"/>
+        <a:font script="Syre" typeface="Estrangelo Edessa"/>
+        <a:font script="Sora" typeface="Nirmala UI"/>
+        <a:font script="Tale" typeface="Microsoft Tai Le"/>
+        <a:font script="Talu" typeface="Microsoft New Tai Lue"/>
+        <a:font script="Tfng" typeface="Ebrima"/>
+      </a:majorFont>
+      <a:minorFont>
+        <a:latin typeface="Aptos" panose="02110004020202020204"/>
+        <a:ea typeface=""/>
+        <a:cs typeface=""/>
+        <a:font script="Jpan" typeface="游ゴシック"/>
+        <a:font script="Hang" typeface="맑은 고딕"/>
+        <a:font script="Hans" typeface="等线"/>
+        <a:font script="Hant" typeface="新細明體"/>
+        <a:font script="Arab" typeface="Arial"/>
+        <a:font script="Hebr" typeface="Arial"/>
+        <a:font script="Thai" typeface="Cordia New"/>
+        <a:font script="Ethi" typeface="Nyala"/>
+        <a:font script="Beng" typeface="Vrinda"/>
+        <a:font script="Gujr" typeface="Shruti"/>
+        <a:font script="Khmr" typeface="DaunPenh"/>
+        <a:font script="Knda" typeface="Tunga"/>
+        <a:font script="Guru" typeface="Raavi"/>
+        <a:font script="Cans" typeface="Euphemia"/>
+        <a:font script="Cher" typeface="Plantagenet Cherokee"/>
+        <a:font script="Yiii" typeface="Microsoft Yi Baiti"/>
+        <a:font script="Tibt" typeface="Microsoft Himalaya"/>
+        <a:font script="Thaa" typeface="MV Boli"/>
+        <a:font script="Deva" typeface="Mangal"/>
+        <a:font script="Telu" typeface="Gautami"/>
+        <a:font script="Taml" typeface="Latha"/>
+        <a:font script="Syrc" typeface="Estrangelo Edessa"/>
+        <a:font script="Orya" typeface="Kalinga"/>
+        <a:font script="Mlym" typeface="Kartika"/>
+        <a:font script="Laoo" typeface="DokChampa"/>
+        <a:font script="Sinh" typeface="Iskoola Pota"/>
+        <a:font script="Mong" typeface="Mongolian Baiti"/>
+        <a:font script="Viet" typeface="Arial"/>
+        <a:font script="Uigh" typeface="Microsoft Uighur"/>
+        <a:font script="Geor" typeface="Sylfaen"/>
+        <a:font script="Armn" typeface="Arial"/>
+        <a:font script="Bugi" typeface="Leelawadee UI"/>
+        <a:font script="Bopo" typeface="Microsoft JhengHei"/>
+        <a:font script="Java" typeface="Javanese Text"/>
+        <a:font script="Lisu" typeface="Segoe UI"/>
+        <a:font script="Mymr" typeface="Myanmar Text"/>
+        <a:font script="Nkoo" typeface="Ebrima"/>
+        <a:font script="Olck" typeface="Nirmala UI"/>
+        <a:font script="Osma" typeface="Ebrima"/>
+        <a:font script="Phag" typeface="Phagspa"/>
+        <a:font script="Syrn" typeface="Estrangelo Edessa"/>
+        <a:font script="Syrj" typeface="Estrangelo Edessa"/>
+        <a:font script="Syre" typeface="Estrangelo Edessa"/>
+        <a:font script="Sora" typeface="Nirmala UI"/>
+        <a:font script="Tale" typeface="Microsoft Tai Le"/>
+        <a:font script="Talu" typeface="Microsoft New Tai Lue"/>
+        <a:font script="Tfng" typeface="Ebrima"/>
+      </a:minorFont>
+    </a:fontScheme>
+    <a:fmtScheme name="Office">
+      <a:fillStyleLst>
+        <a:solidFill>
+          <a:schemeClr val="phClr"/>
+        </a:solidFill>
+        <a:gradFill rotWithShape="1">
+          <a:gsLst>
+            <a:gs pos="0">
+              <a:schemeClr val="phClr">
+                <a:lumMod val="110000"/>
+                <a:satMod val="105000"/>
+                <a:tint val="67000"/>
+              </a:schemeClr>
+            </a:gs>
+            <a:gs pos="50000">
+              <a:schemeClr val="phClr">
+                <a:lumMod val="105000"/>
+                <a:satMod val="103000"/>
+                <a:tint val="73000"/>
+              </a:schemeClr>
+            </a:gs>
+            <a:gs pos="100000">
+              <a:schemeClr val="phClr">
+                <a:lumMod val="105000"/>
+                <a:satMod val="109000"/>
+                <a:tint val="81000"/>
+              </a:schemeClr>
+            </a:gs>
+          </a:gsLst>
+          <a:lin ang="5400000" scaled="0"/>
+        </a:gradFill>
+        <a:gradFill rotWithShape="1">
+          <a:gsLst>
+            <a:gs pos="0">
+              <a:schemeClr val="phClr">
+                <a:satMod val="103000"/>
+                <a:lumMod val="102000"/>
+                <a:tint val="94000"/>
+              </a:schemeClr>
+            </a:gs>
+            <a:gs pos="50000">
+              <a:schemeClr val="phClr">
+                <a:satMod val="110000"/>
+                <a:lumMod val="100000"/>
+                <a:shade val="100000"/>
+              </a:schemeClr>
+            </a:gs>
+            <a:gs pos="100000">
+              <a:schemeClr val="phClr">
+                <a:lumMod val="99000"/>
+                <a:satMod val="120000"/>
+                <a:shade val="78000"/>
+              </a:schemeClr>
+            </a:gs>
+          </a:gsLst>
+          <a:lin ang="5400000" scaled="0"/>
+        </a:gradFill>
+      </a:fillStyleLst>
+      <a:lnStyleLst>
+        <a:ln w="12700" cap="flat" cmpd="sng" algn="ctr">
+          <a:solidFill>
+            <a:schemeClr val="phClr"/>
+          </a:solidFill>
+          <a:prstDash val="solid"/>
+          <a:miter lim="800000"/>
+        </a:ln>
+        <a:ln w="19050" cap="flat" cmpd="sng" algn="ctr">
+          <a:solidFill>
+            <a:schemeClr val="phClr"/>
+          </a:solidFill>
+          <a:prstDash val="solid"/>
+          <a:miter lim="800000"/>
+        </a:ln>
+        <a:ln w="25400" cap="flat" cmpd="sng" algn="ctr">
+          <a:solidFill>
+            <a:schemeClr val="phClr"/>
+          </a:solidFill>
+          <a:prstDash val="solid"/>
+          <a:miter lim="800000"/>
+        </a:ln>
+      </a:lnStyleLst>
+      <a:effectStyleLst>
+        <a:effectStyle>
+          <a:effectLst/>
+        </a:effectStyle>
+        <a:effectStyle>
+          <a:effectLst/>
+        </a:effectStyle>
+        <a:effectStyle>
+          <a:effectLst>
+            <a:outerShdw blurRad="57150" dist="19050" dir="5400000" algn="ctr" rotWithShape="0">
+              <a:srgbClr val="000000">
+                <a:alpha val="63000"/>
+              </a:srgbClr>
+            </a:outerShdw>
+          </a:effectLst>
+        </a:effectStyle>
+      </a:effectStyleLst>
+      <a:bgFillStyleLst>
+        <a:solidFill>
+          <a:schemeClr val="phClr"/>
+        </a:solidFill>
+        <a:solidFill>
+          <a:schemeClr val="phClr">
+            <a:tint val="95000"/>
+            <a:satMod val="170000"/>
+          </a:schemeClr>
+        </a:solidFill>
+        <a:gradFill rotWithShape="1">
+          <a:gsLst>
+            <a:gs pos="0">
+              <a:schemeClr val="phClr">
+                <a:tint val="93000"/>
+                <a:satMod val="150000"/>
+                <a:shade val="98000"/>
+                <a:lumMod val="102000"/>
+              </a:schemeClr>
+            </a:gs>
+            <a:gs pos="50000">
+              <a:schemeClr val="phClr">
+                <a:tint val="98000"/>
+                <a:satMod val="130000"/>
+                <a:shade val="90000"/>
+                <a:lumMod val="103000"/>
+              </a:schemeClr>
+            </a:gs>
+            <a:gs pos="100000">
+              <a:schemeClr val="phClr">
+                <a:shade val="63000"/>
+                <a:satMod val="120000"/>
+              </a:schemeClr>
+            </a:gs>
+          </a:gsLst>
+          <a:lin ang="5400000" scaled="0"/>
+        </a:gradFill>
+      </a:bgFillStyleLst>
+    </a:fmtScheme>
+  </a:themeElements>
+  <a:objectDefaults>
+    <a:lnDef>
+      <a:spPr/>
+      <a:bodyPr/>
+      <a:lstStyle/>
+      <a:style>
+        <a:lnRef idx="2">
+          <a:schemeClr val="accent1"/>
+        </a:lnRef>
+        <a:fillRef idx="0">
+          <a:schemeClr val="accent1"/>
+        </a:fillRef>
+        <a:effectRef idx="1">
+          <a:schemeClr val="accent1"/>
+        </a:effectRef>
+        <a:fontRef idx="minor">
+          <a:schemeClr val="tx1"/>
+        </a:fontRef>
+      </a:style>
+    </a:lnDef>
+  </a:objectDefaults>
+  <a:extraClrSchemeLst/>
+  <a:extLst>
+    <a:ext uri="{05A4C25C-085E-4340-85A3-A5531E510DB2}">
+      <thm15:themeFamily xmlns:thm15="http://schemas.microsoft.com/office/thememl/2012/main" name="Office Theme" id="{2E142A2C-CD16-42D6-873A-C26D2A0506FA}" vid="{1BDDFF52-6CD6-40A5-AB3C-68EB2F1E4D0A}"/>
+    </a:ext>
+  </a:extLst>
+</a:theme>
 </file>